--- a/SIH2024_GTU_Alert_System_Presentation.pptx
+++ b/SIH2024_GTU_Alert_System_Presentation.pptx
@@ -3149,7 +3149,7 @@
         <p:spPr>
           <a:xfrm>
             <a:off x="0" y="0"/>
-            <a:ext cx="12191695" cy="2011680"/>
+            <a:ext cx="12191695" cy="1965960"/>
           </a:xfrm>
           <a:prstGeom prst="rect">
             <a:avLst/>
@@ -3191,8 +3191,8 @@
         </p:nvSpPr>
         <p:spPr>
           <a:xfrm>
-            <a:off x="0" y="2011680"/>
-            <a:ext cx="12191695" cy="91440"/>
+            <a:off x="0" y="1965960"/>
+            <a:ext cx="12191695" cy="73152"/>
           </a:xfrm>
           <a:prstGeom prst="rect">
             <a:avLst/>
@@ -3234,8 +3234,8 @@
         </p:nvSpPr>
         <p:spPr>
           <a:xfrm>
-            <a:off x="731520" y="274320"/>
-            <a:ext cx="10698480" cy="365760"/>
+            <a:off x="594360" y="228600"/>
+            <a:ext cx="10972800" cy="365760"/>
           </a:xfrm>
           <a:prstGeom prst="rect">
             <a:avLst/>
@@ -3249,7 +3249,7 @@
           <a:lstStyle/>
           <a:p>
             <a:pPr>
-              <a:defRPr sz="1200" b="1">
+              <a:defRPr sz="1300" b="1">
                 <a:solidFill>
                   <a:srgbClr val="F97316"/>
                 </a:solidFill>
@@ -3269,8 +3269,8 @@
         </p:nvSpPr>
         <p:spPr>
           <a:xfrm>
-            <a:off x="731520" y="640080"/>
-            <a:ext cx="10698480" cy="1188720"/>
+            <a:off x="594360" y="594360"/>
+            <a:ext cx="10972800" cy="1280160"/>
           </a:xfrm>
           <a:prstGeom prst="rect">
             <a:avLst/>
@@ -3284,7 +3284,7 @@
           <a:lstStyle/>
           <a:p>
             <a:pPr>
-              <a:defRPr sz="3200" b="1">
+              <a:defRPr sz="3400" b="1">
                 <a:solidFill>
                   <a:srgbClr val="FFFFFF"/>
                 </a:solidFill>
@@ -3299,7 +3299,7 @@
               <a:spcBef>
                 <a:spcPts val="400"/>
               </a:spcBef>
-              <a:defRPr sz="1500">
+              <a:defRPr sz="1650">
                 <a:solidFill>
                   <a:srgbClr val="BFDBFE"/>
                 </a:solidFill>
@@ -3319,8 +3319,8 @@
         </p:nvSpPr>
         <p:spPr>
           <a:xfrm>
-            <a:off x="731520" y="2377440"/>
-            <a:ext cx="2468880" cy="3840480"/>
+            <a:off x="594360" y="2148840"/>
+            <a:ext cx="2578608" cy="4206240"/>
           </a:xfrm>
           <a:prstGeom prst="roundRect">
             <a:avLst/>
@@ -3328,9 +3328,9 @@
           <a:solidFill>
             <a:srgbClr val="FFFFFF"/>
           </a:solidFill>
-          <a:ln w="15240">
+          <a:ln w="19050">
             <a:solidFill>
-              <a:srgbClr val="E2E8F0"/>
+              <a:srgbClr val="CBD5E1"/>
             </a:solidFill>
           </a:ln>
         </p:spPr>
@@ -3364,8 +3364,8 @@
         </p:nvSpPr>
         <p:spPr>
           <a:xfrm>
-            <a:off x="731520" y="2377440"/>
-            <a:ext cx="2468880" cy="502920"/>
+            <a:off x="594360" y="2148840"/>
+            <a:ext cx="2578608" cy="530352"/>
           </a:xfrm>
           <a:prstGeom prst="roundRect">
             <a:avLst/>
@@ -3407,8 +3407,8 @@
         </p:nvSpPr>
         <p:spPr>
           <a:xfrm>
-            <a:off x="914400" y="2450592"/>
-            <a:ext cx="2103120" cy="411480"/>
+            <a:off x="777240" y="2203704"/>
+            <a:ext cx="2212848" cy="457200"/>
           </a:xfrm>
           <a:prstGeom prst="rect">
             <a:avLst/>
@@ -3422,7 +3422,7 @@
           <a:lstStyle/>
           <a:p>
             <a:pPr>
-              <a:defRPr sz="1300" b="1">
+              <a:defRPr sz="1550" b="1">
                 <a:solidFill>
                   <a:srgbClr val="FFFFFF"/>
                 </a:solidFill>
@@ -3442,8 +3442,8 @@
         </p:nvSpPr>
         <p:spPr>
           <a:xfrm>
-            <a:off x="914400" y="2971800"/>
-            <a:ext cx="2103120" cy="3154680"/>
+            <a:off x="777240" y="2788920"/>
+            <a:ext cx="2212848" cy="3493008"/>
           </a:xfrm>
           <a:prstGeom prst="rect">
             <a:avLst/>
@@ -3458,24 +3458,24 @@
           <a:p>
             <a:pPr>
               <a:spcAft>
-                <a:spcPts val="700"/>
-              </a:spcAft>
-              <a:defRPr sz="1100">
-                <a:solidFill>
-                  <a:srgbClr val="0F172A"/>
-                </a:solidFill>
-              </a:defRPr>
-            </a:pPr>
-            <a:r>
-              <a:t>•  PS ID: SIH-EDU-042</a:t>
-            </a:r>
-          </a:p>
-          <a:p>
-            <a:pPr>
-              <a:spcAft>
-                <a:spcPts val="700"/>
-              </a:spcAft>
-              <a:defRPr sz="1100">
+                <a:spcPts val="900"/>
+              </a:spcAft>
+              <a:defRPr sz="1200">
+                <a:solidFill>
+                  <a:srgbClr val="0F172A"/>
+                </a:solidFill>
+              </a:defRPr>
+            </a:pPr>
+            <a:r>
+              <a:t>•  Problem ID: SIH-EDU-042</a:t>
+            </a:r>
+          </a:p>
+          <a:p>
+            <a:pPr>
+              <a:spcAft>
+                <a:spcPts val="900"/>
+              </a:spcAft>
+              <a:defRPr sz="1200">
                 <a:solidFill>
                   <a:srgbClr val="0F172A"/>
                 </a:solidFill>
@@ -3488,9 +3488,9 @@
           <a:p>
             <a:pPr>
               <a:spcAft>
-                <a:spcPts val="700"/>
-              </a:spcAft>
-              <a:defRPr sz="1100">
+                <a:spcPts val="900"/>
+              </a:spcAft>
+              <a:defRPr sz="1200">
                 <a:solidFill>
                   <a:srgbClr val="0F172A"/>
                 </a:solidFill>
@@ -3503,9 +3503,9 @@
           <a:p>
             <a:pPr>
               <a:spcAft>
-                <a:spcPts val="700"/>
-              </a:spcAft>
-              <a:defRPr sz="1100">
+                <a:spcPts val="900"/>
+              </a:spcAft>
+              <a:defRPr sz="1200">
                 <a:solidFill>
                   <a:srgbClr val="0F172A"/>
                 </a:solidFill>
@@ -3518,16 +3518,16 @@
           <a:p>
             <a:pPr>
               <a:spcAft>
-                <a:spcPts val="700"/>
-              </a:spcAft>
-              <a:defRPr sz="1100">
-                <a:solidFill>
-                  <a:srgbClr val="0F172A"/>
-                </a:solidFill>
-              </a:defRPr>
-            </a:pPr>
-            <a:r>
-              <a:t>•  Target: 4,00,000+ GTU Students &amp; 400+ Colleges</a:t>
+                <a:spcPts val="900"/>
+              </a:spcAft>
+              <a:defRPr sz="1200">
+                <a:solidFill>
+                  <a:srgbClr val="0F172A"/>
+                </a:solidFill>
+              </a:defRPr>
+            </a:pPr>
+            <a:r>
+              <a:t>•  Target Audience: 4,00,000+ GTU Students across 400+ Colleges</a:t>
             </a:r>
           </a:p>
         </p:txBody>
@@ -3540,8 +3540,8 @@
         </p:nvSpPr>
         <p:spPr>
           <a:xfrm>
-            <a:off x="3474720" y="2377440"/>
-            <a:ext cx="2468880" cy="3840480"/>
+            <a:off x="3392424" y="2148840"/>
+            <a:ext cx="2578608" cy="4206240"/>
           </a:xfrm>
           <a:prstGeom prst="roundRect">
             <a:avLst/>
@@ -3549,9 +3549,9 @@
           <a:solidFill>
             <a:srgbClr val="FFFFFF"/>
           </a:solidFill>
-          <a:ln w="15240">
+          <a:ln w="19050">
             <a:solidFill>
-              <a:srgbClr val="E2E8F0"/>
+              <a:srgbClr val="CBD5E1"/>
             </a:solidFill>
           </a:ln>
         </p:spPr>
@@ -3585,8 +3585,8 @@
         </p:nvSpPr>
         <p:spPr>
           <a:xfrm>
-            <a:off x="3474720" y="2377440"/>
-            <a:ext cx="2468880" cy="502920"/>
+            <a:off x="3392424" y="2148840"/>
+            <a:ext cx="2578608" cy="530352"/>
           </a:xfrm>
           <a:prstGeom prst="roundRect">
             <a:avLst/>
@@ -3628,8 +3628,8 @@
         </p:nvSpPr>
         <p:spPr>
           <a:xfrm>
-            <a:off x="3657600" y="2450592"/>
-            <a:ext cx="2103120" cy="411480"/>
+            <a:off x="3575304" y="2203704"/>
+            <a:ext cx="2212848" cy="457200"/>
           </a:xfrm>
           <a:prstGeom prst="rect">
             <a:avLst/>
@@ -3643,7 +3643,7 @@
           <a:lstStyle/>
           <a:p>
             <a:pPr>
-              <a:defRPr sz="1300" b="1">
+              <a:defRPr sz="1550" b="1">
                 <a:solidFill>
                   <a:srgbClr val="FFFFFF"/>
                 </a:solidFill>
@@ -3663,8 +3663,8 @@
         </p:nvSpPr>
         <p:spPr>
           <a:xfrm>
-            <a:off x="3657600" y="2971800"/>
-            <a:ext cx="2103120" cy="3154680"/>
+            <a:off x="3575304" y="2788920"/>
+            <a:ext cx="2212848" cy="3493008"/>
           </a:xfrm>
           <a:prstGeom prst="rect">
             <a:avLst/>
@@ -3679,9 +3679,9 @@
           <a:p>
             <a:pPr>
               <a:spcAft>
-                <a:spcPts val="700"/>
-              </a:spcAft>
-              <a:defRPr sz="1100">
+                <a:spcPts val="900"/>
+              </a:spcAft>
+              <a:defRPr sz="1200">
                 <a:solidFill>
                   <a:srgbClr val="0F172A"/>
                 </a:solidFill>
@@ -3694,9 +3694,9 @@
           <a:p>
             <a:pPr>
               <a:spcAft>
-                <a:spcPts val="700"/>
-              </a:spcAft>
-              <a:defRPr sz="1100">
+                <a:spcPts val="900"/>
+              </a:spcAft>
+              <a:defRPr sz="1200">
                 <a:solidFill>
                   <a:srgbClr val="0F172A"/>
                 </a:solidFill>
@@ -3709,9 +3709,9 @@
           <a:p>
             <a:pPr>
               <a:spcAft>
-                <a:spcPts val="700"/>
-              </a:spcAft>
-              <a:defRPr sz="1100">
+                <a:spcPts val="900"/>
+              </a:spcAft>
+              <a:defRPr sz="1200">
                 <a:solidFill>
                   <a:srgbClr val="0F172A"/>
                 </a:solidFill>
@@ -3724,9 +3724,9 @@
           <a:p>
             <a:pPr>
               <a:spcAft>
-                <a:spcPts val="700"/>
-              </a:spcAft>
-              <a:defRPr sz="1100">
+                <a:spcPts val="900"/>
+              </a:spcAft>
+              <a:defRPr sz="1200">
                 <a:solidFill>
                   <a:srgbClr val="0F172A"/>
                 </a:solidFill>
@@ -3739,16 +3739,16 @@
           <a:p>
             <a:pPr>
               <a:spcAft>
-                <a:spcPts val="700"/>
-              </a:spcAft>
-              <a:defRPr sz="1100">
-                <a:solidFill>
-                  <a:srgbClr val="0F172A"/>
-                </a:solidFill>
-              </a:defRPr>
-            </a:pPr>
-            <a:r>
-              <a:t>•  AI Summarizer gives 1-sentence instant takeaways.</a:t>
+                <a:spcPts val="900"/>
+              </a:spcAft>
+              <a:defRPr sz="1200">
+                <a:solidFill>
+                  <a:srgbClr val="0F172A"/>
+                </a:solidFill>
+              </a:defRPr>
+            </a:pPr>
+            <a:r>
+              <a:t>•  AI Summarizer delivers 1-sentence instant takeaways.</a:t>
             </a:r>
           </a:p>
         </p:txBody>
@@ -3761,8 +3761,8 @@
         </p:nvSpPr>
         <p:spPr>
           <a:xfrm>
-            <a:off x="6217920" y="2377440"/>
-            <a:ext cx="2468880" cy="3840480"/>
+            <a:off x="6190488" y="2148840"/>
+            <a:ext cx="2578608" cy="4206240"/>
           </a:xfrm>
           <a:prstGeom prst="roundRect">
             <a:avLst/>
@@ -3770,9 +3770,9 @@
           <a:solidFill>
             <a:srgbClr val="FFFFFF"/>
           </a:solidFill>
-          <a:ln w="15240">
+          <a:ln w="19050">
             <a:solidFill>
-              <a:srgbClr val="E2E8F0"/>
+              <a:srgbClr val="CBD5E1"/>
             </a:solidFill>
           </a:ln>
         </p:spPr>
@@ -3806,8 +3806,8 @@
         </p:nvSpPr>
         <p:spPr>
           <a:xfrm>
-            <a:off x="6217920" y="2377440"/>
-            <a:ext cx="2468880" cy="502920"/>
+            <a:off x="6190488" y="2148840"/>
+            <a:ext cx="2578608" cy="530352"/>
           </a:xfrm>
           <a:prstGeom prst="roundRect">
             <a:avLst/>
@@ -3849,8 +3849,8 @@
         </p:nvSpPr>
         <p:spPr>
           <a:xfrm>
-            <a:off x="6400800" y="2450592"/>
-            <a:ext cx="2103120" cy="411480"/>
+            <a:off x="6373368" y="2203704"/>
+            <a:ext cx="2212848" cy="457200"/>
           </a:xfrm>
           <a:prstGeom prst="rect">
             <a:avLst/>
@@ -3864,7 +3864,7 @@
           <a:lstStyle/>
           <a:p>
             <a:pPr>
-              <a:defRPr sz="1300" b="1">
+              <a:defRPr sz="1550" b="1">
                 <a:solidFill>
                   <a:srgbClr val="FFFFFF"/>
                 </a:solidFill>
@@ -3884,8 +3884,8 @@
         </p:nvSpPr>
         <p:spPr>
           <a:xfrm>
-            <a:off x="6400800" y="2971800"/>
-            <a:ext cx="2103120" cy="3154680"/>
+            <a:off x="6373368" y="2788920"/>
+            <a:ext cx="2212848" cy="3493008"/>
           </a:xfrm>
           <a:prstGeom prst="rect">
             <a:avLst/>
@@ -3900,9 +3900,9 @@
           <a:p>
             <a:pPr>
               <a:spcAft>
-                <a:spcPts val="700"/>
-              </a:spcAft>
-              <a:defRPr sz="1100">
+                <a:spcPts val="900"/>
+              </a:spcAft>
+              <a:defRPr sz="1200">
                 <a:solidFill>
                   <a:srgbClr val="0F172A"/>
                 </a:solidFill>
@@ -3915,9 +3915,9 @@
           <a:p>
             <a:pPr>
               <a:spcAft>
-                <a:spcPts val="700"/>
-              </a:spcAft>
-              <a:defRPr sz="1100">
+                <a:spcPts val="900"/>
+              </a:spcAft>
+              <a:defRPr sz="1200">
                 <a:solidFill>
                   <a:srgbClr val="0F172A"/>
                 </a:solidFill>
@@ -3930,9 +3930,9 @@
           <a:p>
             <a:pPr>
               <a:spcAft>
-                <a:spcPts val="700"/>
-              </a:spcAft>
-              <a:defRPr sz="1100">
+                <a:spcPts val="900"/>
+              </a:spcAft>
+              <a:defRPr sz="1200">
                 <a:solidFill>
                   <a:srgbClr val="0F172A"/>
                 </a:solidFill>
@@ -3945,9 +3945,9 @@
           <a:p>
             <a:pPr>
               <a:spcAft>
-                <a:spcPts val="700"/>
-              </a:spcAft>
-              <a:defRPr sz="1100">
+                <a:spcPts val="900"/>
+              </a:spcAft>
+              <a:defRPr sz="1200">
                 <a:solidFill>
                   <a:srgbClr val="0F172A"/>
                 </a:solidFill>
@@ -3960,9 +3960,9 @@
           <a:p>
             <a:pPr>
               <a:spcAft>
-                <a:spcPts val="700"/>
-              </a:spcAft>
-              <a:defRPr sz="1100">
+                <a:spcPts val="900"/>
+              </a:spcAft>
+              <a:defRPr sz="1200">
                 <a:solidFill>
                   <a:srgbClr val="0F172A"/>
                 </a:solidFill>
@@ -3975,9 +3975,9 @@
           <a:p>
             <a:pPr>
               <a:spcAft>
-                <a:spcPts val="700"/>
-              </a:spcAft>
-              <a:defRPr sz="1100">
+                <a:spcPts val="900"/>
+              </a:spcAft>
+              <a:defRPr sz="1200">
                 <a:solidFill>
                   <a:srgbClr val="0F172A"/>
                 </a:solidFill>
@@ -3997,8 +3997,8 @@
         </p:nvSpPr>
         <p:spPr>
           <a:xfrm>
-            <a:off x="8961120" y="2377440"/>
-            <a:ext cx="2468880" cy="3840480"/>
+            <a:off x="8988552" y="2148840"/>
+            <a:ext cx="2578608" cy="4206240"/>
           </a:xfrm>
           <a:prstGeom prst="roundRect">
             <a:avLst/>
@@ -4006,9 +4006,9 @@
           <a:solidFill>
             <a:srgbClr val="FFFFFF"/>
           </a:solidFill>
-          <a:ln w="15240">
+          <a:ln w="19050">
             <a:solidFill>
-              <a:srgbClr val="E2E8F0"/>
+              <a:srgbClr val="CBD5E1"/>
             </a:solidFill>
           </a:ln>
         </p:spPr>
@@ -4042,8 +4042,8 @@
         </p:nvSpPr>
         <p:spPr>
           <a:xfrm>
-            <a:off x="8961120" y="2377440"/>
-            <a:ext cx="2468880" cy="502920"/>
+            <a:off x="8988552" y="2148840"/>
+            <a:ext cx="2578608" cy="530352"/>
           </a:xfrm>
           <a:prstGeom prst="roundRect">
             <a:avLst/>
@@ -4085,8 +4085,8 @@
         </p:nvSpPr>
         <p:spPr>
           <a:xfrm>
-            <a:off x="9144000" y="2450592"/>
-            <a:ext cx="2103120" cy="411480"/>
+            <a:off x="9171432" y="2203704"/>
+            <a:ext cx="2212848" cy="457200"/>
           </a:xfrm>
           <a:prstGeom prst="rect">
             <a:avLst/>
@@ -4100,7 +4100,7 @@
           <a:lstStyle/>
           <a:p>
             <a:pPr>
-              <a:defRPr sz="1300" b="1">
+              <a:defRPr sz="1550" b="1">
                 <a:solidFill>
                   <a:srgbClr val="FFFFFF"/>
                 </a:solidFill>
@@ -4120,8 +4120,8 @@
         </p:nvSpPr>
         <p:spPr>
           <a:xfrm>
-            <a:off x="9144000" y="2971800"/>
-            <a:ext cx="2103120" cy="3154680"/>
+            <a:off x="9171432" y="2788920"/>
+            <a:ext cx="2212848" cy="3493008"/>
           </a:xfrm>
           <a:prstGeom prst="rect">
             <a:avLst/>
@@ -4136,9 +4136,9 @@
           <a:p>
             <a:pPr>
               <a:spcAft>
-                <a:spcPts val="700"/>
-              </a:spcAft>
-              <a:defRPr sz="1100">
+                <a:spcPts val="900"/>
+              </a:spcAft>
+              <a:defRPr sz="1200">
                 <a:solidFill>
                   <a:srgbClr val="0F172A"/>
                 </a:solidFill>
@@ -4151,9 +4151,9 @@
           <a:p>
             <a:pPr>
               <a:spcAft>
-                <a:spcPts val="700"/>
-              </a:spcAft>
-              <a:defRPr sz="1100">
+                <a:spcPts val="900"/>
+              </a:spcAft>
+              <a:defRPr sz="1200">
                 <a:solidFill>
                   <a:srgbClr val="0F172A"/>
                 </a:solidFill>
@@ -4166,9 +4166,9 @@
           <a:p>
             <a:pPr>
               <a:spcAft>
-                <a:spcPts val="700"/>
-              </a:spcAft>
-              <a:defRPr sz="1100">
+                <a:spcPts val="900"/>
+              </a:spcAft>
+              <a:defRPr sz="1200">
                 <a:solidFill>
                   <a:srgbClr val="0F172A"/>
                 </a:solidFill>
@@ -4181,9 +4181,9 @@
           <a:p>
             <a:pPr>
               <a:spcAft>
-                <a:spcPts val="700"/>
-              </a:spcAft>
-              <a:defRPr sz="1100">
+                <a:spcPts val="900"/>
+              </a:spcAft>
+              <a:defRPr sz="1200">
                 <a:solidFill>
                   <a:srgbClr val="0F172A"/>
                 </a:solidFill>
@@ -4196,9 +4196,9 @@
           <a:p>
             <a:pPr>
               <a:spcAft>
-                <a:spcPts val="700"/>
-              </a:spcAft>
-              <a:defRPr sz="1100">
+                <a:spcPts val="900"/>
+              </a:spcAft>
+              <a:defRPr sz="1200">
                 <a:solidFill>
                   <a:srgbClr val="0F172A"/>
                 </a:solidFill>
@@ -4211,16 +4211,16 @@
           <a:p>
             <a:pPr>
               <a:spcAft>
-                <a:spcPts val="700"/>
-              </a:spcAft>
-              <a:defRPr sz="1100">
-                <a:solidFill>
-                  <a:srgbClr val="0F172A"/>
-                </a:solidFill>
-              </a:defRPr>
-            </a:pPr>
-            <a:r>
-              <a:t>•  Mentor: [Faculty / Guide Name]</a:t>
+                <a:spcPts val="900"/>
+              </a:spcAft>
+              <a:defRPr sz="1200">
+                <a:solidFill>
+                  <a:srgbClr val="0F172A"/>
+                </a:solidFill>
+              </a:defRPr>
+            </a:pPr>
+            <a:r>
+              <a:t>•  Faculty Mentor: [Guide / HOD Name]</a:t>
             </a:r>
           </a:p>
         </p:txBody>
@@ -4295,7 +4295,7 @@
         <p:spPr>
           <a:xfrm>
             <a:off x="0" y="0"/>
-            <a:ext cx="12191695" cy="1051560"/>
+            <a:ext cx="12191695" cy="1078992"/>
           </a:xfrm>
           <a:prstGeom prst="rect">
             <a:avLst/>
@@ -4337,8 +4337,8 @@
         </p:nvSpPr>
         <p:spPr>
           <a:xfrm>
-            <a:off x="0" y="1051560"/>
-            <a:ext cx="12191695" cy="54864"/>
+            <a:off x="0" y="1078992"/>
+            <a:ext cx="12191695" cy="64008"/>
           </a:xfrm>
           <a:prstGeom prst="rect">
             <a:avLst/>
@@ -4380,8 +4380,8 @@
         </p:nvSpPr>
         <p:spPr>
           <a:xfrm>
-            <a:off x="7772400" y="182880"/>
-            <a:ext cx="3931920" cy="685800"/>
+            <a:off x="7498079" y="164592"/>
+            <a:ext cx="4114800" cy="777240"/>
           </a:xfrm>
           <a:prstGeom prst="rect">
             <a:avLst/>
@@ -4395,7 +4395,7 @@
           <a:lstStyle/>
           <a:p>
             <a:pPr algn="r">
-              <a:defRPr sz="950" b="1">
+              <a:defRPr sz="1100" b="1">
                 <a:solidFill>
                   <a:srgbClr val="F97316"/>
                 </a:solidFill>
@@ -4419,8 +4419,8 @@
         </p:nvSpPr>
         <p:spPr>
           <a:xfrm>
-            <a:off x="731520" y="228600"/>
-            <a:ext cx="6858000" cy="640080"/>
+            <a:off x="594360" y="201168"/>
+            <a:ext cx="6858000" cy="685800"/>
           </a:xfrm>
           <a:prstGeom prst="rect">
             <a:avLst/>
@@ -4434,7 +4434,7 @@
           <a:lstStyle/>
           <a:p>
             <a:pPr>
-              <a:defRPr sz="2200" b="1">
+              <a:defRPr sz="2400" b="1">
                 <a:solidFill>
                   <a:srgbClr val="FFFFFF"/>
                 </a:solidFill>
@@ -4454,8 +4454,8 @@
         </p:nvSpPr>
         <p:spPr>
           <a:xfrm>
-            <a:off x="0" y="6492240"/>
-            <a:ext cx="12191695" cy="365760"/>
+            <a:off x="0" y="6473952"/>
+            <a:ext cx="12191695" cy="384048"/>
           </a:xfrm>
           <a:prstGeom prst="rect">
             <a:avLst/>
@@ -4465,7 +4465,7 @@
           </a:solidFill>
           <a:ln>
             <a:solidFill>
-              <a:srgbClr val="E2E8F0"/>
+              <a:srgbClr val="CBD5E1"/>
             </a:solidFill>
           </a:ln>
         </p:spPr>
@@ -4499,8 +4499,8 @@
         </p:nvSpPr>
         <p:spPr>
           <a:xfrm>
-            <a:off x="731520" y="6510528"/>
-            <a:ext cx="7315200" cy="320040"/>
+            <a:off x="594360" y="6510528"/>
+            <a:ext cx="7772400" cy="320040"/>
           </a:xfrm>
           <a:prstGeom prst="rect">
             <a:avLst/>
@@ -4514,7 +4514,7 @@
           <a:lstStyle/>
           <a:p>
             <a:pPr>
-              <a:defRPr sz="950">
+              <a:defRPr sz="1050">
                 <a:solidFill>
                   <a:srgbClr val="64748B"/>
                 </a:solidFill>
@@ -4535,7 +4535,7 @@
         <p:spPr>
           <a:xfrm>
             <a:off x="9601200" y="6510528"/>
-            <a:ext cx="1828800" cy="320040"/>
+            <a:ext cx="2011680" cy="320040"/>
           </a:xfrm>
           <a:prstGeom prst="rect">
             <a:avLst/>
@@ -4549,7 +4549,7 @@
           <a:lstStyle/>
           <a:p>
             <a:pPr algn="r">
-              <a:defRPr sz="950" b="1">
+              <a:defRPr sz="1100" b="1">
                 <a:solidFill>
                   <a:srgbClr val="0F2557"/>
                 </a:solidFill>
@@ -4569,8 +4569,8 @@
         </p:nvSpPr>
         <p:spPr>
           <a:xfrm>
-            <a:off x="731520" y="1371600"/>
-            <a:ext cx="5212080" cy="3017520"/>
+            <a:off x="594360" y="1234440"/>
+            <a:ext cx="5376672" cy="3108960"/>
           </a:xfrm>
           <a:prstGeom prst="roundRect">
             <a:avLst/>
@@ -4578,9 +4578,9 @@
           <a:solidFill>
             <a:srgbClr val="FFFFFF"/>
           </a:solidFill>
-          <a:ln w="15240">
+          <a:ln w="19050">
             <a:solidFill>
-              <a:srgbClr val="E2E8F0"/>
+              <a:srgbClr val="CBD5E1"/>
             </a:solidFill>
           </a:ln>
         </p:spPr>
@@ -4614,8 +4614,8 @@
         </p:nvSpPr>
         <p:spPr>
           <a:xfrm>
-            <a:off x="731520" y="1371600"/>
-            <a:ext cx="5212080" cy="502920"/>
+            <a:off x="594360" y="1234440"/>
+            <a:ext cx="5376672" cy="621792"/>
           </a:xfrm>
           <a:prstGeom prst="roundRect">
             <a:avLst/>
@@ -4657,8 +4657,8 @@
         </p:nvSpPr>
         <p:spPr>
           <a:xfrm>
-            <a:off x="914400" y="1444752"/>
-            <a:ext cx="4846320" cy="411480"/>
+            <a:off x="777240" y="1289304"/>
+            <a:ext cx="5010912" cy="548640"/>
           </a:xfrm>
           <a:prstGeom prst="rect">
             <a:avLst/>
@@ -4672,7 +4672,7 @@
           <a:lstStyle/>
           <a:p>
             <a:pPr>
-              <a:defRPr sz="1300" b="1">
+              <a:defRPr sz="1550" b="1">
                 <a:solidFill>
                   <a:srgbClr val="FFFFFF"/>
                 </a:solidFill>
@@ -4684,9 +4684,9 @@
           </a:p>
           <a:p>
             <a:pPr>
-              <a:defRPr sz="900">
-                <a:solidFill>
-                  <a:srgbClr val="DCEBFF"/>
+              <a:defRPr sz="1000" b="1">
+                <a:solidFill>
+                  <a:srgbClr val="E0F2FE"/>
                 </a:solidFill>
               </a:defRPr>
             </a:pPr>
@@ -4704,8 +4704,8 @@
         </p:nvSpPr>
         <p:spPr>
           <a:xfrm>
-            <a:off x="914400" y="1965960"/>
-            <a:ext cx="4846320" cy="2331720"/>
+            <a:off x="777240" y="1965960"/>
+            <a:ext cx="5010912" cy="2304288"/>
           </a:xfrm>
           <a:prstGeom prst="rect">
             <a:avLst/>
@@ -4720,9 +4720,9 @@
           <a:p>
             <a:pPr>
               <a:spcAft>
-                <a:spcPts val="700"/>
-              </a:spcAft>
-              <a:defRPr sz="1100">
+                <a:spcPts val="900"/>
+              </a:spcAft>
+              <a:defRPr sz="1300">
                 <a:solidFill>
                   <a:srgbClr val="0F172A"/>
                 </a:solidFill>
@@ -4735,9 +4735,9 @@
           <a:p>
             <a:pPr>
               <a:spcAft>
-                <a:spcPts val="700"/>
-              </a:spcAft>
-              <a:defRPr sz="1100">
+                <a:spcPts val="900"/>
+              </a:spcAft>
+              <a:defRPr sz="1300">
                 <a:solidFill>
                   <a:srgbClr val="0F172A"/>
                 </a:solidFill>
@@ -4750,9 +4750,9 @@
           <a:p>
             <a:pPr>
               <a:spcAft>
-                <a:spcPts val="700"/>
-              </a:spcAft>
-              <a:defRPr sz="1100">
+                <a:spcPts val="900"/>
+              </a:spcAft>
+              <a:defRPr sz="1300">
                 <a:solidFill>
                   <a:srgbClr val="0F172A"/>
                 </a:solidFill>
@@ -4765,9 +4765,9 @@
           <a:p>
             <a:pPr>
               <a:spcAft>
-                <a:spcPts val="700"/>
-              </a:spcAft>
-              <a:defRPr sz="1100">
+                <a:spcPts val="900"/>
+              </a:spcAft>
+              <a:defRPr sz="1300">
                 <a:solidFill>
                   <a:srgbClr val="0F172A"/>
                 </a:solidFill>
@@ -4787,8 +4787,8 @@
         </p:nvSpPr>
         <p:spPr>
           <a:xfrm>
-            <a:off x="6217920" y="1371600"/>
-            <a:ext cx="5212080" cy="3017520"/>
+            <a:off x="6190488" y="1234440"/>
+            <a:ext cx="5376672" cy="3108960"/>
           </a:xfrm>
           <a:prstGeom prst="roundRect">
             <a:avLst/>
@@ -4796,9 +4796,9 @@
           <a:solidFill>
             <a:srgbClr val="FFFFFF"/>
           </a:solidFill>
-          <a:ln w="15240">
+          <a:ln w="19050">
             <a:solidFill>
-              <a:srgbClr val="E2E8F0"/>
+              <a:srgbClr val="CBD5E1"/>
             </a:solidFill>
           </a:ln>
         </p:spPr>
@@ -4832,8 +4832,8 @@
         </p:nvSpPr>
         <p:spPr>
           <a:xfrm>
-            <a:off x="6217920" y="1371600"/>
-            <a:ext cx="5212080" cy="502920"/>
+            <a:off x="6190488" y="1234440"/>
+            <a:ext cx="5376672" cy="621792"/>
           </a:xfrm>
           <a:prstGeom prst="roundRect">
             <a:avLst/>
@@ -4875,8 +4875,8 @@
         </p:nvSpPr>
         <p:spPr>
           <a:xfrm>
-            <a:off x="6400800" y="1444752"/>
-            <a:ext cx="4846320" cy="411480"/>
+            <a:off x="6373368" y="1289304"/>
+            <a:ext cx="5010912" cy="548640"/>
           </a:xfrm>
           <a:prstGeom prst="rect">
             <a:avLst/>
@@ -4890,7 +4890,7 @@
           <a:lstStyle/>
           <a:p>
             <a:pPr>
-              <a:defRPr sz="1300" b="1">
+              <a:defRPr sz="1550" b="1">
                 <a:solidFill>
                   <a:srgbClr val="FFFFFF"/>
                 </a:solidFill>
@@ -4902,9 +4902,9 @@
           </a:p>
           <a:p>
             <a:pPr>
-              <a:defRPr sz="900">
-                <a:solidFill>
-                  <a:srgbClr val="DCEBFF"/>
+              <a:defRPr sz="1000" b="1">
+                <a:solidFill>
+                  <a:srgbClr val="E0F2FE"/>
                 </a:solidFill>
               </a:defRPr>
             </a:pPr>
@@ -4922,8 +4922,8 @@
         </p:nvSpPr>
         <p:spPr>
           <a:xfrm>
-            <a:off x="6400800" y="1965960"/>
-            <a:ext cx="4846320" cy="2331720"/>
+            <a:off x="6373368" y="1965960"/>
+            <a:ext cx="5010912" cy="2304288"/>
           </a:xfrm>
           <a:prstGeom prst="rect">
             <a:avLst/>
@@ -4938,9 +4938,9 @@
           <a:p>
             <a:pPr>
               <a:spcAft>
-                <a:spcPts val="700"/>
-              </a:spcAft>
-              <a:defRPr sz="1100">
+                <a:spcPts val="900"/>
+              </a:spcAft>
+              <a:defRPr sz="1300">
                 <a:solidFill>
                   <a:srgbClr val="0F172A"/>
                 </a:solidFill>
@@ -4953,9 +4953,9 @@
           <a:p>
             <a:pPr>
               <a:spcAft>
-                <a:spcPts val="700"/>
-              </a:spcAft>
-              <a:defRPr sz="1100">
+                <a:spcPts val="900"/>
+              </a:spcAft>
+              <a:defRPr sz="1300">
                 <a:solidFill>
                   <a:srgbClr val="0F172A"/>
                 </a:solidFill>
@@ -4968,9 +4968,9 @@
           <a:p>
             <a:pPr>
               <a:spcAft>
-                <a:spcPts val="700"/>
-              </a:spcAft>
-              <a:defRPr sz="1100">
+                <a:spcPts val="900"/>
+              </a:spcAft>
+              <a:defRPr sz="1300">
                 <a:solidFill>
                   <a:srgbClr val="0F172A"/>
                 </a:solidFill>
@@ -4983,9 +4983,9 @@
           <a:p>
             <a:pPr>
               <a:spcAft>
-                <a:spcPts val="700"/>
-              </a:spcAft>
-              <a:defRPr sz="1100">
+                <a:spcPts val="900"/>
+              </a:spcAft>
+              <a:defRPr sz="1300">
                 <a:solidFill>
                   <a:srgbClr val="0F172A"/>
                 </a:solidFill>
@@ -4998,9 +4998,9 @@
           <a:p>
             <a:pPr>
               <a:spcAft>
-                <a:spcPts val="700"/>
-              </a:spcAft>
-              <a:defRPr sz="1100">
+                <a:spcPts val="900"/>
+              </a:spcAft>
+              <a:defRPr sz="1300">
                 <a:solidFill>
                   <a:srgbClr val="0F172A"/>
                 </a:solidFill>
@@ -5020,8 +5020,8 @@
         </p:nvSpPr>
         <p:spPr>
           <a:xfrm>
-            <a:off x="731520" y="4572000"/>
-            <a:ext cx="10698480" cy="1645920"/>
+            <a:off x="594360" y="4526280"/>
+            <a:ext cx="10972800" cy="1783080"/>
           </a:xfrm>
           <a:prstGeom prst="roundRect">
             <a:avLst/>
@@ -5029,7 +5029,7 @@
           <a:solidFill>
             <a:srgbClr val="0F2557"/>
           </a:solidFill>
-          <a:ln w="19050">
+          <a:ln w="25400">
             <a:solidFill>
               <a:srgbClr val="F97316"/>
             </a:solidFill>
@@ -5055,9 +5055,9 @@
           <a:p>
             <a:pPr algn="ctr">
               <a:spcAft>
-                <a:spcPts val="600"/>
-              </a:spcAft>
-              <a:defRPr sz="2000" b="1">
+                <a:spcPts val="800"/>
+              </a:spcAft>
+              <a:defRPr sz="2300" b="1">
                 <a:solidFill>
                   <a:srgbClr val="F97316"/>
                 </a:solidFill>
@@ -5069,7 +5069,7 @@
           </a:p>
           <a:p>
             <a:pPr algn="ctr">
-              <a:defRPr sz="1200">
+              <a:defRPr sz="1350">
                 <a:solidFill>
                   <a:srgbClr val="FFFFFF"/>
                 </a:solidFill>
@@ -5151,7 +5151,7 @@
         <p:spPr>
           <a:xfrm>
             <a:off x="0" y="0"/>
-            <a:ext cx="12191695" cy="1051560"/>
+            <a:ext cx="12191695" cy="1078992"/>
           </a:xfrm>
           <a:prstGeom prst="rect">
             <a:avLst/>
@@ -5193,8 +5193,8 @@
         </p:nvSpPr>
         <p:spPr>
           <a:xfrm>
-            <a:off x="0" y="1051560"/>
-            <a:ext cx="12191695" cy="54864"/>
+            <a:off x="0" y="1078992"/>
+            <a:ext cx="12191695" cy="64008"/>
           </a:xfrm>
           <a:prstGeom prst="rect">
             <a:avLst/>
@@ -5236,8 +5236,8 @@
         </p:nvSpPr>
         <p:spPr>
           <a:xfrm>
-            <a:off x="7772400" y="182880"/>
-            <a:ext cx="3931920" cy="685800"/>
+            <a:off x="7498079" y="164592"/>
+            <a:ext cx="4114800" cy="777240"/>
           </a:xfrm>
           <a:prstGeom prst="rect">
             <a:avLst/>
@@ -5251,7 +5251,7 @@
           <a:lstStyle/>
           <a:p>
             <a:pPr algn="r">
-              <a:defRPr sz="950" b="1">
+              <a:defRPr sz="1100" b="1">
                 <a:solidFill>
                   <a:srgbClr val="F97316"/>
                 </a:solidFill>
@@ -5275,8 +5275,8 @@
         </p:nvSpPr>
         <p:spPr>
           <a:xfrm>
-            <a:off x="731520" y="228600"/>
-            <a:ext cx="6858000" cy="640080"/>
+            <a:off x="594360" y="201168"/>
+            <a:ext cx="6858000" cy="685800"/>
           </a:xfrm>
           <a:prstGeom prst="rect">
             <a:avLst/>
@@ -5290,7 +5290,7 @@
           <a:lstStyle/>
           <a:p>
             <a:pPr>
-              <a:defRPr sz="2200" b="1">
+              <a:defRPr sz="2400" b="1">
                 <a:solidFill>
                   <a:srgbClr val="FFFFFF"/>
                 </a:solidFill>
@@ -5310,8 +5310,8 @@
         </p:nvSpPr>
         <p:spPr>
           <a:xfrm>
-            <a:off x="0" y="6492240"/>
-            <a:ext cx="12191695" cy="365760"/>
+            <a:off x="0" y="6473952"/>
+            <a:ext cx="12191695" cy="384048"/>
           </a:xfrm>
           <a:prstGeom prst="rect">
             <a:avLst/>
@@ -5321,7 +5321,7 @@
           </a:solidFill>
           <a:ln>
             <a:solidFill>
-              <a:srgbClr val="E2E8F0"/>
+              <a:srgbClr val="CBD5E1"/>
             </a:solidFill>
           </a:ln>
         </p:spPr>
@@ -5355,8 +5355,8 @@
         </p:nvSpPr>
         <p:spPr>
           <a:xfrm>
-            <a:off x="731520" y="6510528"/>
-            <a:ext cx="7315200" cy="320040"/>
+            <a:off x="594360" y="6510528"/>
+            <a:ext cx="7772400" cy="320040"/>
           </a:xfrm>
           <a:prstGeom prst="rect">
             <a:avLst/>
@@ -5370,7 +5370,7 @@
           <a:lstStyle/>
           <a:p>
             <a:pPr>
-              <a:defRPr sz="950">
+              <a:defRPr sz="1050">
                 <a:solidFill>
                   <a:srgbClr val="64748B"/>
                 </a:solidFill>
@@ -5391,7 +5391,7 @@
         <p:spPr>
           <a:xfrm>
             <a:off x="9601200" y="6510528"/>
-            <a:ext cx="1828800" cy="320040"/>
+            <a:ext cx="2011680" cy="320040"/>
           </a:xfrm>
           <a:prstGeom prst="rect">
             <a:avLst/>
@@ -5405,7 +5405,7 @@
           <a:lstStyle/>
           <a:p>
             <a:pPr algn="r">
-              <a:defRPr sz="950" b="1">
+              <a:defRPr sz="1100" b="1">
                 <a:solidFill>
                   <a:srgbClr val="0F2557"/>
                 </a:solidFill>
@@ -5425,8 +5425,8 @@
         </p:nvSpPr>
         <p:spPr>
           <a:xfrm>
-            <a:off x="731520" y="1371600"/>
-            <a:ext cx="3383280" cy="4846320"/>
+            <a:off x="594360" y="1234440"/>
+            <a:ext cx="3511296" cy="5120640"/>
           </a:xfrm>
           <a:prstGeom prst="roundRect">
             <a:avLst/>
@@ -5434,9 +5434,9 @@
           <a:solidFill>
             <a:srgbClr val="FFFFFF"/>
           </a:solidFill>
-          <a:ln w="15240">
+          <a:ln w="19050">
             <a:solidFill>
-              <a:srgbClr val="E2E8F0"/>
+              <a:srgbClr val="CBD5E1"/>
             </a:solidFill>
           </a:ln>
         </p:spPr>
@@ -5470,8 +5470,8 @@
         </p:nvSpPr>
         <p:spPr>
           <a:xfrm>
-            <a:off x="731520" y="1371600"/>
-            <a:ext cx="3383280" cy="502920"/>
+            <a:off x="594360" y="1234440"/>
+            <a:ext cx="3511296" cy="621792"/>
           </a:xfrm>
           <a:prstGeom prst="roundRect">
             <a:avLst/>
@@ -5513,8 +5513,8 @@
         </p:nvSpPr>
         <p:spPr>
           <a:xfrm>
-            <a:off x="914400" y="1444752"/>
-            <a:ext cx="3017520" cy="411480"/>
+            <a:off x="777240" y="1289304"/>
+            <a:ext cx="3145536" cy="548640"/>
           </a:xfrm>
           <a:prstGeom prst="rect">
             <a:avLst/>
@@ -5528,7 +5528,7 @@
           <a:lstStyle/>
           <a:p>
             <a:pPr>
-              <a:defRPr sz="1300" b="1">
+              <a:defRPr sz="1550" b="1">
                 <a:solidFill>
                   <a:srgbClr val="FFFFFF"/>
                 </a:solidFill>
@@ -5540,9 +5540,9 @@
           </a:p>
           <a:p>
             <a:pPr>
-              <a:defRPr sz="900">
-                <a:solidFill>
-                  <a:srgbClr val="DCEBFF"/>
+              <a:defRPr sz="1000" b="1">
+                <a:solidFill>
+                  <a:srgbClr val="E0F2FE"/>
                 </a:solidFill>
               </a:defRPr>
             </a:pPr>
@@ -5560,8 +5560,8 @@
         </p:nvSpPr>
         <p:spPr>
           <a:xfrm>
-            <a:off x="914400" y="1965960"/>
-            <a:ext cx="3017520" cy="4160520"/>
+            <a:off x="777240" y="1965960"/>
+            <a:ext cx="3145536" cy="4315968"/>
           </a:xfrm>
           <a:prstGeom prst="rect">
             <a:avLst/>
@@ -5576,9 +5576,9 @@
           <a:p>
             <a:pPr>
               <a:spcAft>
-                <a:spcPts val="700"/>
-              </a:spcAft>
-              <a:defRPr sz="1100">
+                <a:spcPts val="1100"/>
+              </a:spcAft>
+              <a:defRPr sz="1300">
                 <a:solidFill>
                   <a:srgbClr val="0F172A"/>
                 </a:solidFill>
@@ -5591,9 +5591,9 @@
           <a:p>
             <a:pPr>
               <a:spcAft>
-                <a:spcPts val="700"/>
-              </a:spcAft>
-              <a:defRPr sz="1100">
+                <a:spcPts val="1100"/>
+              </a:spcAft>
+              <a:defRPr sz="1300">
                 <a:solidFill>
                   <a:srgbClr val="0F172A"/>
                 </a:solidFill>
@@ -5606,9 +5606,9 @@
           <a:p>
             <a:pPr>
               <a:spcAft>
-                <a:spcPts val="700"/>
-              </a:spcAft>
-              <a:defRPr sz="1100">
+                <a:spcPts val="1100"/>
+              </a:spcAft>
+              <a:defRPr sz="1300">
                 <a:solidFill>
                   <a:srgbClr val="0F172A"/>
                 </a:solidFill>
@@ -5621,9 +5621,9 @@
           <a:p>
             <a:pPr>
               <a:spcAft>
-                <a:spcPts val="700"/>
-              </a:spcAft>
-              <a:defRPr sz="1100">
+                <a:spcPts val="1100"/>
+              </a:spcAft>
+              <a:defRPr sz="1300">
                 <a:solidFill>
                   <a:srgbClr val="0F172A"/>
                 </a:solidFill>
@@ -5636,9 +5636,9 @@
           <a:p>
             <a:pPr>
               <a:spcAft>
-                <a:spcPts val="700"/>
-              </a:spcAft>
-              <a:defRPr sz="1100">
+                <a:spcPts val="1100"/>
+              </a:spcAft>
+              <a:defRPr sz="1300">
                 <a:solidFill>
                   <a:srgbClr val="0F172A"/>
                 </a:solidFill>
@@ -5646,6 +5646,21 @@
             </a:pPr>
             <a:r>
               <a:t>•  Annual financial loss across Gujarat students is in lakhs of rupees.</a:t>
+            </a:r>
+          </a:p>
+          <a:p>
+            <a:pPr>
+              <a:spcAft>
+                <a:spcPts val="1100"/>
+              </a:spcAft>
+              <a:defRPr sz="1300">
+                <a:solidFill>
+                  <a:srgbClr val="0F172A"/>
+                </a:solidFill>
+              </a:defRPr>
+            </a:pPr>
+            <a:r>
+              <a:t>•  Students from remote areas lack immediate campus access.</a:t>
             </a:r>
           </a:p>
         </p:txBody>
@@ -5658,8 +5673,8 @@
         </p:nvSpPr>
         <p:spPr>
           <a:xfrm>
-            <a:off x="4389120" y="1371600"/>
-            <a:ext cx="3383280" cy="4846320"/>
+            <a:off x="4325112" y="1234440"/>
+            <a:ext cx="3511296" cy="5120640"/>
           </a:xfrm>
           <a:prstGeom prst="roundRect">
             <a:avLst/>
@@ -5667,9 +5682,9 @@
           <a:solidFill>
             <a:srgbClr val="FFFFFF"/>
           </a:solidFill>
-          <a:ln w="15240">
+          <a:ln w="19050">
             <a:solidFill>
-              <a:srgbClr val="E2E8F0"/>
+              <a:srgbClr val="CBD5E1"/>
             </a:solidFill>
           </a:ln>
         </p:spPr>
@@ -5703,8 +5718,8 @@
         </p:nvSpPr>
         <p:spPr>
           <a:xfrm>
-            <a:off x="4389120" y="1371600"/>
-            <a:ext cx="3383280" cy="502920"/>
+            <a:off x="4325112" y="1234440"/>
+            <a:ext cx="3511296" cy="621792"/>
           </a:xfrm>
           <a:prstGeom prst="roundRect">
             <a:avLst/>
@@ -5746,8 +5761,8 @@
         </p:nvSpPr>
         <p:spPr>
           <a:xfrm>
-            <a:off x="4572000" y="1444752"/>
-            <a:ext cx="3017520" cy="411480"/>
+            <a:off x="4507992" y="1289304"/>
+            <a:ext cx="3145536" cy="548640"/>
           </a:xfrm>
           <a:prstGeom prst="rect">
             <a:avLst/>
@@ -5761,7 +5776,7 @@
           <a:lstStyle/>
           <a:p>
             <a:pPr>
-              <a:defRPr sz="1300" b="1">
+              <a:defRPr sz="1550" b="1">
                 <a:solidFill>
                   <a:srgbClr val="FFFFFF"/>
                 </a:solidFill>
@@ -5773,14 +5788,14 @@
           </a:p>
           <a:p>
             <a:pPr>
-              <a:defRPr sz="900">
-                <a:solidFill>
-                  <a:srgbClr val="DCEBFF"/>
-                </a:solidFill>
-              </a:defRPr>
-            </a:pPr>
-            <a:r>
-              <a:t>MANUAL OVERHEAD</a:t>
+              <a:defRPr sz="1000" b="1">
+                <a:solidFill>
+                  <a:srgbClr val="E0F2FE"/>
+                </a:solidFill>
+              </a:defRPr>
+            </a:pPr>
+            <a:r>
+              <a:t>MANUAL ADMINISTRATIVE OVERHEAD</a:t>
             </a:r>
           </a:p>
         </p:txBody>
@@ -5793,8 +5808,8 @@
         </p:nvSpPr>
         <p:spPr>
           <a:xfrm>
-            <a:off x="4572000" y="1965960"/>
-            <a:ext cx="3017520" cy="4160520"/>
+            <a:off x="4507992" y="1965960"/>
+            <a:ext cx="3145536" cy="4315968"/>
           </a:xfrm>
           <a:prstGeom prst="rect">
             <a:avLst/>
@@ -5809,9 +5824,9 @@
           <a:p>
             <a:pPr>
               <a:spcAft>
-                <a:spcPts val="700"/>
-              </a:spcAft>
-              <a:defRPr sz="1100">
+                <a:spcPts val="1100"/>
+              </a:spcAft>
+              <a:defRPr sz="1300">
                 <a:solidFill>
                   <a:srgbClr val="0F172A"/>
                 </a:solidFill>
@@ -5824,9 +5839,9 @@
           <a:p>
             <a:pPr>
               <a:spcAft>
-                <a:spcPts val="700"/>
-              </a:spcAft>
-              <a:defRPr sz="1100">
+                <a:spcPts val="1100"/>
+              </a:spcAft>
+              <a:defRPr sz="1300">
                 <a:solidFill>
                   <a:srgbClr val="0F172A"/>
                 </a:solidFill>
@@ -5839,9 +5854,9 @@
           <a:p>
             <a:pPr>
               <a:spcAft>
-                <a:spcPts val="700"/>
-              </a:spcAft>
-              <a:defRPr sz="1100">
+                <a:spcPts val="1100"/>
+              </a:spcAft>
+              <a:defRPr sz="1300">
                 <a:solidFill>
                   <a:srgbClr val="0F172A"/>
                 </a:solidFill>
@@ -5854,9 +5869,9 @@
           <a:p>
             <a:pPr>
               <a:spcAft>
-                <a:spcPts val="700"/>
-              </a:spcAft>
-              <a:defRPr sz="1100">
+                <a:spcPts val="1100"/>
+              </a:spcAft>
+              <a:defRPr sz="1300">
                 <a:solidFill>
                   <a:srgbClr val="0F172A"/>
                 </a:solidFill>
@@ -5869,9 +5884,9 @@
           <a:p>
             <a:pPr>
               <a:spcAft>
-                <a:spcPts val="700"/>
-              </a:spcAft>
-              <a:defRPr sz="1100">
+                <a:spcPts val="1100"/>
+              </a:spcAft>
+              <a:defRPr sz="1300">
                 <a:solidFill>
                   <a:srgbClr val="0F172A"/>
                 </a:solidFill>
@@ -5879,6 +5894,21 @@
             </a:pPr>
             <a:r>
               <a:t>•  Wastes over 30+ faculty minutes every single day across departments.</a:t>
+            </a:r>
+          </a:p>
+          <a:p>
+            <a:pPr>
+              <a:spcAft>
+                <a:spcPts val="1100"/>
+              </a:spcAft>
+              <a:defRPr sz="1300">
+                <a:solidFill>
+                  <a:srgbClr val="0F172A"/>
+                </a:solidFill>
+              </a:defRPr>
+            </a:pPr>
+            <a:r>
+              <a:t>•  No centralized audit trail of forwarded official notices.</a:t>
             </a:r>
           </a:p>
         </p:txBody>
@@ -5891,8 +5921,8 @@
         </p:nvSpPr>
         <p:spPr>
           <a:xfrm>
-            <a:off x="8046720" y="1371600"/>
-            <a:ext cx="3383280" cy="4846320"/>
+            <a:off x="8055864" y="1234440"/>
+            <a:ext cx="3511296" cy="5120640"/>
           </a:xfrm>
           <a:prstGeom prst="roundRect">
             <a:avLst/>
@@ -5900,9 +5930,9 @@
           <a:solidFill>
             <a:srgbClr val="FFFFFF"/>
           </a:solidFill>
-          <a:ln w="15240">
+          <a:ln w="19050">
             <a:solidFill>
-              <a:srgbClr val="E2E8F0"/>
+              <a:srgbClr val="CBD5E1"/>
             </a:solidFill>
           </a:ln>
         </p:spPr>
@@ -5936,8 +5966,8 @@
         </p:nvSpPr>
         <p:spPr>
           <a:xfrm>
-            <a:off x="8046720" y="1371600"/>
-            <a:ext cx="3383280" cy="502920"/>
+            <a:off x="8055864" y="1234440"/>
+            <a:ext cx="3511296" cy="621792"/>
           </a:xfrm>
           <a:prstGeom prst="roundRect">
             <a:avLst/>
@@ -5979,8 +6009,8 @@
         </p:nvSpPr>
         <p:spPr>
           <a:xfrm>
-            <a:off x="8229600" y="1444752"/>
-            <a:ext cx="3017520" cy="411480"/>
+            <a:off x="8238744" y="1289304"/>
+            <a:ext cx="3145536" cy="548640"/>
           </a:xfrm>
           <a:prstGeom prst="rect">
             <a:avLst/>
@@ -5994,7 +6024,7 @@
           <a:lstStyle/>
           <a:p>
             <a:pPr>
-              <a:defRPr sz="1300" b="1">
+              <a:defRPr sz="1550" b="1">
                 <a:solidFill>
                   <a:srgbClr val="FFFFFF"/>
                 </a:solidFill>
@@ -6006,14 +6036,14 @@
           </a:p>
           <a:p>
             <a:pPr>
-              <a:defRPr sz="900">
-                <a:solidFill>
-                  <a:srgbClr val="DCEBFF"/>
-                </a:solidFill>
-              </a:defRPr>
-            </a:pPr>
-            <a:r>
-              <a:t>TECHNICAL FRICTION</a:t>
+              <a:defRPr sz="1000" b="1">
+                <a:solidFill>
+                  <a:srgbClr val="E0F2FE"/>
+                </a:solidFill>
+              </a:defRPr>
+            </a:pPr>
+            <a:r>
+              <a:t>TECHNICAL FRICTION &amp; UNINDEXED CHAOS</a:t>
             </a:r>
           </a:p>
         </p:txBody>
@@ -6026,8 +6056,8 @@
         </p:nvSpPr>
         <p:spPr>
           <a:xfrm>
-            <a:off x="8229600" y="1965960"/>
-            <a:ext cx="3017520" cy="4160520"/>
+            <a:off x="8238744" y="1965960"/>
+            <a:ext cx="3145536" cy="4315968"/>
           </a:xfrm>
           <a:prstGeom prst="rect">
             <a:avLst/>
@@ -6042,9 +6072,9 @@
           <a:p>
             <a:pPr>
               <a:spcAft>
-                <a:spcPts val="700"/>
-              </a:spcAft>
-              <a:defRPr sz="1100">
+                <a:spcPts val="1100"/>
+              </a:spcAft>
+              <a:defRPr sz="1300">
                 <a:solidFill>
                   <a:srgbClr val="0F172A"/>
                 </a:solidFill>
@@ -6057,9 +6087,9 @@
           <a:p>
             <a:pPr>
               <a:spcAft>
-                <a:spcPts val="700"/>
-              </a:spcAft>
-              <a:defRPr sz="1100">
+                <a:spcPts val="1100"/>
+              </a:spcAft>
+              <a:defRPr sz="1300">
                 <a:solidFill>
                   <a:srgbClr val="0F172A"/>
                 </a:solidFill>
@@ -6072,9 +6102,9 @@
           <a:p>
             <a:pPr>
               <a:spcAft>
-                <a:spcPts val="700"/>
-              </a:spcAft>
-              <a:defRPr sz="1100">
+                <a:spcPts val="1100"/>
+              </a:spcAft>
+              <a:defRPr sz="1300">
                 <a:solidFill>
                   <a:srgbClr val="0F172A"/>
                 </a:solidFill>
@@ -6087,9 +6117,9 @@
           <a:p>
             <a:pPr>
               <a:spcAft>
-                <a:spcPts val="700"/>
-              </a:spcAft>
-              <a:defRPr sz="1100">
+                <a:spcPts val="1100"/>
+              </a:spcAft>
+              <a:defRPr sz="1300">
                 <a:solidFill>
                   <a:srgbClr val="0F172A"/>
                 </a:solidFill>
@@ -6102,9 +6132,9 @@
           <a:p>
             <a:pPr>
               <a:spcAft>
-                <a:spcPts val="700"/>
-              </a:spcAft>
-              <a:defRPr sz="1100">
+                <a:spcPts val="1100"/>
+              </a:spcAft>
+              <a:defRPr sz="1300">
                 <a:solidFill>
                   <a:srgbClr val="0F172A"/>
                 </a:solidFill>
@@ -6112,6 +6142,21 @@
             </a:pPr>
             <a:r>
               <a:t>•  Rural &amp; regional students face difficulty navigating complex portal links.</a:t>
+            </a:r>
+          </a:p>
+          <a:p>
+            <a:pPr>
+              <a:spcAft>
+                <a:spcPts val="1100"/>
+              </a:spcAft>
+              <a:defRPr sz="1300">
+                <a:solidFill>
+                  <a:srgbClr val="0F172A"/>
+                </a:solidFill>
+              </a:defRPr>
+            </a:pPr>
+            <a:r>
+              <a:t>•  Creates high anxiety among students during examination periods.</a:t>
             </a:r>
           </a:p>
         </p:txBody>
@@ -6186,7 +6231,7 @@
         <p:spPr>
           <a:xfrm>
             <a:off x="0" y="0"/>
-            <a:ext cx="12191695" cy="1051560"/>
+            <a:ext cx="12191695" cy="1078992"/>
           </a:xfrm>
           <a:prstGeom prst="rect">
             <a:avLst/>
@@ -6228,8 +6273,8 @@
         </p:nvSpPr>
         <p:spPr>
           <a:xfrm>
-            <a:off x="0" y="1051560"/>
-            <a:ext cx="12191695" cy="54864"/>
+            <a:off x="0" y="1078992"/>
+            <a:ext cx="12191695" cy="64008"/>
           </a:xfrm>
           <a:prstGeom prst="rect">
             <a:avLst/>
@@ -6271,8 +6316,8 @@
         </p:nvSpPr>
         <p:spPr>
           <a:xfrm>
-            <a:off x="7772400" y="182880"/>
-            <a:ext cx="3931920" cy="685800"/>
+            <a:off x="7498079" y="164592"/>
+            <a:ext cx="4114800" cy="777240"/>
           </a:xfrm>
           <a:prstGeom prst="rect">
             <a:avLst/>
@@ -6286,7 +6331,7 @@
           <a:lstStyle/>
           <a:p>
             <a:pPr algn="r">
-              <a:defRPr sz="950" b="1">
+              <a:defRPr sz="1100" b="1">
                 <a:solidFill>
                   <a:srgbClr val="F97316"/>
                 </a:solidFill>
@@ -6310,8 +6355,8 @@
         </p:nvSpPr>
         <p:spPr>
           <a:xfrm>
-            <a:off x="731520" y="228600"/>
-            <a:ext cx="6858000" cy="640080"/>
+            <a:off x="594360" y="201168"/>
+            <a:ext cx="6858000" cy="685800"/>
           </a:xfrm>
           <a:prstGeom prst="rect">
             <a:avLst/>
@@ -6325,7 +6370,7 @@
           <a:lstStyle/>
           <a:p>
             <a:pPr>
-              <a:defRPr sz="2200" b="1">
+              <a:defRPr sz="2400" b="1">
                 <a:solidFill>
                   <a:srgbClr val="FFFFFF"/>
                 </a:solidFill>
@@ -6345,8 +6390,8 @@
         </p:nvSpPr>
         <p:spPr>
           <a:xfrm>
-            <a:off x="0" y="6492240"/>
-            <a:ext cx="12191695" cy="365760"/>
+            <a:off x="0" y="6473952"/>
+            <a:ext cx="12191695" cy="384048"/>
           </a:xfrm>
           <a:prstGeom prst="rect">
             <a:avLst/>
@@ -6356,7 +6401,7 @@
           </a:solidFill>
           <a:ln>
             <a:solidFill>
-              <a:srgbClr val="E2E8F0"/>
+              <a:srgbClr val="CBD5E1"/>
             </a:solidFill>
           </a:ln>
         </p:spPr>
@@ -6390,8 +6435,8 @@
         </p:nvSpPr>
         <p:spPr>
           <a:xfrm>
-            <a:off x="731520" y="6510528"/>
-            <a:ext cx="7315200" cy="320040"/>
+            <a:off x="594360" y="6510528"/>
+            <a:ext cx="7772400" cy="320040"/>
           </a:xfrm>
           <a:prstGeom prst="rect">
             <a:avLst/>
@@ -6405,7 +6450,7 @@
           <a:lstStyle/>
           <a:p>
             <a:pPr>
-              <a:defRPr sz="950">
+              <a:defRPr sz="1050">
                 <a:solidFill>
                   <a:srgbClr val="64748B"/>
                 </a:solidFill>
@@ -6426,7 +6471,7 @@
         <p:spPr>
           <a:xfrm>
             <a:off x="9601200" y="6510528"/>
-            <a:ext cx="1828800" cy="320040"/>
+            <a:ext cx="2011680" cy="320040"/>
           </a:xfrm>
           <a:prstGeom prst="rect">
             <a:avLst/>
@@ -6440,7 +6485,7 @@
           <a:lstStyle/>
           <a:p>
             <a:pPr algn="r">
-              <a:defRPr sz="950" b="1">
+              <a:defRPr sz="1100" b="1">
                 <a:solidFill>
                   <a:srgbClr val="0F2557"/>
                 </a:solidFill>
@@ -6460,8 +6505,8 @@
         </p:nvSpPr>
         <p:spPr>
           <a:xfrm>
-            <a:off x="731520" y="1371600"/>
-            <a:ext cx="5212080" cy="2377440"/>
+            <a:off x="594360" y="1234440"/>
+            <a:ext cx="5376672" cy="2514600"/>
           </a:xfrm>
           <a:prstGeom prst="roundRect">
             <a:avLst/>
@@ -6469,9 +6514,9 @@
           <a:solidFill>
             <a:srgbClr val="FFFFFF"/>
           </a:solidFill>
-          <a:ln w="15240">
+          <a:ln w="19050">
             <a:solidFill>
-              <a:srgbClr val="E2E8F0"/>
+              <a:srgbClr val="CBD5E1"/>
             </a:solidFill>
           </a:ln>
         </p:spPr>
@@ -6505,8 +6550,8 @@
         </p:nvSpPr>
         <p:spPr>
           <a:xfrm>
-            <a:off x="731520" y="1371600"/>
-            <a:ext cx="5212080" cy="502920"/>
+            <a:off x="594360" y="1234440"/>
+            <a:ext cx="5376672" cy="530352"/>
           </a:xfrm>
           <a:prstGeom prst="roundRect">
             <a:avLst/>
@@ -6548,8 +6593,8 @@
         </p:nvSpPr>
         <p:spPr>
           <a:xfrm>
-            <a:off x="914400" y="1444752"/>
-            <a:ext cx="4846320" cy="411480"/>
+            <a:off x="777240" y="1289304"/>
+            <a:ext cx="5010912" cy="457200"/>
           </a:xfrm>
           <a:prstGeom prst="rect">
             <a:avLst/>
@@ -6563,7 +6608,7 @@
           <a:lstStyle/>
           <a:p>
             <a:pPr>
-              <a:defRPr sz="1300" b="1">
+              <a:defRPr sz="1550" b="1">
                 <a:solidFill>
                   <a:srgbClr val="FFFFFF"/>
                 </a:solidFill>
@@ -6583,8 +6628,8 @@
         </p:nvSpPr>
         <p:spPr>
           <a:xfrm>
-            <a:off x="914400" y="1965960"/>
-            <a:ext cx="4846320" cy="1691640"/>
+            <a:off x="777240" y="1874520"/>
+            <a:ext cx="5010912" cy="1801368"/>
           </a:xfrm>
           <a:prstGeom prst="rect">
             <a:avLst/>
@@ -6599,9 +6644,9 @@
           <a:p>
             <a:pPr>
               <a:spcAft>
-                <a:spcPts val="700"/>
-              </a:spcAft>
-              <a:defRPr sz="1100">
+                <a:spcPts val="1000"/>
+              </a:spcAft>
+              <a:defRPr sz="1350">
                 <a:solidFill>
                   <a:srgbClr val="0F172A"/>
                 </a:solidFill>
@@ -6614,9 +6659,9 @@
           <a:p>
             <a:pPr>
               <a:spcAft>
-                <a:spcPts val="700"/>
-              </a:spcAft>
-              <a:defRPr sz="1100">
+                <a:spcPts val="1000"/>
+              </a:spcAft>
+              <a:defRPr sz="1350">
                 <a:solidFill>
                   <a:srgbClr val="0F172A"/>
                 </a:solidFill>
@@ -6629,9 +6674,9 @@
           <a:p>
             <a:pPr>
               <a:spcAft>
-                <a:spcPts val="700"/>
-              </a:spcAft>
-              <a:defRPr sz="1100">
+                <a:spcPts val="1000"/>
+              </a:spcAft>
+              <a:defRPr sz="1350">
                 <a:solidFill>
                   <a:srgbClr val="0F172A"/>
                 </a:solidFill>
@@ -6644,9 +6689,9 @@
           <a:p>
             <a:pPr>
               <a:spcAft>
-                <a:spcPts val="700"/>
-              </a:spcAft>
-              <a:defRPr sz="1100">
+                <a:spcPts val="1000"/>
+              </a:spcAft>
+              <a:defRPr sz="1350">
                 <a:solidFill>
                   <a:srgbClr val="0F172A"/>
                 </a:solidFill>
@@ -6666,8 +6711,8 @@
         </p:nvSpPr>
         <p:spPr>
           <a:xfrm>
-            <a:off x="6217920" y="1371600"/>
-            <a:ext cx="5212080" cy="2377440"/>
+            <a:off x="6190488" y="1234440"/>
+            <a:ext cx="5376672" cy="2514600"/>
           </a:xfrm>
           <a:prstGeom prst="roundRect">
             <a:avLst/>
@@ -6675,9 +6720,9 @@
           <a:solidFill>
             <a:srgbClr val="FFFFFF"/>
           </a:solidFill>
-          <a:ln w="15240">
+          <a:ln w="19050">
             <a:solidFill>
-              <a:srgbClr val="E2E8F0"/>
+              <a:srgbClr val="CBD5E1"/>
             </a:solidFill>
           </a:ln>
         </p:spPr>
@@ -6711,8 +6756,8 @@
         </p:nvSpPr>
         <p:spPr>
           <a:xfrm>
-            <a:off x="6217920" y="1371600"/>
-            <a:ext cx="5212080" cy="502920"/>
+            <a:off x="6190488" y="1234440"/>
+            <a:ext cx="5376672" cy="530352"/>
           </a:xfrm>
           <a:prstGeom prst="roundRect">
             <a:avLst/>
@@ -6754,8 +6799,8 @@
         </p:nvSpPr>
         <p:spPr>
           <a:xfrm>
-            <a:off x="6400800" y="1444752"/>
-            <a:ext cx="4846320" cy="411480"/>
+            <a:off x="6373368" y="1289304"/>
+            <a:ext cx="5010912" cy="457200"/>
           </a:xfrm>
           <a:prstGeom prst="rect">
             <a:avLst/>
@@ -6769,7 +6814,7 @@
           <a:lstStyle/>
           <a:p>
             <a:pPr>
-              <a:defRPr sz="1300" b="1">
+              <a:defRPr sz="1550" b="1">
                 <a:solidFill>
                   <a:srgbClr val="FFFFFF"/>
                 </a:solidFill>
@@ -6789,8 +6834,8 @@
         </p:nvSpPr>
         <p:spPr>
           <a:xfrm>
-            <a:off x="6400800" y="1965960"/>
-            <a:ext cx="4846320" cy="1691640"/>
+            <a:off x="6373368" y="1874520"/>
+            <a:ext cx="5010912" cy="1801368"/>
           </a:xfrm>
           <a:prstGeom prst="rect">
             <a:avLst/>
@@ -6805,9 +6850,9 @@
           <a:p>
             <a:pPr>
               <a:spcAft>
-                <a:spcPts val="700"/>
-              </a:spcAft>
-              <a:defRPr sz="1100">
+                <a:spcPts val="1000"/>
+              </a:spcAft>
+              <a:defRPr sz="1350">
                 <a:solidFill>
                   <a:srgbClr val="0F172A"/>
                 </a:solidFill>
@@ -6820,9 +6865,9 @@
           <a:p>
             <a:pPr>
               <a:spcAft>
-                <a:spcPts val="700"/>
-              </a:spcAft>
-              <a:defRPr sz="1100">
+                <a:spcPts val="1000"/>
+              </a:spcAft>
+              <a:defRPr sz="1350">
                 <a:solidFill>
                   <a:srgbClr val="0F172A"/>
                 </a:solidFill>
@@ -6835,9 +6880,9 @@
           <a:p>
             <a:pPr>
               <a:spcAft>
-                <a:spcPts val="700"/>
-              </a:spcAft>
-              <a:defRPr sz="1100">
+                <a:spcPts val="1000"/>
+              </a:spcAft>
+              <a:defRPr sz="1350">
                 <a:solidFill>
                   <a:srgbClr val="0F172A"/>
                 </a:solidFill>
@@ -6850,9 +6895,9 @@
           <a:p>
             <a:pPr>
               <a:spcAft>
-                <a:spcPts val="700"/>
-              </a:spcAft>
-              <a:defRPr sz="1100">
+                <a:spcPts val="1000"/>
+              </a:spcAft>
+              <a:defRPr sz="1350">
                 <a:solidFill>
                   <a:srgbClr val="0F172A"/>
                 </a:solidFill>
@@ -6872,8 +6917,8 @@
         </p:nvSpPr>
         <p:spPr>
           <a:xfrm>
-            <a:off x="731520" y="3931920"/>
-            <a:ext cx="5212080" cy="2377440"/>
+            <a:off x="594360" y="3822191"/>
+            <a:ext cx="5376672" cy="2514600"/>
           </a:xfrm>
           <a:prstGeom prst="roundRect">
             <a:avLst/>
@@ -6881,9 +6926,9 @@
           <a:solidFill>
             <a:srgbClr val="FFFFFF"/>
           </a:solidFill>
-          <a:ln w="15240">
+          <a:ln w="19050">
             <a:solidFill>
-              <a:srgbClr val="E2E8F0"/>
+              <a:srgbClr val="CBD5E1"/>
             </a:solidFill>
           </a:ln>
         </p:spPr>
@@ -6917,8 +6962,8 @@
         </p:nvSpPr>
         <p:spPr>
           <a:xfrm>
-            <a:off x="731520" y="3931920"/>
-            <a:ext cx="5212080" cy="502920"/>
+            <a:off x="594360" y="3822191"/>
+            <a:ext cx="5376672" cy="530352"/>
           </a:xfrm>
           <a:prstGeom prst="roundRect">
             <a:avLst/>
@@ -6960,8 +7005,8 @@
         </p:nvSpPr>
         <p:spPr>
           <a:xfrm>
-            <a:off x="914400" y="4005072"/>
-            <a:ext cx="4846320" cy="411480"/>
+            <a:off x="777240" y="3877055"/>
+            <a:ext cx="5010912" cy="457200"/>
           </a:xfrm>
           <a:prstGeom prst="rect">
             <a:avLst/>
@@ -6975,7 +7020,7 @@
           <a:lstStyle/>
           <a:p>
             <a:pPr>
-              <a:defRPr sz="1300" b="1">
+              <a:defRPr sz="1550" b="1">
                 <a:solidFill>
                   <a:srgbClr val="FFFFFF"/>
                 </a:solidFill>
@@ -6995,8 +7040,8 @@
         </p:nvSpPr>
         <p:spPr>
           <a:xfrm>
-            <a:off x="914400" y="4526280"/>
-            <a:ext cx="4846320" cy="1691640"/>
+            <a:off x="777240" y="4462271"/>
+            <a:ext cx="5010912" cy="1801368"/>
           </a:xfrm>
           <a:prstGeom prst="rect">
             <a:avLst/>
@@ -7011,24 +7056,24 @@
           <a:p>
             <a:pPr>
               <a:spcAft>
-                <a:spcPts val="700"/>
-              </a:spcAft>
-              <a:defRPr sz="1100">
-                <a:solidFill>
-                  <a:srgbClr val="0F172A"/>
-                </a:solidFill>
-              </a:defRPr>
-            </a:pPr>
-            <a:r>
-              <a:t>•  Google Gemini AI summarizes complex 10-page bureaucratic circulars into 2 clear sentences.</a:t>
-            </a:r>
-          </a:p>
-          <a:p>
-            <a:pPr>
-              <a:spcAft>
-                <a:spcPts val="700"/>
-              </a:spcAft>
-              <a:defRPr sz="1100">
+                <a:spcPts val="1000"/>
+              </a:spcAft>
+              <a:defRPr sz="1350">
+                <a:solidFill>
+                  <a:srgbClr val="0F172A"/>
+                </a:solidFill>
+              </a:defRPr>
+            </a:pPr>
+            <a:r>
+              <a:t>•  Google Gemini AI summarizes complex 10-page circulars into 2 clear sentences.</a:t>
+            </a:r>
+          </a:p>
+          <a:p>
+            <a:pPr>
+              <a:spcAft>
+                <a:spcPts val="1000"/>
+              </a:spcAft>
+              <a:defRPr sz="1350">
                 <a:solidFill>
                   <a:srgbClr val="0F172A"/>
                 </a:solidFill>
@@ -7041,9 +7086,9 @@
           <a:p>
             <a:pPr>
               <a:spcAft>
-                <a:spcPts val="700"/>
-              </a:spcAft>
-              <a:defRPr sz="1100">
+                <a:spcPts val="1000"/>
+              </a:spcAft>
+              <a:defRPr sz="1350">
                 <a:solidFill>
                   <a:srgbClr val="0F172A"/>
                 </a:solidFill>
@@ -7056,9 +7101,9 @@
           <a:p>
             <a:pPr>
               <a:spcAft>
-                <a:spcPts val="700"/>
-              </a:spcAft>
-              <a:defRPr sz="1100">
+                <a:spcPts val="1000"/>
+              </a:spcAft>
+              <a:defRPr sz="1350">
                 <a:solidFill>
                   <a:srgbClr val="0F172A"/>
                 </a:solidFill>
@@ -7078,8 +7123,8 @@
         </p:nvSpPr>
         <p:spPr>
           <a:xfrm>
-            <a:off x="6217920" y="3931920"/>
-            <a:ext cx="5212080" cy="2377440"/>
+            <a:off x="6190488" y="3822191"/>
+            <a:ext cx="5376672" cy="2514600"/>
           </a:xfrm>
           <a:prstGeom prst="roundRect">
             <a:avLst/>
@@ -7087,9 +7132,9 @@
           <a:solidFill>
             <a:srgbClr val="FFFFFF"/>
           </a:solidFill>
-          <a:ln w="15240">
+          <a:ln w="19050">
             <a:solidFill>
-              <a:srgbClr val="E2E8F0"/>
+              <a:srgbClr val="CBD5E1"/>
             </a:solidFill>
           </a:ln>
         </p:spPr>
@@ -7123,8 +7168,8 @@
         </p:nvSpPr>
         <p:spPr>
           <a:xfrm>
-            <a:off x="6217920" y="3931920"/>
-            <a:ext cx="5212080" cy="502920"/>
+            <a:off x="6190488" y="3822191"/>
+            <a:ext cx="5376672" cy="530352"/>
           </a:xfrm>
           <a:prstGeom prst="roundRect">
             <a:avLst/>
@@ -7166,8 +7211,8 @@
         </p:nvSpPr>
         <p:spPr>
           <a:xfrm>
-            <a:off x="6400800" y="4005072"/>
-            <a:ext cx="4846320" cy="411480"/>
+            <a:off x="6373368" y="3877055"/>
+            <a:ext cx="5010912" cy="457200"/>
           </a:xfrm>
           <a:prstGeom prst="rect">
             <a:avLst/>
@@ -7181,7 +7226,7 @@
           <a:lstStyle/>
           <a:p>
             <a:pPr>
-              <a:defRPr sz="1300" b="1">
+              <a:defRPr sz="1550" b="1">
                 <a:solidFill>
                   <a:srgbClr val="FFFFFF"/>
                 </a:solidFill>
@@ -7201,8 +7246,8 @@
         </p:nvSpPr>
         <p:spPr>
           <a:xfrm>
-            <a:off x="6400800" y="4526280"/>
-            <a:ext cx="4846320" cy="1691640"/>
+            <a:off x="6373368" y="4462271"/>
+            <a:ext cx="5010912" cy="1801368"/>
           </a:xfrm>
           <a:prstGeom prst="rect">
             <a:avLst/>
@@ -7217,9 +7262,9 @@
           <a:p>
             <a:pPr>
               <a:spcAft>
-                <a:spcPts val="700"/>
-              </a:spcAft>
-              <a:defRPr sz="1100">
+                <a:spcPts val="1000"/>
+              </a:spcAft>
+              <a:defRPr sz="1350">
                 <a:solidFill>
                   <a:srgbClr val="0F172A"/>
                 </a:solidFill>
@@ -7232,9 +7277,9 @@
           <a:p>
             <a:pPr>
               <a:spcAft>
-                <a:spcPts val="700"/>
-              </a:spcAft>
-              <a:defRPr sz="1100">
+                <a:spcPts val="1000"/>
+              </a:spcAft>
+              <a:defRPr sz="1350">
                 <a:solidFill>
                   <a:srgbClr val="0F172A"/>
                 </a:solidFill>
@@ -7247,9 +7292,9 @@
           <a:p>
             <a:pPr>
               <a:spcAft>
-                <a:spcPts val="700"/>
-              </a:spcAft>
-              <a:defRPr sz="1100">
+                <a:spcPts val="1000"/>
+              </a:spcAft>
+              <a:defRPr sz="1350">
                 <a:solidFill>
                   <a:srgbClr val="0F172A"/>
                 </a:solidFill>
@@ -7262,9 +7307,9 @@
           <a:p>
             <a:pPr>
               <a:spcAft>
-                <a:spcPts val="700"/>
-              </a:spcAft>
-              <a:defRPr sz="1100">
+                <a:spcPts val="1000"/>
+              </a:spcAft>
+              <a:defRPr sz="1350">
                 <a:solidFill>
                   <a:srgbClr val="0F172A"/>
                 </a:solidFill>
@@ -7346,7 +7391,7 @@
         <p:spPr>
           <a:xfrm>
             <a:off x="0" y="0"/>
-            <a:ext cx="12191695" cy="1051560"/>
+            <a:ext cx="12191695" cy="1078992"/>
           </a:xfrm>
           <a:prstGeom prst="rect">
             <a:avLst/>
@@ -7388,8 +7433,8 @@
         </p:nvSpPr>
         <p:spPr>
           <a:xfrm>
-            <a:off x="0" y="1051560"/>
-            <a:ext cx="12191695" cy="54864"/>
+            <a:off x="0" y="1078992"/>
+            <a:ext cx="12191695" cy="64008"/>
           </a:xfrm>
           <a:prstGeom prst="rect">
             <a:avLst/>
@@ -7431,8 +7476,8 @@
         </p:nvSpPr>
         <p:spPr>
           <a:xfrm>
-            <a:off x="7772400" y="182880"/>
-            <a:ext cx="3931920" cy="685800"/>
+            <a:off x="7498079" y="164592"/>
+            <a:ext cx="4114800" cy="777240"/>
           </a:xfrm>
           <a:prstGeom prst="rect">
             <a:avLst/>
@@ -7446,7 +7491,7 @@
           <a:lstStyle/>
           <a:p>
             <a:pPr algn="r">
-              <a:defRPr sz="950" b="1">
+              <a:defRPr sz="1100" b="1">
                 <a:solidFill>
                   <a:srgbClr val="F97316"/>
                 </a:solidFill>
@@ -7470,8 +7515,8 @@
         </p:nvSpPr>
         <p:spPr>
           <a:xfrm>
-            <a:off x="731520" y="228600"/>
-            <a:ext cx="6858000" cy="640080"/>
+            <a:off x="594360" y="201168"/>
+            <a:ext cx="6858000" cy="685800"/>
           </a:xfrm>
           <a:prstGeom prst="rect">
             <a:avLst/>
@@ -7485,7 +7530,7 @@
           <a:lstStyle/>
           <a:p>
             <a:pPr>
-              <a:defRPr sz="2200" b="1">
+              <a:defRPr sz="2400" b="1">
                 <a:solidFill>
                   <a:srgbClr val="FFFFFF"/>
                 </a:solidFill>
@@ -7505,8 +7550,8 @@
         </p:nvSpPr>
         <p:spPr>
           <a:xfrm>
-            <a:off x="0" y="6492240"/>
-            <a:ext cx="12191695" cy="365760"/>
+            <a:off x="0" y="6473952"/>
+            <a:ext cx="12191695" cy="384048"/>
           </a:xfrm>
           <a:prstGeom prst="rect">
             <a:avLst/>
@@ -7516,7 +7561,7 @@
           </a:solidFill>
           <a:ln>
             <a:solidFill>
-              <a:srgbClr val="E2E8F0"/>
+              <a:srgbClr val="CBD5E1"/>
             </a:solidFill>
           </a:ln>
         </p:spPr>
@@ -7550,8 +7595,8 @@
         </p:nvSpPr>
         <p:spPr>
           <a:xfrm>
-            <a:off x="731520" y="6510528"/>
-            <a:ext cx="7315200" cy="320040"/>
+            <a:off x="594360" y="6510528"/>
+            <a:ext cx="7772400" cy="320040"/>
           </a:xfrm>
           <a:prstGeom prst="rect">
             <a:avLst/>
@@ -7565,7 +7610,7 @@
           <a:lstStyle/>
           <a:p>
             <a:pPr>
-              <a:defRPr sz="950">
+              <a:defRPr sz="1050">
                 <a:solidFill>
                   <a:srgbClr val="64748B"/>
                 </a:solidFill>
@@ -7586,7 +7631,7 @@
         <p:spPr>
           <a:xfrm>
             <a:off x="9601200" y="6510528"/>
-            <a:ext cx="1828800" cy="320040"/>
+            <a:ext cx="2011680" cy="320040"/>
           </a:xfrm>
           <a:prstGeom prst="rect">
             <a:avLst/>
@@ -7600,7 +7645,7 @@
           <a:lstStyle/>
           <a:p>
             <a:pPr algn="r">
-              <a:defRPr sz="950" b="1">
+              <a:defRPr sz="1100" b="1">
                 <a:solidFill>
                   <a:srgbClr val="0F2557"/>
                 </a:solidFill>
@@ -7620,8 +7665,8 @@
         </p:nvSpPr>
         <p:spPr>
           <a:xfrm>
-            <a:off x="731520" y="1371600"/>
-            <a:ext cx="2468880" cy="4846320"/>
+            <a:off x="594360" y="1234440"/>
+            <a:ext cx="2578608" cy="5120640"/>
           </a:xfrm>
           <a:prstGeom prst="roundRect">
             <a:avLst/>
@@ -7629,9 +7674,9 @@
           <a:solidFill>
             <a:srgbClr val="FFFFFF"/>
           </a:solidFill>
-          <a:ln w="15240">
+          <a:ln w="19050">
             <a:solidFill>
-              <a:srgbClr val="E2E8F0"/>
+              <a:srgbClr val="CBD5E1"/>
             </a:solidFill>
           </a:ln>
         </p:spPr>
@@ -7665,8 +7710,8 @@
         </p:nvSpPr>
         <p:spPr>
           <a:xfrm>
-            <a:off x="731520" y="1371600"/>
-            <a:ext cx="2468880" cy="502920"/>
+            <a:off x="594360" y="1234440"/>
+            <a:ext cx="2578608" cy="621792"/>
           </a:xfrm>
           <a:prstGeom prst="roundRect">
             <a:avLst/>
@@ -7708,8 +7753,8 @@
         </p:nvSpPr>
         <p:spPr>
           <a:xfrm>
-            <a:off x="914400" y="1444752"/>
-            <a:ext cx="2103120" cy="411480"/>
+            <a:off x="777240" y="1289304"/>
+            <a:ext cx="2212848" cy="548640"/>
           </a:xfrm>
           <a:prstGeom prst="rect">
             <a:avLst/>
@@ -7723,7 +7768,7 @@
           <a:lstStyle/>
           <a:p>
             <a:pPr>
-              <a:defRPr sz="1300" b="1">
+              <a:defRPr sz="1550" b="1">
                 <a:solidFill>
                   <a:srgbClr val="FFFFFF"/>
                 </a:solidFill>
@@ -7735,9 +7780,9 @@
           </a:p>
           <a:p>
             <a:pPr>
-              <a:defRPr sz="900">
-                <a:solidFill>
-                  <a:srgbClr val="DCEBFF"/>
+              <a:defRPr sz="1000" b="1">
+                <a:solidFill>
+                  <a:srgbClr val="E0F2FE"/>
                 </a:solidFill>
               </a:defRPr>
             </a:pPr>
@@ -7755,8 +7800,8 @@
         </p:nvSpPr>
         <p:spPr>
           <a:xfrm>
-            <a:off x="914400" y="1965960"/>
-            <a:ext cx="2103120" cy="4160520"/>
+            <a:off x="777240" y="1965960"/>
+            <a:ext cx="2212848" cy="4315968"/>
           </a:xfrm>
           <a:prstGeom prst="rect">
             <a:avLst/>
@@ -7771,24 +7816,24 @@
           <a:p>
             <a:pPr>
               <a:spcAft>
-                <a:spcPts val="700"/>
-              </a:spcAft>
-              <a:defRPr sz="1100">
-                <a:solidFill>
-                  <a:srgbClr val="0F172A"/>
-                </a:solidFill>
-              </a:defRPr>
-            </a:pPr>
-            <a:r>
-              <a:t>•  Input: gtu.ac.in/Circular.aspx</a:t>
-            </a:r>
-          </a:p>
-          <a:p>
-            <a:pPr>
-              <a:spcAft>
-                <a:spcPts val="700"/>
-              </a:spcAft>
-              <a:defRPr sz="1100">
+                <a:spcPts val="1100"/>
+              </a:spcAft>
+              <a:defRPr sz="1250">
+                <a:solidFill>
+                  <a:srgbClr val="0F172A"/>
+                </a:solidFill>
+              </a:defRPr>
+            </a:pPr>
+            <a:r>
+              <a:t>•  Source: gtu.ac.in/Circular.aspx</a:t>
+            </a:r>
+          </a:p>
+          <a:p>
+            <a:pPr>
+              <a:spcAft>
+                <a:spcPts val="1100"/>
+              </a:spcAft>
+              <a:defRPr sz="1250">
                 <a:solidFill>
                   <a:srgbClr val="0F172A"/>
                 </a:solidFill>
@@ -7801,54 +7846,54 @@
           <a:p>
             <a:pPr>
               <a:spcAft>
-                <a:spcPts val="700"/>
-              </a:spcAft>
-              <a:defRPr sz="1100">
-                <a:solidFill>
-                  <a:srgbClr val="0F172A"/>
-                </a:solidFill>
-              </a:defRPr>
-            </a:pPr>
-            <a:r>
-              <a:t>•  User-Agent &amp; Timeout Guards</a:t>
-            </a:r>
-          </a:p>
-          <a:p>
-            <a:pPr>
-              <a:spcAft>
-                <a:spcPts val="700"/>
-              </a:spcAft>
-              <a:defRPr sz="1100">
-                <a:solidFill>
-                  <a:srgbClr val="0F172A"/>
-                </a:solidFill>
-              </a:defRPr>
-            </a:pPr>
-            <a:r>
-              <a:t>•  Fetches top 20 circulars (under 50 KB)</a:t>
-            </a:r>
-          </a:p>
-          <a:p>
-            <a:pPr>
-              <a:spcAft>
-                <a:spcPts val="700"/>
-              </a:spcAft>
-              <a:defRPr sz="1100">
-                <a:solidFill>
-                  <a:srgbClr val="0F172A"/>
-                </a:solidFill>
-              </a:defRPr>
-            </a:pPr>
-            <a:r>
-              <a:t>•  15-Minute Polling Cycle</a:t>
-            </a:r>
-          </a:p>
-          <a:p>
-            <a:pPr>
-              <a:spcAft>
-                <a:spcPts val="700"/>
-              </a:spcAft>
-              <a:defRPr sz="1100">
+                <a:spcPts val="1100"/>
+              </a:spcAft>
+              <a:defRPr sz="1250">
+                <a:solidFill>
+                  <a:srgbClr val="0F172A"/>
+                </a:solidFill>
+              </a:defRPr>
+            </a:pPr>
+            <a:r>
+              <a:t>•  Custom User-Agent &amp; Timeout Guards</a:t>
+            </a:r>
+          </a:p>
+          <a:p>
+            <a:pPr>
+              <a:spcAft>
+                <a:spcPts val="1100"/>
+              </a:spcAft>
+              <a:defRPr sz="1250">
+                <a:solidFill>
+                  <a:srgbClr val="0F172A"/>
+                </a:solidFill>
+              </a:defRPr>
+            </a:pPr>
+            <a:r>
+              <a:t>•  Fetches top 20 circulars (&lt;50 KB)</a:t>
+            </a:r>
+          </a:p>
+          <a:p>
+            <a:pPr>
+              <a:spcAft>
+                <a:spcPts val="1100"/>
+              </a:spcAft>
+              <a:defRPr sz="1250">
+                <a:solidFill>
+                  <a:srgbClr val="0F172A"/>
+                </a:solidFill>
+              </a:defRPr>
+            </a:pPr>
+            <a:r>
+              <a:t>•  15-Minute Scheduled Polling Cycle</a:t>
+            </a:r>
+          </a:p>
+          <a:p>
+            <a:pPr>
+              <a:spcAft>
+                <a:spcPts val="1100"/>
+              </a:spcAft>
+              <a:defRPr sz="1250">
                 <a:solidFill>
                   <a:srgbClr val="0F172A"/>
                 </a:solidFill>
@@ -7861,9 +7906,9 @@
           <a:p>
             <a:pPr>
               <a:spcAft>
-                <a:spcPts val="700"/>
-              </a:spcAft>
-              <a:defRPr sz="1100">
+                <a:spcPts val="1100"/>
+              </a:spcAft>
+              <a:defRPr sz="1250">
                 <a:solidFill>
                   <a:srgbClr val="0F172A"/>
                 </a:solidFill>
@@ -7883,8 +7928,8 @@
         </p:nvSpPr>
         <p:spPr>
           <a:xfrm>
-            <a:off x="3474720" y="1371600"/>
-            <a:ext cx="2468880" cy="4846320"/>
+            <a:off x="3392424" y="1234440"/>
+            <a:ext cx="2578608" cy="5120640"/>
           </a:xfrm>
           <a:prstGeom prst="roundRect">
             <a:avLst/>
@@ -7892,9 +7937,9 @@
           <a:solidFill>
             <a:srgbClr val="FFFFFF"/>
           </a:solidFill>
-          <a:ln w="15240">
+          <a:ln w="19050">
             <a:solidFill>
-              <a:srgbClr val="E2E8F0"/>
+              <a:srgbClr val="CBD5E1"/>
             </a:solidFill>
           </a:ln>
         </p:spPr>
@@ -7928,8 +7973,8 @@
         </p:nvSpPr>
         <p:spPr>
           <a:xfrm>
-            <a:off x="3474720" y="1371600"/>
-            <a:ext cx="2468880" cy="502920"/>
+            <a:off x="3392424" y="1234440"/>
+            <a:ext cx="2578608" cy="621792"/>
           </a:xfrm>
           <a:prstGeom prst="roundRect">
             <a:avLst/>
@@ -7971,8 +8016,8 @@
         </p:nvSpPr>
         <p:spPr>
           <a:xfrm>
-            <a:off x="3657600" y="1444752"/>
-            <a:ext cx="2103120" cy="411480"/>
+            <a:off x="3575304" y="1289304"/>
+            <a:ext cx="2212848" cy="548640"/>
           </a:xfrm>
           <a:prstGeom prst="rect">
             <a:avLst/>
@@ -7986,7 +8031,7 @@
           <a:lstStyle/>
           <a:p>
             <a:pPr>
-              <a:defRPr sz="1300" b="1">
+              <a:defRPr sz="1550" b="1">
                 <a:solidFill>
                   <a:srgbClr val="FFFFFF"/>
                 </a:solidFill>
@@ -7998,9 +8043,9 @@
           </a:p>
           <a:p>
             <a:pPr>
-              <a:defRPr sz="900">
-                <a:solidFill>
-                  <a:srgbClr val="DCEBFF"/>
+              <a:defRPr sz="1000" b="1">
+                <a:solidFill>
+                  <a:srgbClr val="E0F2FE"/>
                 </a:solidFill>
               </a:defRPr>
             </a:pPr>
@@ -8018,8 +8063,8 @@
         </p:nvSpPr>
         <p:spPr>
           <a:xfrm>
-            <a:off x="3657600" y="1965960"/>
-            <a:ext cx="2103120" cy="4160520"/>
+            <a:off x="3575304" y="1965960"/>
+            <a:ext cx="2212848" cy="4315968"/>
           </a:xfrm>
           <a:prstGeom prst="rect">
             <a:avLst/>
@@ -8034,9 +8079,9 @@
           <a:p>
             <a:pPr>
               <a:spcAft>
-                <a:spcPts val="700"/>
-              </a:spcAft>
-              <a:defRPr sz="1100">
+                <a:spcPts val="1100"/>
+              </a:spcAft>
+              <a:defRPr sz="1250">
                 <a:solidFill>
                   <a:srgbClr val="0F172A"/>
                 </a:solidFill>
@@ -8049,9 +8094,9 @@
           <a:p>
             <a:pPr>
               <a:spcAft>
-                <a:spcPts val="700"/>
-              </a:spcAft>
-              <a:defRPr sz="1100">
+                <a:spcPts val="1100"/>
+              </a:spcAft>
+              <a:defRPr sz="1250">
                 <a:solidFill>
                   <a:srgbClr val="0F172A"/>
                 </a:solidFill>
@@ -8064,9 +8109,9 @@
           <a:p>
             <a:pPr>
               <a:spcAft>
-                <a:spcPts val="700"/>
-              </a:spcAft>
-              <a:defRPr sz="1100">
+                <a:spcPts val="1100"/>
+              </a:spcAft>
+              <a:defRPr sz="1250">
                 <a:solidFill>
                   <a:srgbClr val="0F172A"/>
                 </a:solidFill>
@@ -8079,9 +8124,9 @@
           <a:p>
             <a:pPr>
               <a:spcAft>
-                <a:spcPts val="700"/>
-              </a:spcAft>
-              <a:defRPr sz="1100">
+                <a:spcPts val="1100"/>
+              </a:spcAft>
+              <a:defRPr sz="1250">
                 <a:solidFill>
                   <a:srgbClr val="0F172A"/>
                 </a:solidFill>
@@ -8094,9 +8139,9 @@
           <a:p>
             <a:pPr>
               <a:spcAft>
-                <a:spcPts val="700"/>
-              </a:spcAft>
-              <a:defRPr sz="1100">
+                <a:spcPts val="1100"/>
+              </a:spcAft>
+              <a:defRPr sz="1250">
                 <a:solidFill>
                   <a:srgbClr val="0F172A"/>
                 </a:solidFill>
@@ -8109,31 +8154,31 @@
           <a:p>
             <a:pPr>
               <a:spcAft>
-                <a:spcPts val="700"/>
-              </a:spcAft>
-              <a:defRPr sz="1100">
-                <a:solidFill>
-                  <a:srgbClr val="0F172A"/>
-                </a:solidFill>
-              </a:defRPr>
-            </a:pPr>
-            <a:r>
-              <a:t>•  Serverless data pipeline</a:t>
-            </a:r>
-          </a:p>
-          <a:p>
-            <a:pPr>
-              <a:spcAft>
-                <a:spcPts val="700"/>
-              </a:spcAft>
-              <a:defRPr sz="1100">
-                <a:solidFill>
-                  <a:srgbClr val="0F172A"/>
-                </a:solidFill>
-              </a:defRPr>
-            </a:pPr>
-            <a:r>
-              <a:t>•  Zero ongoing server expense</a:t>
+                <a:spcPts val="1100"/>
+              </a:spcAft>
+              <a:defRPr sz="1250">
+                <a:solidFill>
+                  <a:srgbClr val="0F172A"/>
+                </a:solidFill>
+              </a:defRPr>
+            </a:pPr>
+            <a:r>
+              <a:t>•  Serverless data pipeline architecture</a:t>
+            </a:r>
+          </a:p>
+          <a:p>
+            <a:pPr>
+              <a:spcAft>
+                <a:spcPts val="1100"/>
+              </a:spcAft>
+              <a:defRPr sz="1250">
+                <a:solidFill>
+                  <a:srgbClr val="0F172A"/>
+                </a:solidFill>
+              </a:defRPr>
+            </a:pPr>
+            <a:r>
+              <a:t>•  Zero ongoing cloud database cost</a:t>
             </a:r>
           </a:p>
         </p:txBody>
@@ -8146,8 +8191,8 @@
         </p:nvSpPr>
         <p:spPr>
           <a:xfrm>
-            <a:off x="6217920" y="1371600"/>
-            <a:ext cx="2468880" cy="4846320"/>
+            <a:off x="6190488" y="1234440"/>
+            <a:ext cx="2578608" cy="5120640"/>
           </a:xfrm>
           <a:prstGeom prst="roundRect">
             <a:avLst/>
@@ -8155,9 +8200,9 @@
           <a:solidFill>
             <a:srgbClr val="FFFFFF"/>
           </a:solidFill>
-          <a:ln w="15240">
+          <a:ln w="19050">
             <a:solidFill>
-              <a:srgbClr val="E2E8F0"/>
+              <a:srgbClr val="CBD5E1"/>
             </a:solidFill>
           </a:ln>
         </p:spPr>
@@ -8191,8 +8236,8 @@
         </p:nvSpPr>
         <p:spPr>
           <a:xfrm>
-            <a:off x="6217920" y="1371600"/>
-            <a:ext cx="2468880" cy="502920"/>
+            <a:off x="6190488" y="1234440"/>
+            <a:ext cx="2578608" cy="621792"/>
           </a:xfrm>
           <a:prstGeom prst="roundRect">
             <a:avLst/>
@@ -8234,8 +8279,8 @@
         </p:nvSpPr>
         <p:spPr>
           <a:xfrm>
-            <a:off x="6400800" y="1444752"/>
-            <a:ext cx="2103120" cy="411480"/>
+            <a:off x="6373368" y="1289304"/>
+            <a:ext cx="2212848" cy="548640"/>
           </a:xfrm>
           <a:prstGeom prst="rect">
             <a:avLst/>
@@ -8249,7 +8294,7 @@
           <a:lstStyle/>
           <a:p>
             <a:pPr>
-              <a:defRPr sz="1300" b="1">
+              <a:defRPr sz="1550" b="1">
                 <a:solidFill>
                   <a:srgbClr val="FFFFFF"/>
                 </a:solidFill>
@@ -8261,9 +8306,9 @@
           </a:p>
           <a:p>
             <a:pPr>
-              <a:defRPr sz="900">
-                <a:solidFill>
-                  <a:srgbClr val="DCEBFF"/>
+              <a:defRPr sz="1000" b="1">
+                <a:solidFill>
+                  <a:srgbClr val="E0F2FE"/>
                 </a:solidFill>
               </a:defRPr>
             </a:pPr>
@@ -8281,8 +8326,8 @@
         </p:nvSpPr>
         <p:spPr>
           <a:xfrm>
-            <a:off x="6400800" y="1965960"/>
-            <a:ext cx="2103120" cy="4160520"/>
+            <a:off x="6373368" y="1965960"/>
+            <a:ext cx="2212848" cy="4315968"/>
           </a:xfrm>
           <a:prstGeom prst="rect">
             <a:avLst/>
@@ -8297,9 +8342,9 @@
           <a:p>
             <a:pPr>
               <a:spcAft>
-                <a:spcPts val="700"/>
-              </a:spcAft>
-              <a:defRPr sz="1100">
+                <a:spcPts val="1100"/>
+              </a:spcAft>
+              <a:defRPr sz="1250">
                 <a:solidFill>
                   <a:srgbClr val="0F172A"/>
                 </a:solidFill>
@@ -8312,9 +8357,9 @@
           <a:p>
             <a:pPr>
               <a:spcAft>
-                <a:spcPts val="700"/>
-              </a:spcAft>
-              <a:defRPr sz="1100">
+                <a:spcPts val="1100"/>
+              </a:spcAft>
+              <a:defRPr sz="1250">
                 <a:solidFill>
                   <a:srgbClr val="0F172A"/>
                 </a:solidFill>
@@ -8327,9 +8372,9 @@
           <a:p>
             <a:pPr>
               <a:spcAft>
-                <a:spcPts val="700"/>
-              </a:spcAft>
-              <a:defRPr sz="1100">
+                <a:spcPts val="1100"/>
+              </a:spcAft>
+              <a:defRPr sz="1250">
                 <a:solidFill>
                   <a:srgbClr val="0F172A"/>
                 </a:solidFill>
@@ -8342,9 +8387,9 @@
           <a:p>
             <a:pPr>
               <a:spcAft>
-                <a:spcPts val="700"/>
-              </a:spcAft>
-              <a:defRPr sz="1100">
+                <a:spcPts val="1100"/>
+              </a:spcAft>
+              <a:defRPr sz="1250">
                 <a:solidFill>
                   <a:srgbClr val="0F172A"/>
                 </a:solidFill>
@@ -8357,9 +8402,9 @@
           <a:p>
             <a:pPr>
               <a:spcAft>
-                <a:spcPts val="700"/>
-              </a:spcAft>
-              <a:defRPr sz="1100">
+                <a:spcPts val="1100"/>
+              </a:spcAft>
+              <a:defRPr sz="1250">
                 <a:solidFill>
                   <a:srgbClr val="0F172A"/>
                 </a:solidFill>
@@ -8372,9 +8417,9 @@
           <a:p>
             <a:pPr>
               <a:spcAft>
-                <a:spcPts val="700"/>
-              </a:spcAft>
-              <a:defRPr sz="1100">
+                <a:spcPts val="1100"/>
+              </a:spcAft>
+              <a:defRPr sz="1250">
                 <a:solidFill>
                   <a:srgbClr val="0F172A"/>
                 </a:solidFill>
@@ -8387,16 +8432,16 @@
           <a:p>
             <a:pPr>
               <a:spcAft>
-                <a:spcPts val="700"/>
-              </a:spcAft>
-              <a:defRPr sz="1100">
-                <a:solidFill>
-                  <a:srgbClr val="0F172A"/>
-                </a:solidFill>
-              </a:defRPr>
-            </a:pPr>
-            <a:r>
-              <a:t>•  pdf_inspector.py: Safe cached PDF text stream</a:t>
+                <a:spcPts val="1100"/>
+              </a:spcAft>
+              <a:defRPr sz="1250">
+                <a:solidFill>
+                  <a:srgbClr val="0F172A"/>
+                </a:solidFill>
+              </a:defRPr>
+            </a:pPr>
+            <a:r>
+              <a:t>•  pdf_inspector.py: Safe cached text stream</a:t>
             </a:r>
           </a:p>
         </p:txBody>
@@ -8409,8 +8454,8 @@
         </p:nvSpPr>
         <p:spPr>
           <a:xfrm>
-            <a:off x="8961120" y="1371600"/>
-            <a:ext cx="2468880" cy="4846320"/>
+            <a:off x="8988552" y="1234440"/>
+            <a:ext cx="2578608" cy="5120640"/>
           </a:xfrm>
           <a:prstGeom prst="roundRect">
             <a:avLst/>
@@ -8418,9 +8463,9 @@
           <a:solidFill>
             <a:srgbClr val="FFFFFF"/>
           </a:solidFill>
-          <a:ln w="15240">
+          <a:ln w="19050">
             <a:solidFill>
-              <a:srgbClr val="E2E8F0"/>
+              <a:srgbClr val="CBD5E1"/>
             </a:solidFill>
           </a:ln>
         </p:spPr>
@@ -8454,8 +8499,8 @@
         </p:nvSpPr>
         <p:spPr>
           <a:xfrm>
-            <a:off x="8961120" y="1371600"/>
-            <a:ext cx="2468880" cy="502920"/>
+            <a:off x="8988552" y="1234440"/>
+            <a:ext cx="2578608" cy="621792"/>
           </a:xfrm>
           <a:prstGeom prst="roundRect">
             <a:avLst/>
@@ -8497,8 +8542,8 @@
         </p:nvSpPr>
         <p:spPr>
           <a:xfrm>
-            <a:off x="9144000" y="1444752"/>
-            <a:ext cx="2103120" cy="411480"/>
+            <a:off x="9171432" y="1289304"/>
+            <a:ext cx="2212848" cy="548640"/>
           </a:xfrm>
           <a:prstGeom prst="rect">
             <a:avLst/>
@@ -8512,7 +8557,7 @@
           <a:lstStyle/>
           <a:p>
             <a:pPr>
-              <a:defRPr sz="1300" b="1">
+              <a:defRPr sz="1550" b="1">
                 <a:solidFill>
                   <a:srgbClr val="FFFFFF"/>
                 </a:solidFill>
@@ -8524,9 +8569,9 @@
           </a:p>
           <a:p>
             <a:pPr>
-              <a:defRPr sz="900">
-                <a:solidFill>
-                  <a:srgbClr val="DCEBFF"/>
+              <a:defRPr sz="1000" b="1">
+                <a:solidFill>
+                  <a:srgbClr val="E0F2FE"/>
                 </a:solidFill>
               </a:defRPr>
             </a:pPr>
@@ -8544,8 +8589,8 @@
         </p:nvSpPr>
         <p:spPr>
           <a:xfrm>
-            <a:off x="9144000" y="1965960"/>
-            <a:ext cx="2103120" cy="4160520"/>
+            <a:off x="9171432" y="1965960"/>
+            <a:ext cx="2212848" cy="4315968"/>
           </a:xfrm>
           <a:prstGeom prst="rect">
             <a:avLst/>
@@ -8560,9 +8605,9 @@
           <a:p>
             <a:pPr>
               <a:spcAft>
-                <a:spcPts val="700"/>
-              </a:spcAft>
-              <a:defRPr sz="1100">
+                <a:spcPts val="1100"/>
+              </a:spcAft>
+              <a:defRPr sz="1250">
                 <a:solidFill>
                   <a:srgbClr val="0F172A"/>
                 </a:solidFill>
@@ -8575,9 +8620,9 @@
           <a:p>
             <a:pPr>
               <a:spcAft>
-                <a:spcPts val="700"/>
-              </a:spcAft>
-              <a:defRPr sz="1100">
+                <a:spcPts val="1100"/>
+              </a:spcAft>
+              <a:defRPr sz="1250">
                 <a:solidFill>
                   <a:srgbClr val="0F172A"/>
                 </a:solidFill>
@@ -8590,9 +8635,9 @@
           <a:p>
             <a:pPr>
               <a:spcAft>
-                <a:spcPts val="700"/>
-              </a:spcAft>
-              <a:defRPr sz="1100">
+                <a:spcPts val="1100"/>
+              </a:spcAft>
+              <a:defRPr sz="1250">
                 <a:solidFill>
                   <a:srgbClr val="0F172A"/>
                 </a:solidFill>
@@ -8605,9 +8650,9 @@
           <a:p>
             <a:pPr>
               <a:spcAft>
-                <a:spcPts val="700"/>
-              </a:spcAft>
-              <a:defRPr sz="1100">
+                <a:spcPts val="1100"/>
+              </a:spcAft>
+              <a:defRPr sz="1250">
                 <a:solidFill>
                   <a:srgbClr val="0F172A"/>
                 </a:solidFill>
@@ -8620,9 +8665,9 @@
           <a:p>
             <a:pPr>
               <a:spcAft>
-                <a:spcPts val="700"/>
-              </a:spcAft>
-              <a:defRPr sz="1100">
+                <a:spcPts val="1100"/>
+              </a:spcAft>
+              <a:defRPr sz="1250">
                 <a:solidFill>
                   <a:srgbClr val="0F172A"/>
                 </a:solidFill>
@@ -8635,9 +8680,9 @@
           <a:p>
             <a:pPr>
               <a:spcAft>
-                <a:spcPts val="700"/>
-              </a:spcAft>
-              <a:defRPr sz="1100">
+                <a:spcPts val="1100"/>
+              </a:spcAft>
+              <a:defRPr sz="1250">
                 <a:solidFill>
                   <a:srgbClr val="0F172A"/>
                 </a:solidFill>
@@ -8650,9 +8695,9 @@
           <a:p>
             <a:pPr>
               <a:spcAft>
-                <a:spcPts val="700"/>
-              </a:spcAft>
-              <a:defRPr sz="1100">
+                <a:spcPts val="1100"/>
+              </a:spcAft>
+              <a:defRPr sz="1250">
                 <a:solidFill>
                   <a:srgbClr val="0F172A"/>
                 </a:solidFill>
@@ -8734,7 +8779,7 @@
         <p:spPr>
           <a:xfrm>
             <a:off x="0" y="0"/>
-            <a:ext cx="12191695" cy="1051560"/>
+            <a:ext cx="12191695" cy="1078992"/>
           </a:xfrm>
           <a:prstGeom prst="rect">
             <a:avLst/>
@@ -8776,8 +8821,8 @@
         </p:nvSpPr>
         <p:spPr>
           <a:xfrm>
-            <a:off x="0" y="1051560"/>
-            <a:ext cx="12191695" cy="54864"/>
+            <a:off x="0" y="1078992"/>
+            <a:ext cx="12191695" cy="64008"/>
           </a:xfrm>
           <a:prstGeom prst="rect">
             <a:avLst/>
@@ -8819,8 +8864,8 @@
         </p:nvSpPr>
         <p:spPr>
           <a:xfrm>
-            <a:off x="7772400" y="182880"/>
-            <a:ext cx="3931920" cy="685800"/>
+            <a:off x="7498079" y="164592"/>
+            <a:ext cx="4114800" cy="777240"/>
           </a:xfrm>
           <a:prstGeom prst="rect">
             <a:avLst/>
@@ -8834,7 +8879,7 @@
           <a:lstStyle/>
           <a:p>
             <a:pPr algn="r">
-              <a:defRPr sz="950" b="1">
+              <a:defRPr sz="1100" b="1">
                 <a:solidFill>
                   <a:srgbClr val="F97316"/>
                 </a:solidFill>
@@ -8858,8 +8903,8 @@
         </p:nvSpPr>
         <p:spPr>
           <a:xfrm>
-            <a:off x="731520" y="228600"/>
-            <a:ext cx="6858000" cy="640080"/>
+            <a:off x="594360" y="201168"/>
+            <a:ext cx="6858000" cy="685800"/>
           </a:xfrm>
           <a:prstGeom prst="rect">
             <a:avLst/>
@@ -8873,7 +8918,7 @@
           <a:lstStyle/>
           <a:p>
             <a:pPr>
-              <a:defRPr sz="2200" b="1">
+              <a:defRPr sz="2400" b="1">
                 <a:solidFill>
                   <a:srgbClr val="FFFFFF"/>
                 </a:solidFill>
@@ -8893,8 +8938,8 @@
         </p:nvSpPr>
         <p:spPr>
           <a:xfrm>
-            <a:off x="0" y="6492240"/>
-            <a:ext cx="12191695" cy="365760"/>
+            <a:off x="0" y="6473952"/>
+            <a:ext cx="12191695" cy="384048"/>
           </a:xfrm>
           <a:prstGeom prst="rect">
             <a:avLst/>
@@ -8904,7 +8949,7 @@
           </a:solidFill>
           <a:ln>
             <a:solidFill>
-              <a:srgbClr val="E2E8F0"/>
+              <a:srgbClr val="CBD5E1"/>
             </a:solidFill>
           </a:ln>
         </p:spPr>
@@ -8938,8 +8983,8 @@
         </p:nvSpPr>
         <p:spPr>
           <a:xfrm>
-            <a:off x="731520" y="6510528"/>
-            <a:ext cx="7315200" cy="320040"/>
+            <a:off x="594360" y="6510528"/>
+            <a:ext cx="7772400" cy="320040"/>
           </a:xfrm>
           <a:prstGeom prst="rect">
             <a:avLst/>
@@ -8953,7 +8998,7 @@
           <a:lstStyle/>
           <a:p>
             <a:pPr>
-              <a:defRPr sz="950">
+              <a:defRPr sz="1050">
                 <a:solidFill>
                   <a:srgbClr val="64748B"/>
                 </a:solidFill>
@@ -8974,7 +9019,7 @@
         <p:spPr>
           <a:xfrm>
             <a:off x="9601200" y="6510528"/>
-            <a:ext cx="1828800" cy="320040"/>
+            <a:ext cx="2011680" cy="320040"/>
           </a:xfrm>
           <a:prstGeom prst="rect">
             <a:avLst/>
@@ -8988,7 +9033,7 @@
           <a:lstStyle/>
           <a:p>
             <a:pPr algn="r">
-              <a:defRPr sz="950" b="1">
+              <a:defRPr sz="1100" b="1">
                 <a:solidFill>
                   <a:srgbClr val="0F2557"/>
                 </a:solidFill>
@@ -9008,8 +9053,8 @@
         </p:nvSpPr>
         <p:spPr>
           <a:xfrm>
-            <a:off x="731520" y="1371600"/>
-            <a:ext cx="5212080" cy="4846320"/>
+            <a:off x="594360" y="1234440"/>
+            <a:ext cx="5376672" cy="5120640"/>
           </a:xfrm>
           <a:prstGeom prst="roundRect">
             <a:avLst/>
@@ -9017,9 +9062,9 @@
           <a:solidFill>
             <a:srgbClr val="FFFFFF"/>
           </a:solidFill>
-          <a:ln w="15240">
+          <a:ln w="19050">
             <a:solidFill>
-              <a:srgbClr val="E2E8F0"/>
+              <a:srgbClr val="CBD5E1"/>
             </a:solidFill>
           </a:ln>
         </p:spPr>
@@ -9053,8 +9098,8 @@
         </p:nvSpPr>
         <p:spPr>
           <a:xfrm>
-            <a:off x="731520" y="1371600"/>
-            <a:ext cx="5212080" cy="502920"/>
+            <a:off x="594360" y="1234440"/>
+            <a:ext cx="5376672" cy="621792"/>
           </a:xfrm>
           <a:prstGeom prst="roundRect">
             <a:avLst/>
@@ -9096,8 +9141,8 @@
         </p:nvSpPr>
         <p:spPr>
           <a:xfrm>
-            <a:off x="914400" y="1444752"/>
-            <a:ext cx="4846320" cy="411480"/>
+            <a:off x="777240" y="1289304"/>
+            <a:ext cx="5010912" cy="548640"/>
           </a:xfrm>
           <a:prstGeom prst="rect">
             <a:avLst/>
@@ -9111,7 +9156,7 @@
           <a:lstStyle/>
           <a:p>
             <a:pPr>
-              <a:defRPr sz="1300" b="1">
+              <a:defRPr sz="1550" b="1">
                 <a:solidFill>
                   <a:srgbClr val="FFFFFF"/>
                 </a:solidFill>
@@ -9123,9 +9168,9 @@
           </a:p>
           <a:p>
             <a:pPr>
-              <a:defRPr sz="900">
-                <a:solidFill>
-                  <a:srgbClr val="DCEBFF"/>
+              <a:defRPr sz="1000" b="1">
+                <a:solidFill>
+                  <a:srgbClr val="E0F2FE"/>
                 </a:solidFill>
               </a:defRPr>
             </a:pPr>
@@ -9143,8 +9188,8 @@
         </p:nvSpPr>
         <p:spPr>
           <a:xfrm>
-            <a:off x="914400" y="1965960"/>
-            <a:ext cx="4846320" cy="4160520"/>
+            <a:off x="777240" y="1965960"/>
+            <a:ext cx="5010912" cy="4315968"/>
           </a:xfrm>
           <a:prstGeom prst="rect">
             <a:avLst/>
@@ -9159,9 +9204,9 @@
           <a:p>
             <a:pPr>
               <a:spcAft>
-                <a:spcPts val="700"/>
-              </a:spcAft>
-              <a:defRPr sz="1100">
+                <a:spcPts val="900"/>
+              </a:spcAft>
+              <a:defRPr sz="1300">
                 <a:solidFill>
                   <a:srgbClr val="0F172A"/>
                 </a:solidFill>
@@ -9174,9 +9219,9 @@
           <a:p>
             <a:pPr>
               <a:spcAft>
-                <a:spcPts val="700"/>
-              </a:spcAft>
-              <a:defRPr sz="1100">
+                <a:spcPts val="900"/>
+              </a:spcAft>
+              <a:defRPr sz="1300">
                 <a:solidFill>
                   <a:srgbClr val="0F172A"/>
                 </a:solidFill>
@@ -9189,9 +9234,9 @@
           <a:p>
             <a:pPr>
               <a:spcAft>
-                <a:spcPts val="700"/>
-              </a:spcAft>
-              <a:defRPr sz="1100">
+                <a:spcPts val="900"/>
+              </a:spcAft>
+              <a:defRPr sz="1300">
                 <a:solidFill>
                   <a:srgbClr val="0F172A"/>
                 </a:solidFill>
@@ -9204,9 +9249,9 @@
           <a:p>
             <a:pPr>
               <a:spcAft>
-                <a:spcPts val="700"/>
-              </a:spcAft>
-              <a:defRPr sz="1100">
+                <a:spcPts val="900"/>
+              </a:spcAft>
+              <a:defRPr sz="1300">
                 <a:solidFill>
                   <a:srgbClr val="0F172A"/>
                 </a:solidFill>
@@ -9219,9 +9264,9 @@
           <a:p>
             <a:pPr>
               <a:spcAft>
-                <a:spcPts val="700"/>
-              </a:spcAft>
-              <a:defRPr sz="1100">
+                <a:spcPts val="900"/>
+              </a:spcAft>
+              <a:defRPr sz="1300">
                 <a:solidFill>
                   <a:srgbClr val="0F172A"/>
                 </a:solidFill>
@@ -9234,9 +9279,9 @@
           <a:p>
             <a:pPr>
               <a:spcAft>
-                <a:spcPts val="700"/>
-              </a:spcAft>
-              <a:defRPr sz="1100">
+                <a:spcPts val="900"/>
+              </a:spcAft>
+              <a:defRPr sz="1300">
                 <a:solidFill>
                   <a:srgbClr val="0F172A"/>
                 </a:solidFill>
@@ -9249,9 +9294,9 @@
           <a:p>
             <a:pPr>
               <a:spcAft>
-                <a:spcPts val="700"/>
-              </a:spcAft>
-              <a:defRPr sz="1100">
+                <a:spcPts val="900"/>
+              </a:spcAft>
+              <a:defRPr sz="1300">
                 <a:solidFill>
                   <a:srgbClr val="0F172A"/>
                 </a:solidFill>
@@ -9264,9 +9309,9 @@
           <a:p>
             <a:pPr>
               <a:spcAft>
-                <a:spcPts val="700"/>
-              </a:spcAft>
-              <a:defRPr sz="1100">
+                <a:spcPts val="900"/>
+              </a:spcAft>
+              <a:defRPr sz="1300">
                 <a:solidFill>
                   <a:srgbClr val="0F172A"/>
                 </a:solidFill>
@@ -9279,9 +9324,9 @@
           <a:p>
             <a:pPr>
               <a:spcAft>
-                <a:spcPts val="700"/>
-              </a:spcAft>
-              <a:defRPr sz="1100">
+                <a:spcPts val="900"/>
+              </a:spcAft>
+              <a:defRPr sz="1300">
                 <a:solidFill>
                   <a:srgbClr val="0F172A"/>
                 </a:solidFill>
@@ -9294,16 +9339,16 @@
           <a:p>
             <a:pPr>
               <a:spcAft>
-                <a:spcPts val="700"/>
-              </a:spcAft>
-              <a:defRPr sz="1100">
-                <a:solidFill>
-                  <a:srgbClr val="0F172A"/>
-                </a:solidFill>
-              </a:defRPr>
-            </a:pPr>
-            <a:r>
-              <a:t>•  Testing Suite: Python unittest (11 automated test suites)</a:t>
+                <a:spcPts val="900"/>
+              </a:spcAft>
+              <a:defRPr sz="1300">
+                <a:solidFill>
+                  <a:srgbClr val="0F172A"/>
+                </a:solidFill>
+              </a:defRPr>
+            </a:pPr>
+            <a:r>
+              <a:t>•  Testing Suite: Python unittest (11 automated test suites passed)</a:t>
             </a:r>
           </a:p>
         </p:txBody>
@@ -9316,8 +9361,8 @@
         </p:nvSpPr>
         <p:spPr>
           <a:xfrm>
-            <a:off x="6217920" y="1371600"/>
-            <a:ext cx="5212080" cy="4846320"/>
+            <a:off x="6190488" y="1234440"/>
+            <a:ext cx="5376672" cy="5120640"/>
           </a:xfrm>
           <a:prstGeom prst="roundRect">
             <a:avLst/>
@@ -9325,9 +9370,9 @@
           <a:solidFill>
             <a:srgbClr val="FFFFFF"/>
           </a:solidFill>
-          <a:ln w="15240">
+          <a:ln w="19050">
             <a:solidFill>
-              <a:srgbClr val="E2E8F0"/>
+              <a:srgbClr val="CBD5E1"/>
             </a:solidFill>
           </a:ln>
         </p:spPr>
@@ -9361,8 +9406,8 @@
         </p:nvSpPr>
         <p:spPr>
           <a:xfrm>
-            <a:off x="6217920" y="1371600"/>
-            <a:ext cx="5212080" cy="502920"/>
+            <a:off x="6190488" y="1234440"/>
+            <a:ext cx="5376672" cy="621792"/>
           </a:xfrm>
           <a:prstGeom prst="roundRect">
             <a:avLst/>
@@ -9404,8 +9449,8 @@
         </p:nvSpPr>
         <p:spPr>
           <a:xfrm>
-            <a:off x="6400800" y="1444752"/>
-            <a:ext cx="4846320" cy="411480"/>
+            <a:off x="6373368" y="1289304"/>
+            <a:ext cx="5010912" cy="548640"/>
           </a:xfrm>
           <a:prstGeom prst="rect">
             <a:avLst/>
@@ -9419,7 +9464,7 @@
           <a:lstStyle/>
           <a:p>
             <a:pPr>
-              <a:defRPr sz="1300" b="1">
+              <a:defRPr sz="1550" b="1">
                 <a:solidFill>
                   <a:srgbClr val="FFFFFF"/>
                 </a:solidFill>
@@ -9431,9 +9476,9 @@
           </a:p>
           <a:p>
             <a:pPr>
-              <a:defRPr sz="900">
-                <a:solidFill>
-                  <a:srgbClr val="DCEBFF"/>
+              <a:defRPr sz="1000" b="1">
+                <a:solidFill>
+                  <a:srgbClr val="E0F2FE"/>
                 </a:solidFill>
               </a:defRPr>
             </a:pPr>
@@ -9451,8 +9496,8 @@
         </p:nvSpPr>
         <p:spPr>
           <a:xfrm>
-            <a:off x="6400800" y="1965960"/>
-            <a:ext cx="4846320" cy="4160520"/>
+            <a:off x="6373368" y="1965960"/>
+            <a:ext cx="5010912" cy="4315968"/>
           </a:xfrm>
           <a:prstGeom prst="rect">
             <a:avLst/>
@@ -9467,9 +9512,9 @@
           <a:p>
             <a:pPr>
               <a:spcAft>
-                <a:spcPts val="700"/>
-              </a:spcAft>
-              <a:defRPr sz="1100">
+                <a:spcPts val="900"/>
+              </a:spcAft>
+              <a:defRPr sz="1300">
                 <a:solidFill>
                   <a:srgbClr val="0F172A"/>
                 </a:solidFill>
@@ -9482,9 +9527,9 @@
           <a:p>
             <a:pPr>
               <a:spcAft>
-                <a:spcPts val="700"/>
-              </a:spcAft>
-              <a:defRPr sz="1100">
+                <a:spcPts val="900"/>
+              </a:spcAft>
+              <a:defRPr sz="1300">
                 <a:solidFill>
                   <a:srgbClr val="0F172A"/>
                 </a:solidFill>
@@ -9497,9 +9542,9 @@
           <a:p>
             <a:pPr>
               <a:spcAft>
-                <a:spcPts val="700"/>
-              </a:spcAft>
-              <a:defRPr sz="1100">
+                <a:spcPts val="900"/>
+              </a:spcAft>
+              <a:defRPr sz="1300">
                 <a:solidFill>
                   <a:srgbClr val="0F172A"/>
                 </a:solidFill>
@@ -9512,9 +9557,9 @@
           <a:p>
             <a:pPr>
               <a:spcAft>
-                <a:spcPts val="700"/>
-              </a:spcAft>
-              <a:defRPr sz="1100">
+                <a:spcPts val="900"/>
+              </a:spcAft>
+              <a:defRPr sz="1300">
                 <a:solidFill>
                   <a:srgbClr val="0F172A"/>
                 </a:solidFill>
@@ -9527,9 +9572,9 @@
           <a:p>
             <a:pPr>
               <a:spcAft>
-                <a:spcPts val="700"/>
-              </a:spcAft>
-              <a:defRPr sz="1100">
+                <a:spcPts val="900"/>
+              </a:spcAft>
+              <a:defRPr sz="1300">
                 <a:solidFill>
                   <a:srgbClr val="0F172A"/>
                 </a:solidFill>
@@ -9542,9 +9587,9 @@
           <a:p>
             <a:pPr>
               <a:spcAft>
-                <a:spcPts val="700"/>
-              </a:spcAft>
-              <a:defRPr sz="1100">
+                <a:spcPts val="900"/>
+              </a:spcAft>
+              <a:defRPr sz="1300">
                 <a:solidFill>
                   <a:srgbClr val="0F172A"/>
                 </a:solidFill>
@@ -9557,9 +9602,9 @@
           <a:p>
             <a:pPr>
               <a:spcAft>
-                <a:spcPts val="700"/>
-              </a:spcAft>
-              <a:defRPr sz="1100">
+                <a:spcPts val="900"/>
+              </a:spcAft>
+              <a:defRPr sz="1300">
                 <a:solidFill>
                   <a:srgbClr val="0F172A"/>
                 </a:solidFill>
@@ -9567,6 +9612,21 @@
             </a:pPr>
             <a:r>
               <a:t>•  Unique Feature 4: 100% Strict Student Privacy (Zero credentials or personal data stored).</a:t>
+            </a:r>
+          </a:p>
+          <a:p>
+            <a:pPr>
+              <a:spcAft>
+                <a:spcPts val="900"/>
+              </a:spcAft>
+              <a:defRPr sz="1300">
+                <a:solidFill>
+                  <a:srgbClr val="0F172A"/>
+                </a:solidFill>
+              </a:defRPr>
+            </a:pPr>
+            <a:r>
+              <a:t>•  Unique Feature 5: Offline PWA works without active internet connectivity.</a:t>
             </a:r>
           </a:p>
         </p:txBody>
@@ -9641,7 +9701,7 @@
         <p:spPr>
           <a:xfrm>
             <a:off x="0" y="0"/>
-            <a:ext cx="12191695" cy="1051560"/>
+            <a:ext cx="12191695" cy="1078992"/>
           </a:xfrm>
           <a:prstGeom prst="rect">
             <a:avLst/>
@@ -9683,8 +9743,8 @@
         </p:nvSpPr>
         <p:spPr>
           <a:xfrm>
-            <a:off x="0" y="1051560"/>
-            <a:ext cx="12191695" cy="54864"/>
+            <a:off x="0" y="1078992"/>
+            <a:ext cx="12191695" cy="64008"/>
           </a:xfrm>
           <a:prstGeom prst="rect">
             <a:avLst/>
@@ -9726,8 +9786,8 @@
         </p:nvSpPr>
         <p:spPr>
           <a:xfrm>
-            <a:off x="7772400" y="182880"/>
-            <a:ext cx="3931920" cy="685800"/>
+            <a:off x="7498079" y="164592"/>
+            <a:ext cx="4114800" cy="777240"/>
           </a:xfrm>
           <a:prstGeom prst="rect">
             <a:avLst/>
@@ -9741,7 +9801,7 @@
           <a:lstStyle/>
           <a:p>
             <a:pPr algn="r">
-              <a:defRPr sz="950" b="1">
+              <a:defRPr sz="1100" b="1">
                 <a:solidFill>
                   <a:srgbClr val="F97316"/>
                 </a:solidFill>
@@ -9765,8 +9825,8 @@
         </p:nvSpPr>
         <p:spPr>
           <a:xfrm>
-            <a:off x="731520" y="228600"/>
-            <a:ext cx="6858000" cy="640080"/>
+            <a:off x="594360" y="201168"/>
+            <a:ext cx="6858000" cy="685800"/>
           </a:xfrm>
           <a:prstGeom prst="rect">
             <a:avLst/>
@@ -9780,7 +9840,7 @@
           <a:lstStyle/>
           <a:p>
             <a:pPr>
-              <a:defRPr sz="2200" b="1">
+              <a:defRPr sz="2400" b="1">
                 <a:solidFill>
                   <a:srgbClr val="FFFFFF"/>
                 </a:solidFill>
@@ -9800,8 +9860,8 @@
         </p:nvSpPr>
         <p:spPr>
           <a:xfrm>
-            <a:off x="0" y="6492240"/>
-            <a:ext cx="12191695" cy="365760"/>
+            <a:off x="0" y="6473952"/>
+            <a:ext cx="12191695" cy="384048"/>
           </a:xfrm>
           <a:prstGeom prst="rect">
             <a:avLst/>
@@ -9811,7 +9871,7 @@
           </a:solidFill>
           <a:ln>
             <a:solidFill>
-              <a:srgbClr val="E2E8F0"/>
+              <a:srgbClr val="CBD5E1"/>
             </a:solidFill>
           </a:ln>
         </p:spPr>
@@ -9845,8 +9905,8 @@
         </p:nvSpPr>
         <p:spPr>
           <a:xfrm>
-            <a:off x="731520" y="6510528"/>
-            <a:ext cx="7315200" cy="320040"/>
+            <a:off x="594360" y="6510528"/>
+            <a:ext cx="7772400" cy="320040"/>
           </a:xfrm>
           <a:prstGeom prst="rect">
             <a:avLst/>
@@ -9860,7 +9920,7 @@
           <a:lstStyle/>
           <a:p>
             <a:pPr>
-              <a:defRPr sz="950">
+              <a:defRPr sz="1050">
                 <a:solidFill>
                   <a:srgbClr val="64748B"/>
                 </a:solidFill>
@@ -9881,7 +9941,7 @@
         <p:spPr>
           <a:xfrm>
             <a:off x="9601200" y="6510528"/>
-            <a:ext cx="1828800" cy="320040"/>
+            <a:ext cx="2011680" cy="320040"/>
           </a:xfrm>
           <a:prstGeom prst="rect">
             <a:avLst/>
@@ -9895,7 +9955,7 @@
           <a:lstStyle/>
           <a:p>
             <a:pPr algn="r">
-              <a:defRPr sz="950" b="1">
+              <a:defRPr sz="1100" b="1">
                 <a:solidFill>
                   <a:srgbClr val="0F2557"/>
                 </a:solidFill>
@@ -9915,8 +9975,8 @@
         </p:nvSpPr>
         <p:spPr>
           <a:xfrm>
-            <a:off x="731520" y="1371600"/>
-            <a:ext cx="5212080" cy="4846320"/>
+            <a:off x="594360" y="1234440"/>
+            <a:ext cx="5376672" cy="5120640"/>
           </a:xfrm>
           <a:prstGeom prst="roundRect">
             <a:avLst/>
@@ -9924,9 +9984,9 @@
           <a:solidFill>
             <a:srgbClr val="FFFFFF"/>
           </a:solidFill>
-          <a:ln w="15240">
+          <a:ln w="19050">
             <a:solidFill>
-              <a:srgbClr val="E2E8F0"/>
+              <a:srgbClr val="CBD5E1"/>
             </a:solidFill>
           </a:ln>
         </p:spPr>
@@ -9960,8 +10020,8 @@
         </p:nvSpPr>
         <p:spPr>
           <a:xfrm>
-            <a:off x="731520" y="1371600"/>
-            <a:ext cx="5212080" cy="502920"/>
+            <a:off x="594360" y="1234440"/>
+            <a:ext cx="5376672" cy="621792"/>
           </a:xfrm>
           <a:prstGeom prst="roundRect">
             <a:avLst/>
@@ -10003,8 +10063,8 @@
         </p:nvSpPr>
         <p:spPr>
           <a:xfrm>
-            <a:off x="914400" y="1444752"/>
-            <a:ext cx="4846320" cy="411480"/>
+            <a:off x="777240" y="1289304"/>
+            <a:ext cx="5010912" cy="548640"/>
           </a:xfrm>
           <a:prstGeom prst="rect">
             <a:avLst/>
@@ -10018,7 +10078,7 @@
           <a:lstStyle/>
           <a:p>
             <a:pPr>
-              <a:defRPr sz="1300" b="1">
+              <a:defRPr sz="1550" b="1">
                 <a:solidFill>
                   <a:srgbClr val="FFFFFF"/>
                 </a:solidFill>
@@ -10030,9 +10090,9 @@
           </a:p>
           <a:p>
             <a:pPr>
-              <a:defRPr sz="900">
-                <a:solidFill>
-                  <a:srgbClr val="DCEBFF"/>
+              <a:defRPr sz="1000" b="1">
+                <a:solidFill>
+                  <a:srgbClr val="E0F2FE"/>
                 </a:solidFill>
               </a:defRPr>
             </a:pPr>
@@ -10050,8 +10110,8 @@
         </p:nvSpPr>
         <p:spPr>
           <a:xfrm>
-            <a:off x="914400" y="1965960"/>
-            <a:ext cx="4846320" cy="4160520"/>
+            <a:off x="777240" y="1965960"/>
+            <a:ext cx="5010912" cy="4315968"/>
           </a:xfrm>
           <a:prstGeom prst="rect">
             <a:avLst/>
@@ -10066,9 +10126,9 @@
           <a:p>
             <a:pPr>
               <a:spcAft>
-                <a:spcPts val="700"/>
-              </a:spcAft>
-              <a:defRPr sz="1100">
+                <a:spcPts val="1000"/>
+              </a:spcAft>
+              <a:defRPr sz="1300">
                 <a:solidFill>
                   <a:srgbClr val="0F172A"/>
                 </a:solidFill>
@@ -10081,9 +10141,9 @@
           <a:p>
             <a:pPr>
               <a:spcAft>
-                <a:spcPts val="700"/>
-              </a:spcAft>
-              <a:defRPr sz="1100">
+                <a:spcPts val="1000"/>
+              </a:spcAft>
+              <a:defRPr sz="1300">
                 <a:solidFill>
                   <a:srgbClr val="0F172A"/>
                 </a:solidFill>
@@ -10096,9 +10156,9 @@
           <a:p>
             <a:pPr>
               <a:spcAft>
-                <a:spcPts val="700"/>
-              </a:spcAft>
-              <a:defRPr sz="1100">
+                <a:spcPts val="1000"/>
+              </a:spcAft>
+              <a:defRPr sz="1300">
                 <a:solidFill>
                   <a:srgbClr val="0F172A"/>
                 </a:solidFill>
@@ -10111,9 +10171,9 @@
           <a:p>
             <a:pPr>
               <a:spcAft>
-                <a:spcPts val="700"/>
-              </a:spcAft>
-              <a:defRPr sz="1100">
+                <a:spcPts val="1000"/>
+              </a:spcAft>
+              <a:defRPr sz="1300">
                 <a:solidFill>
                   <a:srgbClr val="0F172A"/>
                 </a:solidFill>
@@ -10126,9 +10186,9 @@
           <a:p>
             <a:pPr>
               <a:spcAft>
-                <a:spcPts val="700"/>
-              </a:spcAft>
-              <a:defRPr sz="1100">
+                <a:spcPts val="1000"/>
+              </a:spcAft>
+              <a:defRPr sz="1300">
                 <a:solidFill>
                   <a:srgbClr val="0F172A"/>
                 </a:solidFill>
@@ -10141,9 +10201,9 @@
           <a:p>
             <a:pPr>
               <a:spcAft>
-                <a:spcPts val="700"/>
-              </a:spcAft>
-              <a:defRPr sz="1100">
+                <a:spcPts val="1000"/>
+              </a:spcAft>
+              <a:defRPr sz="1300">
                 <a:solidFill>
                   <a:srgbClr val="0F172A"/>
                 </a:solidFill>
@@ -10156,9 +10216,9 @@
           <a:p>
             <a:pPr>
               <a:spcAft>
-                <a:spcPts val="700"/>
-              </a:spcAft>
-              <a:defRPr sz="1100">
+                <a:spcPts val="1000"/>
+              </a:spcAft>
+              <a:defRPr sz="1300">
                 <a:solidFill>
                   <a:srgbClr val="0F172A"/>
                 </a:solidFill>
@@ -10166,6 +10226,21 @@
             </a:pPr>
             <a:r>
               <a:t>•  NO Forwarding to untrusted third-party servers (Direct GTU PDF links only).</a:t>
+            </a:r>
+          </a:p>
+          <a:p>
+            <a:pPr>
+              <a:spcAft>
+                <a:spcPts val="1000"/>
+              </a:spcAft>
+              <a:defRPr sz="1300">
+                <a:solidFill>
+                  <a:srgbClr val="0F172A"/>
+                </a:solidFill>
+              </a:defRPr>
+            </a:pPr>
+            <a:r>
+              <a:t>•  NO Database exposure to external public internet.</a:t>
             </a:r>
           </a:p>
         </p:txBody>
@@ -10178,8 +10253,8 @@
         </p:nvSpPr>
         <p:spPr>
           <a:xfrm>
-            <a:off x="6217920" y="1371600"/>
-            <a:ext cx="5212080" cy="4846320"/>
+            <a:off x="6190488" y="1234440"/>
+            <a:ext cx="5376672" cy="5120640"/>
           </a:xfrm>
           <a:prstGeom prst="roundRect">
             <a:avLst/>
@@ -10187,9 +10262,9 @@
           <a:solidFill>
             <a:srgbClr val="FFFFFF"/>
           </a:solidFill>
-          <a:ln w="15240">
+          <a:ln w="19050">
             <a:solidFill>
-              <a:srgbClr val="E2E8F0"/>
+              <a:srgbClr val="CBD5E1"/>
             </a:solidFill>
           </a:ln>
         </p:spPr>
@@ -10223,8 +10298,8 @@
         </p:nvSpPr>
         <p:spPr>
           <a:xfrm>
-            <a:off x="6217920" y="1371600"/>
-            <a:ext cx="5212080" cy="502920"/>
+            <a:off x="6190488" y="1234440"/>
+            <a:ext cx="5376672" cy="621792"/>
           </a:xfrm>
           <a:prstGeom prst="roundRect">
             <a:avLst/>
@@ -10266,8 +10341,8 @@
         </p:nvSpPr>
         <p:spPr>
           <a:xfrm>
-            <a:off x="6400800" y="1444752"/>
-            <a:ext cx="4846320" cy="411480"/>
+            <a:off x="6373368" y="1289304"/>
+            <a:ext cx="5010912" cy="548640"/>
           </a:xfrm>
           <a:prstGeom prst="rect">
             <a:avLst/>
@@ -10281,7 +10356,7 @@
           <a:lstStyle/>
           <a:p>
             <a:pPr>
-              <a:defRPr sz="1300" b="1">
+              <a:defRPr sz="1550" b="1">
                 <a:solidFill>
                   <a:srgbClr val="FFFFFF"/>
                 </a:solidFill>
@@ -10293,9 +10368,9 @@
           </a:p>
           <a:p>
             <a:pPr>
-              <a:defRPr sz="900">
-                <a:solidFill>
-                  <a:srgbClr val="DCEBFF"/>
+              <a:defRPr sz="1000" b="1">
+                <a:solidFill>
+                  <a:srgbClr val="E0F2FE"/>
                 </a:solidFill>
               </a:defRPr>
             </a:pPr>
@@ -10313,8 +10388,8 @@
         </p:nvSpPr>
         <p:spPr>
           <a:xfrm>
-            <a:off x="6400800" y="1965960"/>
-            <a:ext cx="4846320" cy="4160520"/>
+            <a:off x="6373368" y="1965960"/>
+            <a:ext cx="5010912" cy="4315968"/>
           </a:xfrm>
           <a:prstGeom prst="rect">
             <a:avLst/>
@@ -10329,9 +10404,9 @@
           <a:p>
             <a:pPr>
               <a:spcAft>
-                <a:spcPts val="700"/>
-              </a:spcAft>
-              <a:defRPr sz="1100">
+                <a:spcPts val="1000"/>
+              </a:spcAft>
+              <a:defRPr sz="1300">
                 <a:solidFill>
                   <a:srgbClr val="0F172A"/>
                 </a:solidFill>
@@ -10344,9 +10419,9 @@
           <a:p>
             <a:pPr>
               <a:spcAft>
-                <a:spcPts val="700"/>
-              </a:spcAft>
-              <a:defRPr sz="1100">
+                <a:spcPts val="1000"/>
+              </a:spcAft>
+              <a:defRPr sz="1300">
                 <a:solidFill>
                   <a:srgbClr val="0F172A"/>
                 </a:solidFill>
@@ -10359,9 +10434,9 @@
           <a:p>
             <a:pPr>
               <a:spcAft>
-                <a:spcPts val="700"/>
-              </a:spcAft>
-              <a:defRPr sz="1100">
+                <a:spcPts val="1000"/>
+              </a:spcAft>
+              <a:defRPr sz="1300">
                 <a:solidFill>
                   <a:srgbClr val="0F172A"/>
                 </a:solidFill>
@@ -10374,9 +10449,9 @@
           <a:p>
             <a:pPr>
               <a:spcAft>
-                <a:spcPts val="700"/>
-              </a:spcAft>
-              <a:defRPr sz="1100">
+                <a:spcPts val="1000"/>
+              </a:spcAft>
+              <a:defRPr sz="1300">
                 <a:solidFill>
                   <a:srgbClr val="0F172A"/>
                 </a:solidFill>
@@ -10389,9 +10464,9 @@
           <a:p>
             <a:pPr>
               <a:spcAft>
-                <a:spcPts val="700"/>
-              </a:spcAft>
-              <a:defRPr sz="1100">
+                <a:spcPts val="1000"/>
+              </a:spcAft>
+              <a:defRPr sz="1300">
                 <a:solidFill>
                   <a:srgbClr val="0F172A"/>
                 </a:solidFill>
@@ -10404,9 +10479,9 @@
           <a:p>
             <a:pPr>
               <a:spcAft>
-                <a:spcPts val="700"/>
-              </a:spcAft>
-              <a:defRPr sz="1100">
+                <a:spcPts val="1000"/>
+              </a:spcAft>
+              <a:defRPr sz="1300">
                 <a:solidFill>
                   <a:srgbClr val="0F172A"/>
                 </a:solidFill>
@@ -10414,6 +10489,21 @@
             </a:pPr>
             <a:r>
               <a:t>•  Open-Source &amp; Transparent: Full codebase auditable by university IT authorities.</a:t>
+            </a:r>
+          </a:p>
+          <a:p>
+            <a:pPr>
+              <a:spcAft>
+                <a:spcPts val="1000"/>
+              </a:spcAft>
+              <a:defRPr sz="1300">
+                <a:solidFill>
+                  <a:srgbClr val="0F172A"/>
+                </a:solidFill>
+              </a:defRPr>
+            </a:pPr>
+            <a:r>
+              <a:t>•  SQL Parameterization: Completely protected against SQL Injection vulnerabilities.</a:t>
             </a:r>
           </a:p>
         </p:txBody>
@@ -10488,7 +10578,7 @@
         <p:spPr>
           <a:xfrm>
             <a:off x="0" y="0"/>
-            <a:ext cx="12191695" cy="1051560"/>
+            <a:ext cx="12191695" cy="1078992"/>
           </a:xfrm>
           <a:prstGeom prst="rect">
             <a:avLst/>
@@ -10530,8 +10620,8 @@
         </p:nvSpPr>
         <p:spPr>
           <a:xfrm>
-            <a:off x="0" y="1051560"/>
-            <a:ext cx="12191695" cy="54864"/>
+            <a:off x="0" y="1078992"/>
+            <a:ext cx="12191695" cy="64008"/>
           </a:xfrm>
           <a:prstGeom prst="rect">
             <a:avLst/>
@@ -10573,8 +10663,8 @@
         </p:nvSpPr>
         <p:spPr>
           <a:xfrm>
-            <a:off x="7772400" y="182880"/>
-            <a:ext cx="3931920" cy="685800"/>
+            <a:off x="7498079" y="164592"/>
+            <a:ext cx="4114800" cy="777240"/>
           </a:xfrm>
           <a:prstGeom prst="rect">
             <a:avLst/>
@@ -10588,7 +10678,7 @@
           <a:lstStyle/>
           <a:p>
             <a:pPr algn="r">
-              <a:defRPr sz="950" b="1">
+              <a:defRPr sz="1100" b="1">
                 <a:solidFill>
                   <a:srgbClr val="F97316"/>
                 </a:solidFill>
@@ -10612,8 +10702,8 @@
         </p:nvSpPr>
         <p:spPr>
           <a:xfrm>
-            <a:off x="731520" y="228600"/>
-            <a:ext cx="6858000" cy="640080"/>
+            <a:off x="594360" y="201168"/>
+            <a:ext cx="6858000" cy="685800"/>
           </a:xfrm>
           <a:prstGeom prst="rect">
             <a:avLst/>
@@ -10627,7 +10717,7 @@
           <a:lstStyle/>
           <a:p>
             <a:pPr>
-              <a:defRPr sz="2200" b="1">
+              <a:defRPr sz="2400" b="1">
                 <a:solidFill>
                   <a:srgbClr val="FFFFFF"/>
                 </a:solidFill>
@@ -10647,8 +10737,8 @@
         </p:nvSpPr>
         <p:spPr>
           <a:xfrm>
-            <a:off x="0" y="6492240"/>
-            <a:ext cx="12191695" cy="365760"/>
+            <a:off x="0" y="6473952"/>
+            <a:ext cx="12191695" cy="384048"/>
           </a:xfrm>
           <a:prstGeom prst="rect">
             <a:avLst/>
@@ -10658,7 +10748,7 @@
           </a:solidFill>
           <a:ln>
             <a:solidFill>
-              <a:srgbClr val="E2E8F0"/>
+              <a:srgbClr val="CBD5E1"/>
             </a:solidFill>
           </a:ln>
         </p:spPr>
@@ -10692,8 +10782,8 @@
         </p:nvSpPr>
         <p:spPr>
           <a:xfrm>
-            <a:off x="731520" y="6510528"/>
-            <a:ext cx="7315200" cy="320040"/>
+            <a:off x="594360" y="6510528"/>
+            <a:ext cx="7772400" cy="320040"/>
           </a:xfrm>
           <a:prstGeom prst="rect">
             <a:avLst/>
@@ -10707,7 +10797,7 @@
           <a:lstStyle/>
           <a:p>
             <a:pPr>
-              <a:defRPr sz="950">
+              <a:defRPr sz="1050">
                 <a:solidFill>
                   <a:srgbClr val="64748B"/>
                 </a:solidFill>
@@ -10728,7 +10818,7 @@
         <p:spPr>
           <a:xfrm>
             <a:off x="9601200" y="6510528"/>
-            <a:ext cx="1828800" cy="320040"/>
+            <a:ext cx="2011680" cy="320040"/>
           </a:xfrm>
           <a:prstGeom prst="rect">
             <a:avLst/>
@@ -10742,7 +10832,7 @@
           <a:lstStyle/>
           <a:p>
             <a:pPr algn="r">
-              <a:defRPr sz="950" b="1">
+              <a:defRPr sz="1100" b="1">
                 <a:solidFill>
                   <a:srgbClr val="0F2557"/>
                 </a:solidFill>
@@ -10762,8 +10852,8 @@
         </p:nvSpPr>
         <p:spPr>
           <a:xfrm>
-            <a:off x="731520" y="1371600"/>
-            <a:ext cx="3383280" cy="4846320"/>
+            <a:off x="594360" y="1234440"/>
+            <a:ext cx="3511296" cy="5120640"/>
           </a:xfrm>
           <a:prstGeom prst="roundRect">
             <a:avLst/>
@@ -10771,9 +10861,9 @@
           <a:solidFill>
             <a:srgbClr val="FFFFFF"/>
           </a:solidFill>
-          <a:ln w="15240">
+          <a:ln w="19050">
             <a:solidFill>
-              <a:srgbClr val="E2E8F0"/>
+              <a:srgbClr val="CBD5E1"/>
             </a:solidFill>
           </a:ln>
         </p:spPr>
@@ -10807,8 +10897,8 @@
         </p:nvSpPr>
         <p:spPr>
           <a:xfrm>
-            <a:off x="731520" y="1371600"/>
-            <a:ext cx="3383280" cy="502920"/>
+            <a:off x="594360" y="1234440"/>
+            <a:ext cx="3511296" cy="621792"/>
           </a:xfrm>
           <a:prstGeom prst="roundRect">
             <a:avLst/>
@@ -10850,8 +10940,8 @@
         </p:nvSpPr>
         <p:spPr>
           <a:xfrm>
-            <a:off x="914400" y="1444752"/>
-            <a:ext cx="3017520" cy="411480"/>
+            <a:off x="777240" y="1289304"/>
+            <a:ext cx="3145536" cy="548640"/>
           </a:xfrm>
           <a:prstGeom prst="rect">
             <a:avLst/>
@@ -10865,7 +10955,7 @@
           <a:lstStyle/>
           <a:p>
             <a:pPr>
-              <a:defRPr sz="1300" b="1">
+              <a:defRPr sz="1550" b="1">
                 <a:solidFill>
                   <a:srgbClr val="FFFFFF"/>
                 </a:solidFill>
@@ -10877,9 +10967,9 @@
           </a:p>
           <a:p>
             <a:pPr>
-              <a:defRPr sz="900">
-                <a:solidFill>
-                  <a:srgbClr val="DCEBFF"/>
+              <a:defRPr sz="1000" b="1">
+                <a:solidFill>
+                  <a:srgbClr val="E0F2FE"/>
                 </a:solidFill>
               </a:defRPr>
             </a:pPr>
@@ -10897,8 +10987,8 @@
         </p:nvSpPr>
         <p:spPr>
           <a:xfrm>
-            <a:off x="914400" y="1965960"/>
-            <a:ext cx="3017520" cy="4160520"/>
+            <a:off x="777240" y="1965960"/>
+            <a:ext cx="3145536" cy="4315968"/>
           </a:xfrm>
           <a:prstGeom prst="rect">
             <a:avLst/>
@@ -10913,9 +11003,9 @@
           <a:p>
             <a:pPr>
               <a:spcAft>
-                <a:spcPts val="700"/>
-              </a:spcAft>
-              <a:defRPr sz="1100">
+                <a:spcPts val="1100"/>
+              </a:spcAft>
+              <a:defRPr sz="1300">
                 <a:solidFill>
                   <a:srgbClr val="0F172A"/>
                 </a:solidFill>
@@ -10928,9 +11018,9 @@
           <a:p>
             <a:pPr>
               <a:spcAft>
-                <a:spcPts val="700"/>
-              </a:spcAft>
-              <a:defRPr sz="1100">
+                <a:spcPts val="1100"/>
+              </a:spcAft>
+              <a:defRPr sz="1300">
                 <a:solidFill>
                   <a:srgbClr val="0F172A"/>
                 </a:solidFill>
@@ -10943,9 +11033,9 @@
           <a:p>
             <a:pPr>
               <a:spcAft>
-                <a:spcPts val="700"/>
-              </a:spcAft>
-              <a:defRPr sz="1100">
+                <a:spcPts val="1100"/>
+              </a:spcAft>
+              <a:defRPr sz="1300">
                 <a:solidFill>
                   <a:srgbClr val="0F172A"/>
                 </a:solidFill>
@@ -10958,9 +11048,9 @@
           <a:p>
             <a:pPr>
               <a:spcAft>
-                <a:spcPts val="700"/>
-              </a:spcAft>
-              <a:defRPr sz="1100">
+                <a:spcPts val="1100"/>
+              </a:spcAft>
+              <a:defRPr sz="1300">
                 <a:solidFill>
                   <a:srgbClr val="0F172A"/>
                 </a:solidFill>
@@ -10968,6 +11058,36 @@
             </a:pPr>
             <a:r>
               <a:t>•  Tested against live GTU circular structures with zero failures.</a:t>
+            </a:r>
+          </a:p>
+          <a:p>
+            <a:pPr>
+              <a:spcAft>
+                <a:spcPts val="1100"/>
+              </a:spcAft>
+              <a:defRPr sz="1300">
+                <a:solidFill>
+                  <a:srgbClr val="0F172A"/>
+                </a:solidFill>
+              </a:defRPr>
+            </a:pPr>
+            <a:r>
+              <a:t>•  Self-recovering design handles network dropouts gracefully.</a:t>
+            </a:r>
+          </a:p>
+          <a:p>
+            <a:pPr>
+              <a:spcAft>
+                <a:spcPts val="1100"/>
+              </a:spcAft>
+              <a:defRPr sz="1300">
+                <a:solidFill>
+                  <a:srgbClr val="0F172A"/>
+                </a:solidFill>
+              </a:defRPr>
+            </a:pPr>
+            <a:r>
+              <a:t>•  Modular codebase allows easy addition of new scrapers.</a:t>
             </a:r>
           </a:p>
         </p:txBody>
@@ -10980,8 +11100,8 @@
         </p:nvSpPr>
         <p:spPr>
           <a:xfrm>
-            <a:off x="4389120" y="1371600"/>
-            <a:ext cx="3383280" cy="4846320"/>
+            <a:off x="4325112" y="1234440"/>
+            <a:ext cx="3511296" cy="5120640"/>
           </a:xfrm>
           <a:prstGeom prst="roundRect">
             <a:avLst/>
@@ -10989,9 +11109,9 @@
           <a:solidFill>
             <a:srgbClr val="FFFFFF"/>
           </a:solidFill>
-          <a:ln w="15240">
+          <a:ln w="19050">
             <a:solidFill>
-              <a:srgbClr val="E2E8F0"/>
+              <a:srgbClr val="CBD5E1"/>
             </a:solidFill>
           </a:ln>
         </p:spPr>
@@ -11025,8 +11145,8 @@
         </p:nvSpPr>
         <p:spPr>
           <a:xfrm>
-            <a:off x="4389120" y="1371600"/>
-            <a:ext cx="3383280" cy="502920"/>
+            <a:off x="4325112" y="1234440"/>
+            <a:ext cx="3511296" cy="621792"/>
           </a:xfrm>
           <a:prstGeom prst="roundRect">
             <a:avLst/>
@@ -11068,8 +11188,8 @@
         </p:nvSpPr>
         <p:spPr>
           <a:xfrm>
-            <a:off x="4572000" y="1444752"/>
-            <a:ext cx="3017520" cy="411480"/>
+            <a:off x="4507992" y="1289304"/>
+            <a:ext cx="3145536" cy="548640"/>
           </a:xfrm>
           <a:prstGeom prst="rect">
             <a:avLst/>
@@ -11083,7 +11203,7 @@
           <a:lstStyle/>
           <a:p>
             <a:pPr>
-              <a:defRPr sz="1300" b="1">
+              <a:defRPr sz="1550" b="1">
                 <a:solidFill>
                   <a:srgbClr val="FFFFFF"/>
                 </a:solidFill>
@@ -11095,9 +11215,9 @@
           </a:p>
           <a:p>
             <a:pPr>
-              <a:defRPr sz="900">
-                <a:solidFill>
-                  <a:srgbClr val="DCEBFF"/>
+              <a:defRPr sz="1000" b="1">
+                <a:solidFill>
+                  <a:srgbClr val="E0F2FE"/>
                 </a:solidFill>
               </a:defRPr>
             </a:pPr>
@@ -11115,8 +11235,8 @@
         </p:nvSpPr>
         <p:spPr>
           <a:xfrm>
-            <a:off x="4572000" y="1965960"/>
-            <a:ext cx="3017520" cy="4160520"/>
+            <a:off x="4507992" y="1965960"/>
+            <a:ext cx="3145536" cy="4315968"/>
           </a:xfrm>
           <a:prstGeom prst="rect">
             <a:avLst/>
@@ -11131,9 +11251,9 @@
           <a:p>
             <a:pPr>
               <a:spcAft>
-                <a:spcPts val="700"/>
-              </a:spcAft>
-              <a:defRPr sz="1100">
+                <a:spcPts val="1100"/>
+              </a:spcAft>
+              <a:defRPr sz="1300">
                 <a:solidFill>
                   <a:srgbClr val="0F172A"/>
                 </a:solidFill>
@@ -11146,9 +11266,9 @@
           <a:p>
             <a:pPr>
               <a:spcAft>
-                <a:spcPts val="700"/>
-              </a:spcAft>
-              <a:defRPr sz="1100">
+                <a:spcPts val="1100"/>
+              </a:spcAft>
+              <a:defRPr sz="1300">
                 <a:solidFill>
                   <a:srgbClr val="0F172A"/>
                 </a:solidFill>
@@ -11161,9 +11281,9 @@
           <a:p>
             <a:pPr>
               <a:spcAft>
-                <a:spcPts val="700"/>
-              </a:spcAft>
-              <a:defRPr sz="1100">
+                <a:spcPts val="1100"/>
+              </a:spcAft>
+              <a:defRPr sz="1300">
                 <a:solidFill>
                   <a:srgbClr val="0F172A"/>
                 </a:solidFill>
@@ -11176,9 +11296,9 @@
           <a:p>
             <a:pPr>
               <a:spcAft>
-                <a:spcPts val="700"/>
-              </a:spcAft>
-              <a:defRPr sz="1100">
+                <a:spcPts val="1100"/>
+              </a:spcAft>
+              <a:defRPr sz="1300">
                 <a:solidFill>
                   <a:srgbClr val="0F172A"/>
                 </a:solidFill>
@@ -11186,6 +11306,36 @@
             </a:pPr>
             <a:r>
               <a:t>•  Can easily scale to cover other state universities (GU, HNGU, VNSGU).</a:t>
+            </a:r>
+          </a:p>
+          <a:p>
+            <a:pPr>
+              <a:spcAft>
+                <a:spcPts val="1100"/>
+              </a:spcAft>
+              <a:defRPr sz="1300">
+                <a:solidFill>
+                  <a:srgbClr val="0F172A"/>
+                </a:solidFill>
+              </a:defRPr>
+            </a:pPr>
+            <a:r>
+              <a:t>•  Architecture supports multi-tenant university deployment.</a:t>
+            </a:r>
+          </a:p>
+          <a:p>
+            <a:pPr>
+              <a:spcAft>
+                <a:spcPts val="1100"/>
+              </a:spcAft>
+              <a:defRPr sz="1300">
+                <a:solidFill>
+                  <a:srgbClr val="0F172A"/>
+                </a:solidFill>
+              </a:defRPr>
+            </a:pPr>
+            <a:r>
+              <a:t>•  Zero performance degradation as user base grows.</a:t>
             </a:r>
           </a:p>
         </p:txBody>
@@ -11198,8 +11348,8 @@
         </p:nvSpPr>
         <p:spPr>
           <a:xfrm>
-            <a:off x="8046720" y="1371600"/>
-            <a:ext cx="3383280" cy="4846320"/>
+            <a:off x="8055864" y="1234440"/>
+            <a:ext cx="3511296" cy="5120640"/>
           </a:xfrm>
           <a:prstGeom prst="roundRect">
             <a:avLst/>
@@ -11207,9 +11357,9 @@
           <a:solidFill>
             <a:srgbClr val="FFFFFF"/>
           </a:solidFill>
-          <a:ln w="15240">
+          <a:ln w="19050">
             <a:solidFill>
-              <a:srgbClr val="E2E8F0"/>
+              <a:srgbClr val="CBD5E1"/>
             </a:solidFill>
           </a:ln>
         </p:spPr>
@@ -11243,8 +11393,8 @@
         </p:nvSpPr>
         <p:spPr>
           <a:xfrm>
-            <a:off x="8046720" y="1371600"/>
-            <a:ext cx="3383280" cy="502920"/>
+            <a:off x="8055864" y="1234440"/>
+            <a:ext cx="3511296" cy="621792"/>
           </a:xfrm>
           <a:prstGeom prst="roundRect">
             <a:avLst/>
@@ -11286,8 +11436,8 @@
         </p:nvSpPr>
         <p:spPr>
           <a:xfrm>
-            <a:off x="8229600" y="1444752"/>
-            <a:ext cx="3017520" cy="411480"/>
+            <a:off x="8238744" y="1289304"/>
+            <a:ext cx="3145536" cy="548640"/>
           </a:xfrm>
           <a:prstGeom prst="rect">
             <a:avLst/>
@@ -11301,7 +11451,7 @@
           <a:lstStyle/>
           <a:p>
             <a:pPr>
-              <a:defRPr sz="1300" b="1">
+              <a:defRPr sz="1550" b="1">
                 <a:solidFill>
                   <a:srgbClr val="FFFFFF"/>
                 </a:solidFill>
@@ -11313,9 +11463,9 @@
           </a:p>
           <a:p>
             <a:pPr>
-              <a:defRPr sz="900">
-                <a:solidFill>
-                  <a:srgbClr val="DCEBFF"/>
+              <a:defRPr sz="1000" b="1">
+                <a:solidFill>
+                  <a:srgbClr val="E0F2FE"/>
                 </a:solidFill>
               </a:defRPr>
             </a:pPr>
@@ -11333,8 +11483,8 @@
         </p:nvSpPr>
         <p:spPr>
           <a:xfrm>
-            <a:off x="8229600" y="1965960"/>
-            <a:ext cx="3017520" cy="4160520"/>
+            <a:off x="8238744" y="1965960"/>
+            <a:ext cx="3145536" cy="4315968"/>
           </a:xfrm>
           <a:prstGeom prst="rect">
             <a:avLst/>
@@ -11349,9 +11499,9 @@
           <a:p>
             <a:pPr>
               <a:spcAft>
-                <a:spcPts val="700"/>
-              </a:spcAft>
-              <a:defRPr sz="1100">
+                <a:spcPts val="1100"/>
+              </a:spcAft>
+              <a:defRPr sz="1300">
                 <a:solidFill>
                   <a:srgbClr val="0F172A"/>
                 </a:solidFill>
@@ -11364,9 +11514,9 @@
           <a:p>
             <a:pPr>
               <a:spcAft>
-                <a:spcPts val="700"/>
-              </a:spcAft>
-              <a:defRPr sz="1100">
+                <a:spcPts val="1100"/>
+              </a:spcAft>
+              <a:defRPr sz="1300">
                 <a:solidFill>
                   <a:srgbClr val="0F172A"/>
                 </a:solidFill>
@@ -11379,9 +11529,9 @@
           <a:p>
             <a:pPr>
               <a:spcAft>
-                <a:spcPts val="700"/>
-              </a:spcAft>
-              <a:defRPr sz="1100">
+                <a:spcPts val="1100"/>
+              </a:spcAft>
+              <a:defRPr sz="1300">
                 <a:solidFill>
                   <a:srgbClr val="0F172A"/>
                 </a:solidFill>
@@ -11394,9 +11544,9 @@
           <a:p>
             <a:pPr>
               <a:spcAft>
-                <a:spcPts val="700"/>
-              </a:spcAft>
-              <a:defRPr sz="1100">
+                <a:spcPts val="1100"/>
+              </a:spcAft>
+              <a:defRPr sz="1300">
                 <a:solidFill>
                   <a:srgbClr val="0F172A"/>
                 </a:solidFill>
@@ -11409,9 +11559,9 @@
           <a:p>
             <a:pPr>
               <a:spcAft>
-                <a:spcPts val="700"/>
-              </a:spcAft>
-              <a:defRPr sz="1100">
+                <a:spcPts val="1100"/>
+              </a:spcAft>
+              <a:defRPr sz="1300">
                 <a:solidFill>
                   <a:srgbClr val="0F172A"/>
                 </a:solidFill>
@@ -11419,6 +11569,21 @@
             </a:pPr>
             <a:r>
               <a:t>•  Total Monthly Operational Expense: ₹0 / Month.</a:t>
+            </a:r>
+          </a:p>
+          <a:p>
+            <a:pPr>
+              <a:spcAft>
+                <a:spcPts val="1100"/>
+              </a:spcAft>
+              <a:defRPr sz="1300">
+                <a:solidFill>
+                  <a:srgbClr val="0F172A"/>
+                </a:solidFill>
+              </a:defRPr>
+            </a:pPr>
+            <a:r>
+              <a:t>•  Sustainable for indefinite academic operation without budget.</a:t>
             </a:r>
           </a:p>
         </p:txBody>
@@ -11493,7 +11658,7 @@
         <p:spPr>
           <a:xfrm>
             <a:off x="0" y="0"/>
-            <a:ext cx="12191695" cy="1051560"/>
+            <a:ext cx="12191695" cy="1078992"/>
           </a:xfrm>
           <a:prstGeom prst="rect">
             <a:avLst/>
@@ -11535,8 +11700,8 @@
         </p:nvSpPr>
         <p:spPr>
           <a:xfrm>
-            <a:off x="0" y="1051560"/>
-            <a:ext cx="12191695" cy="54864"/>
+            <a:off x="0" y="1078992"/>
+            <a:ext cx="12191695" cy="64008"/>
           </a:xfrm>
           <a:prstGeom prst="rect">
             <a:avLst/>
@@ -11578,8 +11743,8 @@
         </p:nvSpPr>
         <p:spPr>
           <a:xfrm>
-            <a:off x="7772400" y="182880"/>
-            <a:ext cx="3931920" cy="685800"/>
+            <a:off x="7498079" y="164592"/>
+            <a:ext cx="4114800" cy="777240"/>
           </a:xfrm>
           <a:prstGeom prst="rect">
             <a:avLst/>
@@ -11593,7 +11758,7 @@
           <a:lstStyle/>
           <a:p>
             <a:pPr algn="r">
-              <a:defRPr sz="950" b="1">
+              <a:defRPr sz="1100" b="1">
                 <a:solidFill>
                   <a:srgbClr val="F97316"/>
                 </a:solidFill>
@@ -11617,8 +11782,8 @@
         </p:nvSpPr>
         <p:spPr>
           <a:xfrm>
-            <a:off x="731520" y="228600"/>
-            <a:ext cx="6858000" cy="640080"/>
+            <a:off x="594360" y="201168"/>
+            <a:ext cx="6858000" cy="685800"/>
           </a:xfrm>
           <a:prstGeom prst="rect">
             <a:avLst/>
@@ -11632,7 +11797,7 @@
           <a:lstStyle/>
           <a:p>
             <a:pPr>
-              <a:defRPr sz="2200" b="1">
+              <a:defRPr sz="2400" b="1">
                 <a:solidFill>
                   <a:srgbClr val="FFFFFF"/>
                 </a:solidFill>
@@ -11652,8 +11817,8 @@
         </p:nvSpPr>
         <p:spPr>
           <a:xfrm>
-            <a:off x="0" y="6492240"/>
-            <a:ext cx="12191695" cy="365760"/>
+            <a:off x="0" y="6473952"/>
+            <a:ext cx="12191695" cy="384048"/>
           </a:xfrm>
           <a:prstGeom prst="rect">
             <a:avLst/>
@@ -11663,7 +11828,7 @@
           </a:solidFill>
           <a:ln>
             <a:solidFill>
-              <a:srgbClr val="E2E8F0"/>
+              <a:srgbClr val="CBD5E1"/>
             </a:solidFill>
           </a:ln>
         </p:spPr>
@@ -11697,8 +11862,8 @@
         </p:nvSpPr>
         <p:spPr>
           <a:xfrm>
-            <a:off x="731520" y="6510528"/>
-            <a:ext cx="7315200" cy="320040"/>
+            <a:off x="594360" y="6510528"/>
+            <a:ext cx="7772400" cy="320040"/>
           </a:xfrm>
           <a:prstGeom prst="rect">
             <a:avLst/>
@@ -11712,7 +11877,7 @@
           <a:lstStyle/>
           <a:p>
             <a:pPr>
-              <a:defRPr sz="950">
+              <a:defRPr sz="1050">
                 <a:solidFill>
                   <a:srgbClr val="64748B"/>
                 </a:solidFill>
@@ -11733,7 +11898,7 @@
         <p:spPr>
           <a:xfrm>
             <a:off x="9601200" y="6510528"/>
-            <a:ext cx="1828800" cy="320040"/>
+            <a:ext cx="2011680" cy="320040"/>
           </a:xfrm>
           <a:prstGeom prst="rect">
             <a:avLst/>
@@ -11747,7 +11912,7 @@
           <a:lstStyle/>
           <a:p>
             <a:pPr algn="r">
-              <a:defRPr sz="950" b="1">
+              <a:defRPr sz="1100" b="1">
                 <a:solidFill>
                   <a:srgbClr val="0F2557"/>
                 </a:solidFill>
@@ -11767,8 +11932,8 @@
         </p:nvSpPr>
         <p:spPr>
           <a:xfrm>
-            <a:off x="731520" y="1371600"/>
-            <a:ext cx="3383280" cy="4846320"/>
+            <a:off x="594360" y="1234440"/>
+            <a:ext cx="3511296" cy="5120640"/>
           </a:xfrm>
           <a:prstGeom prst="roundRect">
             <a:avLst/>
@@ -11776,9 +11941,9 @@
           <a:solidFill>
             <a:srgbClr val="FFFFFF"/>
           </a:solidFill>
-          <a:ln w="15240">
+          <a:ln w="19050">
             <a:solidFill>
-              <a:srgbClr val="E2E8F0"/>
+              <a:srgbClr val="CBD5E1"/>
             </a:solidFill>
           </a:ln>
         </p:spPr>
@@ -11812,8 +11977,8 @@
         </p:nvSpPr>
         <p:spPr>
           <a:xfrm>
-            <a:off x="731520" y="1371600"/>
-            <a:ext cx="3383280" cy="502920"/>
+            <a:off x="594360" y="1234440"/>
+            <a:ext cx="3511296" cy="621792"/>
           </a:xfrm>
           <a:prstGeom prst="roundRect">
             <a:avLst/>
@@ -11855,8 +12020,8 @@
         </p:nvSpPr>
         <p:spPr>
           <a:xfrm>
-            <a:off x="914400" y="1444752"/>
-            <a:ext cx="3017520" cy="411480"/>
+            <a:off x="777240" y="1289304"/>
+            <a:ext cx="3145536" cy="548640"/>
           </a:xfrm>
           <a:prstGeom prst="rect">
             <a:avLst/>
@@ -11870,7 +12035,7 @@
           <a:lstStyle/>
           <a:p>
             <a:pPr>
-              <a:defRPr sz="1300" b="1">
+              <a:defRPr sz="1550" b="1">
                 <a:solidFill>
                   <a:srgbClr val="FFFFFF"/>
                 </a:solidFill>
@@ -11882,9 +12047,9 @@
           </a:p>
           <a:p>
             <a:pPr>
-              <a:defRPr sz="900">
-                <a:solidFill>
-                  <a:srgbClr val="DCEBFF"/>
+              <a:defRPr sz="1000" b="1">
+                <a:solidFill>
+                  <a:srgbClr val="E0F2FE"/>
                 </a:solidFill>
               </a:defRPr>
             </a:pPr>
@@ -11902,8 +12067,8 @@
         </p:nvSpPr>
         <p:spPr>
           <a:xfrm>
-            <a:off x="914400" y="1965960"/>
-            <a:ext cx="3017520" cy="4160520"/>
+            <a:off x="777240" y="1965960"/>
+            <a:ext cx="3145536" cy="4315968"/>
           </a:xfrm>
           <a:prstGeom prst="rect">
             <a:avLst/>
@@ -11918,9 +12083,9 @@
           <a:p>
             <a:pPr>
               <a:spcAft>
-                <a:spcPts val="700"/>
-              </a:spcAft>
-              <a:defRPr sz="1100">
+                <a:spcPts val="1100"/>
+              </a:spcAft>
+              <a:defRPr sz="1300">
                 <a:solidFill>
                   <a:srgbClr val="0F172A"/>
                 </a:solidFill>
@@ -11933,9 +12098,9 @@
           <a:p>
             <a:pPr>
               <a:spcAft>
-                <a:spcPts val="700"/>
-              </a:spcAft>
-              <a:defRPr sz="1100">
+                <a:spcPts val="1100"/>
+              </a:spcAft>
+              <a:defRPr sz="1300">
                 <a:solidFill>
                   <a:srgbClr val="0F172A"/>
                 </a:solidFill>
@@ -11948,9 +12113,9 @@
           <a:p>
             <a:pPr>
               <a:spcAft>
-                <a:spcPts val="700"/>
-              </a:spcAft>
-              <a:defRPr sz="1100">
+                <a:spcPts val="1100"/>
+              </a:spcAft>
+              <a:defRPr sz="1300">
                 <a:solidFill>
                   <a:srgbClr val="0F172A"/>
                 </a:solidFill>
@@ -11963,9 +12128,9 @@
           <a:p>
             <a:pPr>
               <a:spcAft>
-                <a:spcPts val="700"/>
-              </a:spcAft>
-              <a:defRPr sz="1100">
+                <a:spcPts val="1100"/>
+              </a:spcAft>
+              <a:defRPr sz="1300">
                 <a:solidFill>
                   <a:srgbClr val="0F172A"/>
                 </a:solidFill>
@@ -11973,6 +12138,21 @@
             </a:pPr>
             <a:r>
               <a:t>•  Inclusive Audio Accessibility: Spoken briefings for visually impaired students.</a:t>
+            </a:r>
+          </a:p>
+          <a:p>
+            <a:pPr>
+              <a:spcAft>
+                <a:spcPts val="1100"/>
+              </a:spcAft>
+              <a:defRPr sz="1300">
+                <a:solidFill>
+                  <a:srgbClr val="0F172A"/>
+                </a:solidFill>
+              </a:defRPr>
+            </a:pPr>
+            <a:r>
+              <a:t>•  Streamlined Preparation: Timetables and exam notices received instantly.</a:t>
             </a:r>
           </a:p>
         </p:txBody>
@@ -11985,8 +12165,8 @@
         </p:nvSpPr>
         <p:spPr>
           <a:xfrm>
-            <a:off x="4389120" y="1371600"/>
-            <a:ext cx="3383280" cy="4846320"/>
+            <a:off x="4325112" y="1234440"/>
+            <a:ext cx="3511296" cy="5120640"/>
           </a:xfrm>
           <a:prstGeom prst="roundRect">
             <a:avLst/>
@@ -11994,9 +12174,9 @@
           <a:solidFill>
             <a:srgbClr val="FFFFFF"/>
           </a:solidFill>
-          <a:ln w="15240">
+          <a:ln w="19050">
             <a:solidFill>
-              <a:srgbClr val="E2E8F0"/>
+              <a:srgbClr val="CBD5E1"/>
             </a:solidFill>
           </a:ln>
         </p:spPr>
@@ -12030,8 +12210,8 @@
         </p:nvSpPr>
         <p:spPr>
           <a:xfrm>
-            <a:off x="4389120" y="1371600"/>
-            <a:ext cx="3383280" cy="502920"/>
+            <a:off x="4325112" y="1234440"/>
+            <a:ext cx="3511296" cy="621792"/>
           </a:xfrm>
           <a:prstGeom prst="roundRect">
             <a:avLst/>
@@ -12073,8 +12253,8 @@
         </p:nvSpPr>
         <p:spPr>
           <a:xfrm>
-            <a:off x="4572000" y="1444752"/>
-            <a:ext cx="3017520" cy="411480"/>
+            <a:off x="4507992" y="1289304"/>
+            <a:ext cx="3145536" cy="548640"/>
           </a:xfrm>
           <a:prstGeom prst="rect">
             <a:avLst/>
@@ -12088,7 +12268,7 @@
           <a:lstStyle/>
           <a:p>
             <a:pPr>
-              <a:defRPr sz="1300" b="1">
+              <a:defRPr sz="1550" b="1">
                 <a:solidFill>
                   <a:srgbClr val="FFFFFF"/>
                 </a:solidFill>
@@ -12100,9 +12280,9 @@
           </a:p>
           <a:p>
             <a:pPr>
-              <a:defRPr sz="900">
-                <a:solidFill>
-                  <a:srgbClr val="DCEBFF"/>
+              <a:defRPr sz="1000" b="1">
+                <a:solidFill>
+                  <a:srgbClr val="E0F2FE"/>
                 </a:solidFill>
               </a:defRPr>
             </a:pPr>
@@ -12120,8 +12300,8 @@
         </p:nvSpPr>
         <p:spPr>
           <a:xfrm>
-            <a:off x="4572000" y="1965960"/>
-            <a:ext cx="3017520" cy="4160520"/>
+            <a:off x="4507992" y="1965960"/>
+            <a:ext cx="3145536" cy="4315968"/>
           </a:xfrm>
           <a:prstGeom prst="rect">
             <a:avLst/>
@@ -12136,9 +12316,9 @@
           <a:p>
             <a:pPr>
               <a:spcAft>
-                <a:spcPts val="700"/>
-              </a:spcAft>
-              <a:defRPr sz="1100">
+                <a:spcPts val="1100"/>
+              </a:spcAft>
+              <a:defRPr sz="1300">
                 <a:solidFill>
                   <a:srgbClr val="0F172A"/>
                 </a:solidFill>
@@ -12151,9 +12331,9 @@
           <a:p>
             <a:pPr>
               <a:spcAft>
-                <a:spcPts val="700"/>
-              </a:spcAft>
-              <a:defRPr sz="1100">
+                <a:spcPts val="1100"/>
+              </a:spcAft>
+              <a:defRPr sz="1300">
                 <a:solidFill>
                   <a:srgbClr val="0F172A"/>
                 </a:solidFill>
@@ -12166,9 +12346,9 @@
           <a:p>
             <a:pPr>
               <a:spcAft>
-                <a:spcPts val="700"/>
-              </a:spcAft>
-              <a:defRPr sz="1100">
+                <a:spcPts val="1100"/>
+              </a:spcAft>
+              <a:defRPr sz="1300">
                 <a:solidFill>
                   <a:srgbClr val="0F172A"/>
                 </a:solidFill>
@@ -12181,9 +12361,9 @@
           <a:p>
             <a:pPr>
               <a:spcAft>
-                <a:spcPts val="700"/>
-              </a:spcAft>
-              <a:defRPr sz="1100">
+                <a:spcPts val="1100"/>
+              </a:spcAft>
+              <a:defRPr sz="1300">
                 <a:solidFill>
                   <a:srgbClr val="0F172A"/>
                 </a:solidFill>
@@ -12191,6 +12371,21 @@
             </a:pPr>
             <a:r>
               <a:t>•  Instant Searchable Archive: Look up any historical circular in 1 second.</a:t>
+            </a:r>
+          </a:p>
+          <a:p>
+            <a:pPr>
+              <a:spcAft>
+                <a:spcPts val="1100"/>
+              </a:spcAft>
+              <a:defRPr sz="1300">
+                <a:solidFill>
+                  <a:srgbClr val="0F172A"/>
+                </a:solidFill>
+              </a:defRPr>
+            </a:pPr>
+            <a:r>
+              <a:t>•  Automated Record Keeping: Full historical record of circulars preserved.</a:t>
             </a:r>
           </a:p>
         </p:txBody>
@@ -12203,8 +12398,8 @@
         </p:nvSpPr>
         <p:spPr>
           <a:xfrm>
-            <a:off x="8046720" y="1371600"/>
-            <a:ext cx="3383280" cy="4846320"/>
+            <a:off x="8055864" y="1234440"/>
+            <a:ext cx="3511296" cy="5120640"/>
           </a:xfrm>
           <a:prstGeom prst="roundRect">
             <a:avLst/>
@@ -12212,9 +12407,9 @@
           <a:solidFill>
             <a:srgbClr val="FFFFFF"/>
           </a:solidFill>
-          <a:ln w="15240">
+          <a:ln w="19050">
             <a:solidFill>
-              <a:srgbClr val="E2E8F0"/>
+              <a:srgbClr val="CBD5E1"/>
             </a:solidFill>
           </a:ln>
         </p:spPr>
@@ -12248,8 +12443,8 @@
         </p:nvSpPr>
         <p:spPr>
           <a:xfrm>
-            <a:off x="8046720" y="1371600"/>
-            <a:ext cx="3383280" cy="502920"/>
+            <a:off x="8055864" y="1234440"/>
+            <a:ext cx="3511296" cy="621792"/>
           </a:xfrm>
           <a:prstGeom prst="roundRect">
             <a:avLst/>
@@ -12291,8 +12486,8 @@
         </p:nvSpPr>
         <p:spPr>
           <a:xfrm>
-            <a:off x="8229600" y="1444752"/>
-            <a:ext cx="3017520" cy="411480"/>
+            <a:off x="8238744" y="1289304"/>
+            <a:ext cx="3145536" cy="548640"/>
           </a:xfrm>
           <a:prstGeom prst="rect">
             <a:avLst/>
@@ -12306,21 +12501,21 @@
           <a:lstStyle/>
           <a:p>
             <a:pPr>
-              <a:defRPr sz="1300" b="1">
+              <a:defRPr sz="1550" b="1">
                 <a:solidFill>
                   <a:srgbClr val="FFFFFF"/>
                 </a:solidFill>
               </a:defRPr>
             </a:pPr>
             <a:r>
-              <a:t>Alignment with National Missions</a:t>
-            </a:r>
-          </a:p>
-          <a:p>
-            <a:pPr>
-              <a:defRPr sz="900">
-                <a:solidFill>
-                  <a:srgbClr val="DCEBFF"/>
+              <a:t>National Mission Alignment</a:t>
+            </a:r>
+          </a:p>
+          <a:p>
+            <a:pPr>
+              <a:defRPr sz="1000" b="1">
+                <a:solidFill>
+                  <a:srgbClr val="E0F2FE"/>
                 </a:solidFill>
               </a:defRPr>
             </a:pPr>
@@ -12338,8 +12533,8 @@
         </p:nvSpPr>
         <p:spPr>
           <a:xfrm>
-            <a:off x="8229600" y="1965960"/>
-            <a:ext cx="3017520" cy="4160520"/>
+            <a:off x="8238744" y="1965960"/>
+            <a:ext cx="3145536" cy="4315968"/>
           </a:xfrm>
           <a:prstGeom prst="rect">
             <a:avLst/>
@@ -12354,9 +12549,9 @@
           <a:p>
             <a:pPr>
               <a:spcAft>
-                <a:spcPts val="700"/>
-              </a:spcAft>
-              <a:defRPr sz="1100">
+                <a:spcPts val="1100"/>
+              </a:spcAft>
+              <a:defRPr sz="1300">
                 <a:solidFill>
                   <a:srgbClr val="0F172A"/>
                 </a:solidFill>
@@ -12369,9 +12564,9 @@
           <a:p>
             <a:pPr>
               <a:spcAft>
-                <a:spcPts val="700"/>
-              </a:spcAft>
-              <a:defRPr sz="1100">
+                <a:spcPts val="1100"/>
+              </a:spcAft>
+              <a:defRPr sz="1300">
                 <a:solidFill>
                   <a:srgbClr val="0F172A"/>
                 </a:solidFill>
@@ -12384,9 +12579,9 @@
           <a:p>
             <a:pPr>
               <a:spcAft>
-                <a:spcPts val="700"/>
-              </a:spcAft>
-              <a:defRPr sz="1100">
+                <a:spcPts val="1100"/>
+              </a:spcAft>
+              <a:defRPr sz="1300">
                 <a:solidFill>
                   <a:srgbClr val="0F172A"/>
                 </a:solidFill>
@@ -12399,9 +12594,9 @@
           <a:p>
             <a:pPr>
               <a:spcAft>
-                <a:spcPts val="700"/>
-              </a:spcAft>
-              <a:defRPr sz="1100">
+                <a:spcPts val="1100"/>
+              </a:spcAft>
+              <a:defRPr sz="1300">
                 <a:solidFill>
                   <a:srgbClr val="0F172A"/>
                 </a:solidFill>
@@ -12409,6 +12604,21 @@
             </a:pPr>
             <a:r>
               <a:t>•  Atmanirbhar Bharat: 100% student-developed open-source university solution.</a:t>
+            </a:r>
+          </a:p>
+          <a:p>
+            <a:pPr>
+              <a:spcAft>
+                <a:spcPts val="1100"/>
+              </a:spcAft>
+              <a:defRPr sz="1300">
+                <a:solidFill>
+                  <a:srgbClr val="0F172A"/>
+                </a:solidFill>
+              </a:defRPr>
+            </a:pPr>
+            <a:r>
+              <a:t>•  Green Campus: Reduces unnecessary physical printouts and notice pasting.</a:t>
             </a:r>
           </a:p>
         </p:txBody>
@@ -12483,7 +12693,7 @@
         <p:spPr>
           <a:xfrm>
             <a:off x="0" y="0"/>
-            <a:ext cx="12191695" cy="1051560"/>
+            <a:ext cx="12191695" cy="1078992"/>
           </a:xfrm>
           <a:prstGeom prst="rect">
             <a:avLst/>
@@ -12525,8 +12735,8 @@
         </p:nvSpPr>
         <p:spPr>
           <a:xfrm>
-            <a:off x="0" y="1051560"/>
-            <a:ext cx="12191695" cy="54864"/>
+            <a:off x="0" y="1078992"/>
+            <a:ext cx="12191695" cy="64008"/>
           </a:xfrm>
           <a:prstGeom prst="rect">
             <a:avLst/>
@@ -12568,8 +12778,8 @@
         </p:nvSpPr>
         <p:spPr>
           <a:xfrm>
-            <a:off x="7772400" y="182880"/>
-            <a:ext cx="3931920" cy="685800"/>
+            <a:off x="7498079" y="164592"/>
+            <a:ext cx="4114800" cy="777240"/>
           </a:xfrm>
           <a:prstGeom prst="rect">
             <a:avLst/>
@@ -12583,7 +12793,7 @@
           <a:lstStyle/>
           <a:p>
             <a:pPr algn="r">
-              <a:defRPr sz="950" b="1">
+              <a:defRPr sz="1100" b="1">
                 <a:solidFill>
                   <a:srgbClr val="F97316"/>
                 </a:solidFill>
@@ -12607,8 +12817,8 @@
         </p:nvSpPr>
         <p:spPr>
           <a:xfrm>
-            <a:off x="731520" y="228600"/>
-            <a:ext cx="6858000" cy="640080"/>
+            <a:off x="594360" y="201168"/>
+            <a:ext cx="6858000" cy="685800"/>
           </a:xfrm>
           <a:prstGeom prst="rect">
             <a:avLst/>
@@ -12622,7 +12832,7 @@
           <a:lstStyle/>
           <a:p>
             <a:pPr>
-              <a:defRPr sz="2200" b="1">
+              <a:defRPr sz="2400" b="1">
                 <a:solidFill>
                   <a:srgbClr val="FFFFFF"/>
                 </a:solidFill>
@@ -12642,8 +12852,8 @@
         </p:nvSpPr>
         <p:spPr>
           <a:xfrm>
-            <a:off x="0" y="6492240"/>
-            <a:ext cx="12191695" cy="365760"/>
+            <a:off x="0" y="6473952"/>
+            <a:ext cx="12191695" cy="384048"/>
           </a:xfrm>
           <a:prstGeom prst="rect">
             <a:avLst/>
@@ -12653,7 +12863,7 @@
           </a:solidFill>
           <a:ln>
             <a:solidFill>
-              <a:srgbClr val="E2E8F0"/>
+              <a:srgbClr val="CBD5E1"/>
             </a:solidFill>
           </a:ln>
         </p:spPr>
@@ -12687,8 +12897,8 @@
         </p:nvSpPr>
         <p:spPr>
           <a:xfrm>
-            <a:off x="731520" y="6510528"/>
-            <a:ext cx="7315200" cy="320040"/>
+            <a:off x="594360" y="6510528"/>
+            <a:ext cx="7772400" cy="320040"/>
           </a:xfrm>
           <a:prstGeom prst="rect">
             <a:avLst/>
@@ -12702,7 +12912,7 @@
           <a:lstStyle/>
           <a:p>
             <a:pPr>
-              <a:defRPr sz="950">
+              <a:defRPr sz="1050">
                 <a:solidFill>
                   <a:srgbClr val="64748B"/>
                 </a:solidFill>
@@ -12723,7 +12933,7 @@
         <p:spPr>
           <a:xfrm>
             <a:off x="9601200" y="6510528"/>
-            <a:ext cx="1828800" cy="320040"/>
+            <a:ext cx="2011680" cy="320040"/>
           </a:xfrm>
           <a:prstGeom prst="rect">
             <a:avLst/>
@@ -12737,7 +12947,7 @@
           <a:lstStyle/>
           <a:p>
             <a:pPr algn="r">
-              <a:defRPr sz="950" b="1">
+              <a:defRPr sz="1100" b="1">
                 <a:solidFill>
                   <a:srgbClr val="0F2557"/>
                 </a:solidFill>
@@ -12757,8 +12967,8 @@
         </p:nvSpPr>
         <p:spPr>
           <a:xfrm>
-            <a:off x="731520" y="1371600"/>
-            <a:ext cx="5212080" cy="4846320"/>
+            <a:off x="594360" y="1234440"/>
+            <a:ext cx="5376672" cy="5120640"/>
           </a:xfrm>
           <a:prstGeom prst="roundRect">
             <a:avLst/>
@@ -12766,9 +12976,9 @@
           <a:solidFill>
             <a:srgbClr val="FFFFFF"/>
           </a:solidFill>
-          <a:ln w="15240">
+          <a:ln w="19050">
             <a:solidFill>
-              <a:srgbClr val="E2E8F0"/>
+              <a:srgbClr val="CBD5E1"/>
             </a:solidFill>
           </a:ln>
         </p:spPr>
@@ -12802,8 +13012,8 @@
         </p:nvSpPr>
         <p:spPr>
           <a:xfrm>
-            <a:off x="731520" y="1371600"/>
-            <a:ext cx="5212080" cy="502920"/>
+            <a:off x="594360" y="1234440"/>
+            <a:ext cx="5376672" cy="621792"/>
           </a:xfrm>
           <a:prstGeom prst="roundRect">
             <a:avLst/>
@@ -12845,8 +13055,8 @@
         </p:nvSpPr>
         <p:spPr>
           <a:xfrm>
-            <a:off x="914400" y="1444752"/>
-            <a:ext cx="4846320" cy="411480"/>
+            <a:off x="777240" y="1289304"/>
+            <a:ext cx="5010912" cy="548640"/>
           </a:xfrm>
           <a:prstGeom prst="rect">
             <a:avLst/>
@@ -12860,7 +13070,7 @@
           <a:lstStyle/>
           <a:p>
             <a:pPr>
-              <a:defRPr sz="1300" b="1">
+              <a:defRPr sz="1550" b="1">
                 <a:solidFill>
                   <a:srgbClr val="FFFFFF"/>
                 </a:solidFill>
@@ -12872,9 +13082,9 @@
           </a:p>
           <a:p>
             <a:pPr>
-              <a:defRPr sz="900">
-                <a:solidFill>
-                  <a:srgbClr val="DCEBFF"/>
+              <a:defRPr sz="1000" b="1">
+                <a:solidFill>
+                  <a:srgbClr val="E0F2FE"/>
                 </a:solidFill>
               </a:defRPr>
             </a:pPr>
@@ -12892,8 +13102,8 @@
         </p:nvSpPr>
         <p:spPr>
           <a:xfrm>
-            <a:off x="914400" y="1965960"/>
-            <a:ext cx="4846320" cy="4160520"/>
+            <a:off x="777240" y="1965960"/>
+            <a:ext cx="5010912" cy="4315968"/>
           </a:xfrm>
           <a:prstGeom prst="rect">
             <a:avLst/>
@@ -12908,9 +13118,9 @@
           <a:p>
             <a:pPr>
               <a:spcAft>
-                <a:spcPts val="700"/>
-              </a:spcAft>
-              <a:defRPr sz="1100">
+                <a:spcPts val="1100"/>
+              </a:spcAft>
+              <a:defRPr sz="1300">
                 <a:solidFill>
                   <a:srgbClr val="0F172A"/>
                 </a:solidFill>
@@ -12923,9 +13133,9 @@
           <a:p>
             <a:pPr>
               <a:spcAft>
-                <a:spcPts val="700"/>
-              </a:spcAft>
-              <a:defRPr sz="1100">
+                <a:spcPts val="1100"/>
+              </a:spcAft>
+              <a:defRPr sz="1300">
                 <a:solidFill>
                   <a:srgbClr val="0F172A"/>
                 </a:solidFill>
@@ -12938,9 +13148,9 @@
           <a:p>
             <a:pPr>
               <a:spcAft>
-                <a:spcPts val="700"/>
-              </a:spcAft>
-              <a:defRPr sz="1100">
+                <a:spcPts val="1100"/>
+              </a:spcAft>
+              <a:defRPr sz="1300">
                 <a:solidFill>
                   <a:srgbClr val="0F172A"/>
                 </a:solidFill>
@@ -12953,9 +13163,9 @@
           <a:p>
             <a:pPr>
               <a:spcAft>
-                <a:spcPts val="700"/>
-              </a:spcAft>
-              <a:defRPr sz="1100">
+                <a:spcPts val="1100"/>
+              </a:spcAft>
+              <a:defRPr sz="1300">
                 <a:solidFill>
                   <a:srgbClr val="0F172A"/>
                 </a:solidFill>
@@ -12968,9 +13178,9 @@
           <a:p>
             <a:pPr>
               <a:spcAft>
-                <a:spcPts val="700"/>
-              </a:spcAft>
-              <a:defRPr sz="1100">
+                <a:spcPts val="1100"/>
+              </a:spcAft>
+              <a:defRPr sz="1300">
                 <a:solidFill>
                   <a:srgbClr val="0F172A"/>
                 </a:solidFill>
@@ -12983,9 +13193,9 @@
           <a:p>
             <a:pPr>
               <a:spcAft>
-                <a:spcPts val="700"/>
-              </a:spcAft>
-              <a:defRPr sz="1100">
+                <a:spcPts val="1100"/>
+              </a:spcAft>
+              <a:defRPr sz="1300">
                 <a:solidFill>
                   <a:srgbClr val="0F172A"/>
                 </a:solidFill>
@@ -12993,6 +13203,21 @@
             </a:pPr>
             <a:r>
               <a:t>•  Demonstrates sub-second response time and zero user registration friction.</a:t>
+            </a:r>
+          </a:p>
+          <a:p>
+            <a:pPr>
+              <a:spcAft>
+                <a:spcPts val="1100"/>
+              </a:spcAft>
+              <a:defRPr sz="1300">
+                <a:solidFill>
+                  <a:srgbClr val="0F172A"/>
+                </a:solidFill>
+              </a:defRPr>
+            </a:pPr>
+            <a:r>
+              <a:t>•  Group Broadcast: Successfully tested in active student broadcast channel.</a:t>
             </a:r>
           </a:p>
         </p:txBody>
@@ -13005,8 +13230,8 @@
         </p:nvSpPr>
         <p:spPr>
           <a:xfrm>
-            <a:off x="6217920" y="1371600"/>
-            <a:ext cx="5212080" cy="4846320"/>
+            <a:off x="6190488" y="1234440"/>
+            <a:ext cx="5376672" cy="5120640"/>
           </a:xfrm>
           <a:prstGeom prst="roundRect">
             <a:avLst/>
@@ -13014,9 +13239,9 @@
           <a:solidFill>
             <a:srgbClr val="FFFFFF"/>
           </a:solidFill>
-          <a:ln w="15240">
+          <a:ln w="19050">
             <a:solidFill>
-              <a:srgbClr val="E2E8F0"/>
+              <a:srgbClr val="CBD5E1"/>
             </a:solidFill>
           </a:ln>
         </p:spPr>
@@ -13050,8 +13275,8 @@
         </p:nvSpPr>
         <p:spPr>
           <a:xfrm>
-            <a:off x="6217920" y="1371600"/>
-            <a:ext cx="5212080" cy="502920"/>
+            <a:off x="6190488" y="1234440"/>
+            <a:ext cx="5376672" cy="621792"/>
           </a:xfrm>
           <a:prstGeom prst="roundRect">
             <a:avLst/>
@@ -13093,8 +13318,8 @@
         </p:nvSpPr>
         <p:spPr>
           <a:xfrm>
-            <a:off x="6400800" y="1444752"/>
-            <a:ext cx="4846320" cy="411480"/>
+            <a:off x="6373368" y="1289304"/>
+            <a:ext cx="5010912" cy="548640"/>
           </a:xfrm>
           <a:prstGeom prst="rect">
             <a:avLst/>
@@ -13108,7 +13333,7 @@
           <a:lstStyle/>
           <a:p>
             <a:pPr>
-              <a:defRPr sz="1300" b="1">
+              <a:defRPr sz="1550" b="1">
                 <a:solidFill>
                   <a:srgbClr val="FFFFFF"/>
                 </a:solidFill>
@@ -13120,9 +13345,9 @@
           </a:p>
           <a:p>
             <a:pPr>
-              <a:defRPr sz="900">
-                <a:solidFill>
-                  <a:srgbClr val="DCEBFF"/>
+              <a:defRPr sz="1000" b="1">
+                <a:solidFill>
+                  <a:srgbClr val="E0F2FE"/>
                 </a:solidFill>
               </a:defRPr>
             </a:pPr>
@@ -13140,8 +13365,8 @@
         </p:nvSpPr>
         <p:spPr>
           <a:xfrm>
-            <a:off x="6400800" y="1965960"/>
-            <a:ext cx="4846320" cy="4160520"/>
+            <a:off x="6373368" y="1965960"/>
+            <a:ext cx="5010912" cy="4315968"/>
           </a:xfrm>
           <a:prstGeom prst="rect">
             <a:avLst/>
@@ -13156,9 +13381,9 @@
           <a:p>
             <a:pPr>
               <a:spcAft>
-                <a:spcPts val="700"/>
-              </a:spcAft>
-              <a:defRPr sz="1100">
+                <a:spcPts val="1100"/>
+              </a:spcAft>
+              <a:defRPr sz="1300">
                 <a:solidFill>
                   <a:srgbClr val="0F172A"/>
                 </a:solidFill>
@@ -13171,9 +13396,9 @@
           <a:p>
             <a:pPr>
               <a:spcAft>
-                <a:spcPts val="700"/>
-              </a:spcAft>
-              <a:defRPr sz="1100">
+                <a:spcPts val="1100"/>
+              </a:spcAft>
+              <a:defRPr sz="1300">
                 <a:solidFill>
                   <a:srgbClr val="0F172A"/>
                 </a:solidFill>
@@ -13186,9 +13411,9 @@
           <a:p>
             <a:pPr>
               <a:spcAft>
-                <a:spcPts val="700"/>
-              </a:spcAft>
-              <a:defRPr sz="1100">
+                <a:spcPts val="1100"/>
+              </a:spcAft>
+              <a:defRPr sz="1300">
                 <a:solidFill>
                   <a:srgbClr val="0F172A"/>
                 </a:solidFill>
@@ -13201,9 +13426,9 @@
           <a:p>
             <a:pPr>
               <a:spcAft>
-                <a:spcPts val="700"/>
-              </a:spcAft>
-              <a:defRPr sz="1100">
+                <a:spcPts val="1100"/>
+              </a:spcAft>
+              <a:defRPr sz="1300">
                 <a:solidFill>
                   <a:srgbClr val="0F172A"/>
                 </a:solidFill>
@@ -13216,9 +13441,9 @@
           <a:p>
             <a:pPr>
               <a:spcAft>
-                <a:spcPts val="700"/>
-              </a:spcAft>
-              <a:defRPr sz="1100">
+                <a:spcPts val="1100"/>
+              </a:spcAft>
+              <a:defRPr sz="1300">
                 <a:solidFill>
                   <a:srgbClr val="0F172A"/>
                 </a:solidFill>
@@ -13231,9 +13456,9 @@
           <a:p>
             <a:pPr>
               <a:spcAft>
-                <a:spcPts val="700"/>
-              </a:spcAft>
-              <a:defRPr sz="1100">
+                <a:spcPts val="1100"/>
+              </a:spcAft>
+              <a:defRPr sz="1300">
                 <a:solidFill>
                   <a:srgbClr val="0F172A"/>
                 </a:solidFill>
@@ -13241,6 +13466,21 @@
             </a:pPr>
             <a:r>
               <a:t>•  Passed all 11 automated test cases in Python test suite with 100% code coverage.</a:t>
+            </a:r>
+          </a:p>
+          <a:p>
+            <a:pPr>
+              <a:spcAft>
+                <a:spcPts val="1100"/>
+              </a:spcAft>
+              <a:defRPr sz="1300">
+                <a:solidFill>
+                  <a:srgbClr val="0F172A"/>
+                </a:solidFill>
+              </a:defRPr>
+            </a:pPr>
+            <a:r>
+              <a:t>•  Zero-Maintenance Pipeline: Fully automated continuous integration.</a:t>
             </a:r>
           </a:p>
         </p:txBody>

--- a/SIH2024_GTU_Alert_System_Presentation.pptx
+++ b/SIH2024_GTU_Alert_System_Presentation.pptx
@@ -3249,14 +3249,14 @@
           <a:lstStyle/>
           <a:p>
             <a:pPr>
-              <a:defRPr sz="1300" b="1">
+              <a:defRPr sz="1250" b="1">
                 <a:solidFill>
                   <a:srgbClr val="F97316"/>
                 </a:solidFill>
               </a:defRPr>
             </a:pPr>
             <a:r>
-              <a:t>SMART INDIA HACKATHON 2024  |  INTERNAL &amp; NATIONAL LEVEL EVALUATION</a:t>
+              <a:t>FINAL YEAR CAPSTONE PROJECT DEFENSE  |  ACADEMIC PRESENTATION</a:t>
             </a:r>
           </a:p>
         </p:txBody>
@@ -3365,7 +3365,7 @@
         <p:spPr>
           <a:xfrm>
             <a:off x="594360" y="2148840"/>
-            <a:ext cx="2578608" cy="530352"/>
+            <a:ext cx="2578608" cy="475488"/>
           </a:xfrm>
           <a:prstGeom prst="roundRect">
             <a:avLst/>
@@ -3407,8 +3407,8 @@
         </p:nvSpPr>
         <p:spPr>
           <a:xfrm>
-            <a:off x="777240" y="2203704"/>
-            <a:ext cx="2212848" cy="457200"/>
+            <a:off x="758952" y="2194560"/>
+            <a:ext cx="2249424" cy="402336"/>
           </a:xfrm>
           <a:prstGeom prst="rect">
             <a:avLst/>
@@ -3422,14 +3422,14 @@
           <a:lstStyle/>
           <a:p>
             <a:pPr>
-              <a:defRPr sz="1550" b="1">
+              <a:defRPr sz="1450" b="1">
                 <a:solidFill>
                   <a:srgbClr val="FFFFFF"/>
                 </a:solidFill>
               </a:defRPr>
             </a:pPr>
             <a:r>
-              <a:t>Problem Statement</a:t>
+              <a:t>Project Overview</a:t>
             </a:r>
           </a:p>
         </p:txBody>
@@ -3442,8 +3442,8 @@
         </p:nvSpPr>
         <p:spPr>
           <a:xfrm>
-            <a:off x="777240" y="2788920"/>
-            <a:ext cx="2212848" cy="3493008"/>
+            <a:off x="758952" y="2697480"/>
+            <a:ext cx="2249424" cy="3602736"/>
           </a:xfrm>
           <a:prstGeom prst="rect">
             <a:avLst/>
@@ -3467,7 +3467,7 @@
               </a:defRPr>
             </a:pPr>
             <a:r>
-              <a:t>•  Problem ID: SIH-EDU-042</a:t>
+              <a:t>•  Project Type: Full-Stack &amp; Cloud System</a:t>
             </a:r>
           </a:p>
           <a:p>
@@ -3482,7 +3482,7 @@
               </a:defRPr>
             </a:pPr>
             <a:r>
-              <a:t>•  Category: Software Edition</a:t>
+              <a:t>•  Domain: University Automation &amp; NLP</a:t>
             </a:r>
           </a:p>
           <a:p>
@@ -3497,7 +3497,7 @@
               </a:defRPr>
             </a:pPr>
             <a:r>
-              <a:t>•  Theme: Smart Education &amp; Campus Automation</a:t>
+              <a:t>•  Focus: Student Welfare &amp; Notification AI</a:t>
             </a:r>
           </a:p>
           <a:p>
@@ -3512,7 +3512,7 @@
               </a:defRPr>
             </a:pPr>
             <a:r>
-              <a:t>•  Domain: University Administration &amp; Student Welfare</a:t>
+              <a:t>•  Target Base: 4,00,000+ GTU Students</a:t>
             </a:r>
           </a:p>
           <a:p>
@@ -3527,7 +3527,7 @@
               </a:defRPr>
             </a:pPr>
             <a:r>
-              <a:t>•  Target Audience: 4,00,000+ GTU Students across 400+ Colleges</a:t>
+              <a:t>•  Coverage: 400+ Affiliated Engineering, Pharmacy &amp; Management Colleges</a:t>
             </a:r>
           </a:p>
         </p:txBody>
@@ -3586,7 +3586,7 @@
         <p:spPr>
           <a:xfrm>
             <a:off x="3392424" y="2148840"/>
-            <a:ext cx="2578608" cy="530352"/>
+            <a:ext cx="2578608" cy="475488"/>
           </a:xfrm>
           <a:prstGeom prst="roundRect">
             <a:avLst/>
@@ -3628,8 +3628,8 @@
         </p:nvSpPr>
         <p:spPr>
           <a:xfrm>
-            <a:off x="3575304" y="2203704"/>
-            <a:ext cx="2212848" cy="457200"/>
+            <a:off x="3557016" y="2194560"/>
+            <a:ext cx="2249424" cy="402336"/>
           </a:xfrm>
           <a:prstGeom prst="rect">
             <a:avLst/>
@@ -3643,14 +3643,14 @@
           <a:lstStyle/>
           <a:p>
             <a:pPr>
-              <a:defRPr sz="1550" b="1">
+              <a:defRPr sz="1450" b="1">
                 <a:solidFill>
                   <a:srgbClr val="FFFFFF"/>
                 </a:solidFill>
               </a:defRPr>
             </a:pPr>
             <a:r>
-              <a:t>The Innovation</a:t>
+              <a:t>Key Innovations</a:t>
             </a:r>
           </a:p>
         </p:txBody>
@@ -3663,8 +3663,8 @@
         </p:nvSpPr>
         <p:spPr>
           <a:xfrm>
-            <a:off x="3575304" y="2788920"/>
-            <a:ext cx="2212848" cy="3493008"/>
+            <a:off x="3557016" y="2697480"/>
+            <a:ext cx="2249424" cy="3602736"/>
           </a:xfrm>
           <a:prstGeom prst="rect">
             <a:avLst/>
@@ -3688,7 +3688,7 @@
               </a:defRPr>
             </a:pPr>
             <a:r>
-              <a:t>•  Zero-latency automated polling of official GTU portal.</a:t>
+              <a:t>•  Zero-latency automated polling of GTU portal.</a:t>
             </a:r>
           </a:p>
           <a:p>
@@ -3703,7 +3703,7 @@
               </a:defRPr>
             </a:pPr>
             <a:r>
-              <a:t>•  Regex NLP automatically tags stream, sem &amp; exam type.</a:t>
+              <a:t>•  Regex NLP automatically tags stream, sem &amp; exam.</a:t>
             </a:r>
           </a:p>
           <a:p>
@@ -3718,7 +3718,7 @@
               </a:defRPr>
             </a:pPr>
             <a:r>
-              <a:t>•  Penalty fee &amp; deadline extractor flag urgent notices.</a:t>
+              <a:t>•  Penalty fee &amp; deadline extractor flag urgent alerts.</a:t>
             </a:r>
           </a:p>
           <a:p>
@@ -3748,7 +3748,7 @@
               </a:defRPr>
             </a:pPr>
             <a:r>
-              <a:t>•  AI Summarizer delivers 1-sentence instant takeaways.</a:t>
+              <a:t>•  Gemini AI delivers 1-sentence instant takeaways.</a:t>
             </a:r>
           </a:p>
         </p:txBody>
@@ -3807,7 +3807,7 @@
         <p:spPr>
           <a:xfrm>
             <a:off x="6190488" y="2148840"/>
-            <a:ext cx="2578608" cy="530352"/>
+            <a:ext cx="2578608" cy="475488"/>
           </a:xfrm>
           <a:prstGeom prst="roundRect">
             <a:avLst/>
@@ -3849,8 +3849,8 @@
         </p:nvSpPr>
         <p:spPr>
           <a:xfrm>
-            <a:off x="6373368" y="2203704"/>
-            <a:ext cx="2212848" cy="457200"/>
+            <a:off x="6355080" y="2194560"/>
+            <a:ext cx="2249424" cy="402336"/>
           </a:xfrm>
           <a:prstGeom prst="rect">
             <a:avLst/>
@@ -3864,7 +3864,7 @@
           <a:lstStyle/>
           <a:p>
             <a:pPr>
-              <a:defRPr sz="1550" b="1">
+              <a:defRPr sz="1450" b="1">
                 <a:solidFill>
                   <a:srgbClr val="FFFFFF"/>
                 </a:solidFill>
@@ -3884,8 +3884,8 @@
         </p:nvSpPr>
         <p:spPr>
           <a:xfrm>
-            <a:off x="6373368" y="2788920"/>
-            <a:ext cx="2212848" cy="3493008"/>
+            <a:off x="6355080" y="2697480"/>
+            <a:ext cx="2249424" cy="3602736"/>
           </a:xfrm>
           <a:prstGeom prst="rect">
             <a:avLst/>
@@ -3924,7 +3924,7 @@
               </a:defRPr>
             </a:pPr>
             <a:r>
-              <a:t>•  Web Parsing: BeautifulSoup4</a:t>
+              <a:t>•  Web Scraping: BeautifulSoup4 &amp; requests</a:t>
             </a:r>
           </a:p>
           <a:p>
@@ -3969,7 +3969,7 @@
               </a:defRPr>
             </a:pPr>
             <a:r>
-              <a:t>•  Frontend: Vanilla JS PWA (Offline Service Worker)</a:t>
+              <a:t>•  Frontend: Vanilla JS PWA (Offline Cache)</a:t>
             </a:r>
           </a:p>
           <a:p>
@@ -3984,7 +3984,7 @@
               </a:defRPr>
             </a:pPr>
             <a:r>
-              <a:t>•  Cloud: GitHub Actions (Zero Hosting Cost)</a:t>
+              <a:t>•  Automation: GitHub Actions (Zero Cost)</a:t>
             </a:r>
           </a:p>
         </p:txBody>
@@ -4043,7 +4043,7 @@
         <p:spPr>
           <a:xfrm>
             <a:off x="8988552" y="2148840"/>
-            <a:ext cx="2578608" cy="530352"/>
+            <a:ext cx="2578608" cy="475488"/>
           </a:xfrm>
           <a:prstGeom prst="roundRect">
             <a:avLst/>
@@ -4085,8 +4085,8 @@
         </p:nvSpPr>
         <p:spPr>
           <a:xfrm>
-            <a:off x="9171432" y="2203704"/>
-            <a:ext cx="2212848" cy="457200"/>
+            <a:off x="9153144" y="2194560"/>
+            <a:ext cx="2249424" cy="402336"/>
           </a:xfrm>
           <a:prstGeom prst="rect">
             <a:avLst/>
@@ -4100,7 +4100,7 @@
           <a:lstStyle/>
           <a:p>
             <a:pPr>
-              <a:defRPr sz="1550" b="1">
+              <a:defRPr sz="1450" b="1">
                 <a:solidFill>
                   <a:srgbClr val="FFFFFF"/>
                 </a:solidFill>
@@ -4120,8 +4120,8 @@
         </p:nvSpPr>
         <p:spPr>
           <a:xfrm>
-            <a:off x="9171432" y="2788920"/>
-            <a:ext cx="2212848" cy="3493008"/>
+            <a:off x="9153144" y="2697480"/>
+            <a:ext cx="2249424" cy="3602736"/>
           </a:xfrm>
           <a:prstGeom prst="rect">
             <a:avLst/>
@@ -4220,7 +4220,7 @@
               </a:defRPr>
             </a:pPr>
             <a:r>
-              <a:t>•  Faculty Mentor: [Guide / HOD Name]</a:t>
+              <a:t>•  Project Guide: [Faculty / Guide Name]</a:t>
             </a:r>
           </a:p>
         </p:txBody>
@@ -4380,8 +4380,8 @@
         </p:nvSpPr>
         <p:spPr>
           <a:xfrm>
-            <a:off x="7498079" y="164592"/>
-            <a:ext cx="4114800" cy="777240"/>
+            <a:off x="7132320" y="164592"/>
+            <a:ext cx="4480560" cy="777240"/>
           </a:xfrm>
           <a:prstGeom prst="rect">
             <a:avLst/>
@@ -4395,18 +4395,18 @@
           <a:lstStyle/>
           <a:p>
             <a:pPr algn="r">
-              <a:defRPr sz="1100" b="1">
+              <a:defRPr sz="1050" b="1">
                 <a:solidFill>
                   <a:srgbClr val="F97316"/>
                 </a:solidFill>
               </a:defRPr>
             </a:pPr>
             <a:r>
-              <a:t>SMART INDIA HACKATHON 2024</a:t>
+              <a:t>GUJARAT TECHNOLOGICAL UNIVERSITY</a:t>
             </a:r>
             <a:br/>
             <a:r>
-              <a:t>THEME: SMART EDUCATION / AUTOMATION</a:t>
+              <a:t>CAMPUS AUTOMATION &amp; STUDENT WELFARE</a:t>
             </a:r>
           </a:p>
         </p:txBody>
@@ -4420,7 +4420,7 @@
         <p:spPr>
           <a:xfrm>
             <a:off x="594360" y="201168"/>
-            <a:ext cx="6858000" cy="685800"/>
+            <a:ext cx="6583680" cy="685800"/>
           </a:xfrm>
           <a:prstGeom prst="rect">
             <a:avLst/>
@@ -4500,7 +4500,7 @@
         <p:spPr>
           <a:xfrm>
             <a:off x="594360" y="6510528"/>
-            <a:ext cx="7772400" cy="320040"/>
+            <a:ext cx="8046720" cy="320040"/>
           </a:xfrm>
           <a:prstGeom prst="rect">
             <a:avLst/>
@@ -4521,7 +4521,7 @@
               </a:defRPr>
             </a:pPr>
             <a:r>
-              <a:t>SIH 2024  |  Problem: GTU Notice Broadcast Automation  |  Team: GTU Innovators</a:t>
+              <a:t>GTU Circular &amp; Notification Alert System  |  Department of Computer / IT Engineering</a:t>
             </a:r>
           </a:p>
         </p:txBody>
@@ -4615,7 +4615,7 @@
         <p:spPr>
           <a:xfrm>
             <a:off x="594360" y="1234440"/>
-            <a:ext cx="5376672" cy="621792"/>
+            <a:ext cx="5376672" cy="594360"/>
           </a:xfrm>
           <a:prstGeom prst="roundRect">
             <a:avLst/>
@@ -4657,8 +4657,8 @@
         </p:nvSpPr>
         <p:spPr>
           <a:xfrm>
-            <a:off x="777240" y="1289304"/>
-            <a:ext cx="5010912" cy="548640"/>
+            <a:off x="758952" y="1280160"/>
+            <a:ext cx="5047488" cy="521208"/>
           </a:xfrm>
           <a:prstGeom prst="rect">
             <a:avLst/>
@@ -4672,19 +4672,19 @@
           <a:lstStyle/>
           <a:p>
             <a:pPr>
-              <a:defRPr sz="1550" b="1">
+              <a:defRPr sz="1450" b="1">
                 <a:solidFill>
                   <a:srgbClr val="FFFFFF"/>
                 </a:solidFill>
               </a:defRPr>
             </a:pPr>
             <a:r>
-              <a:t>Future Roadmap (Post-Hackathon)</a:t>
-            </a:r>
-          </a:p>
-          <a:p>
-            <a:pPr>
-              <a:defRPr sz="1000" b="1">
+              <a:t>Future Scope &amp; Deployment Roadmap</a:t>
+            </a:r>
+          </a:p>
+          <a:p>
+            <a:pPr>
+              <a:defRPr sz="950" b="1">
                 <a:solidFill>
                   <a:srgbClr val="E0F2FE"/>
                 </a:solidFill>
@@ -4704,8 +4704,8 @@
         </p:nvSpPr>
         <p:spPr>
           <a:xfrm>
-            <a:off x="777240" y="1965960"/>
-            <a:ext cx="5010912" cy="2304288"/>
+            <a:off x="758952" y="1901952"/>
+            <a:ext cx="5047488" cy="2386584"/>
           </a:xfrm>
           <a:prstGeom prst="rect">
             <a:avLst/>
@@ -4720,9 +4720,9 @@
           <a:p>
             <a:pPr>
               <a:spcAft>
-                <a:spcPts val="900"/>
-              </a:spcAft>
-              <a:defRPr sz="1300">
+                <a:spcPts val="800"/>
+              </a:spcAft>
+              <a:defRPr sz="1250">
                 <a:solidFill>
                   <a:srgbClr val="0F172A"/>
                 </a:solidFill>
@@ -4735,24 +4735,24 @@
           <a:p>
             <a:pPr>
               <a:spcAft>
-                <a:spcPts val="900"/>
-              </a:spcAft>
-              <a:defRPr sz="1300">
-                <a:solidFill>
-                  <a:srgbClr val="0F172A"/>
-                </a:solidFill>
-              </a:defRPr>
-            </a:pPr>
-            <a:r>
-              <a:t>•  Phase 2: Student Profile Subscription (Alerts delivered only for specific branch &amp; semester).</a:t>
-            </a:r>
-          </a:p>
-          <a:p>
-            <a:pPr>
-              <a:spcAft>
-                <a:spcPts val="900"/>
-              </a:spcAft>
-              <a:defRPr sz="1300">
+                <a:spcPts val="800"/>
+              </a:spcAft>
+              <a:defRPr sz="1250">
+                <a:solidFill>
+                  <a:srgbClr val="0F172A"/>
+                </a:solidFill>
+              </a:defRPr>
+            </a:pPr>
+            <a:r>
+              <a:t>•  Phase 2: Student Profile Subscription (Alerts tailored to specific branch &amp; sem).</a:t>
+            </a:r>
+          </a:p>
+          <a:p>
+            <a:pPr>
+              <a:spcAft>
+                <a:spcPts val="800"/>
+              </a:spcAft>
+              <a:defRPr sz="1250">
                 <a:solidFill>
                   <a:srgbClr val="0F172A"/>
                 </a:solidFill>
@@ -4765,16 +4765,16 @@
           <a:p>
             <a:pPr>
               <a:spcAft>
-                <a:spcPts val="900"/>
-              </a:spcAft>
-              <a:defRPr sz="1300">
-                <a:solidFill>
-                  <a:srgbClr val="0F172A"/>
-                </a:solidFill>
-              </a:defRPr>
-            </a:pPr>
-            <a:r>
-              <a:t>•  Phase 4: Scaling the framework to Gujarat University, HNGU, VNSGU &amp; other state universities.</a:t>
+                <a:spcPts val="800"/>
+              </a:spcAft>
+              <a:defRPr sz="1250">
+                <a:solidFill>
+                  <a:srgbClr val="0F172A"/>
+                </a:solidFill>
+              </a:defRPr>
+            </a:pPr>
+            <a:r>
+              <a:t>•  Phase 4: Scaling the framework to Gujarat University, HNGU &amp; other state universities.</a:t>
             </a:r>
           </a:p>
         </p:txBody>
@@ -4833,7 +4833,7 @@
         <p:spPr>
           <a:xfrm>
             <a:off x="6190488" y="1234440"/>
-            <a:ext cx="5376672" cy="621792"/>
+            <a:ext cx="5376672" cy="594360"/>
           </a:xfrm>
           <a:prstGeom prst="roundRect">
             <a:avLst/>
@@ -4875,8 +4875,8 @@
         </p:nvSpPr>
         <p:spPr>
           <a:xfrm>
-            <a:off x="6373368" y="1289304"/>
-            <a:ext cx="5010912" cy="548640"/>
+            <a:off x="6355080" y="1280160"/>
+            <a:ext cx="5047488" cy="521208"/>
           </a:xfrm>
           <a:prstGeom prst="rect">
             <a:avLst/>
@@ -4890,26 +4890,26 @@
           <a:lstStyle/>
           <a:p>
             <a:pPr>
-              <a:defRPr sz="1550" b="1">
+              <a:defRPr sz="1450" b="1">
                 <a:solidFill>
                   <a:srgbClr val="FFFFFF"/>
                 </a:solidFill>
               </a:defRPr>
             </a:pPr>
             <a:r>
-              <a:t>Summary &amp; Core Value</a:t>
-            </a:r>
-          </a:p>
-          <a:p>
-            <a:pPr>
-              <a:defRPr sz="1000" b="1">
+              <a:t>Executive Summary</a:t>
+            </a:r>
+          </a:p>
+          <a:p>
+            <a:pPr>
+              <a:defRPr sz="950" b="1">
                 <a:solidFill>
                   <a:srgbClr val="E0F2FE"/>
                 </a:solidFill>
               </a:defRPr>
             </a:pPr>
             <a:r>
-              <a:t>EXECUTIVE SUMMARY</a:t>
+              <a:t>CORE VALUE</a:t>
             </a:r>
           </a:p>
         </p:txBody>
@@ -4922,8 +4922,8 @@
         </p:nvSpPr>
         <p:spPr>
           <a:xfrm>
-            <a:off x="6373368" y="1965960"/>
-            <a:ext cx="5010912" cy="2304288"/>
+            <a:off x="6355080" y="1901952"/>
+            <a:ext cx="5047488" cy="2386584"/>
           </a:xfrm>
           <a:prstGeom prst="rect">
             <a:avLst/>
@@ -4938,9 +4938,9 @@
           <a:p>
             <a:pPr>
               <a:spcAft>
-                <a:spcPts val="900"/>
-              </a:spcAft>
-              <a:defRPr sz="1300">
+                <a:spcPts val="800"/>
+              </a:spcAft>
+              <a:defRPr sz="1250">
                 <a:solidFill>
                   <a:srgbClr val="0F172A"/>
                 </a:solidFill>
@@ -4953,9 +4953,9 @@
           <a:p>
             <a:pPr>
               <a:spcAft>
-                <a:spcPts val="900"/>
-              </a:spcAft>
-              <a:defRPr sz="1300">
+                <a:spcPts val="800"/>
+              </a:spcAft>
+              <a:defRPr sz="1250">
                 <a:solidFill>
                   <a:srgbClr val="0F172A"/>
                 </a:solidFill>
@@ -4968,9 +4968,9 @@
           <a:p>
             <a:pPr>
               <a:spcAft>
-                <a:spcPts val="900"/>
-              </a:spcAft>
-              <a:defRPr sz="1300">
+                <a:spcPts val="800"/>
+              </a:spcAft>
+              <a:defRPr sz="1250">
                 <a:solidFill>
                   <a:srgbClr val="0F172A"/>
                 </a:solidFill>
@@ -4983,9 +4983,9 @@
           <a:p>
             <a:pPr>
               <a:spcAft>
-                <a:spcPts val="900"/>
-              </a:spcAft>
-              <a:defRPr sz="1300">
+                <a:spcPts val="800"/>
+              </a:spcAft>
+              <a:defRPr sz="1250">
                 <a:solidFill>
                   <a:srgbClr val="0F172A"/>
                 </a:solidFill>
@@ -4998,9 +4998,9 @@
           <a:p>
             <a:pPr>
               <a:spcAft>
-                <a:spcPts val="900"/>
-              </a:spcAft>
-              <a:defRPr sz="1300">
+                <a:spcPts val="800"/>
+              </a:spcAft>
+              <a:defRPr sz="1250">
                 <a:solidFill>
                   <a:srgbClr val="0F172A"/>
                 </a:solidFill>
@@ -5057,26 +5057,26 @@
               <a:spcAft>
                 <a:spcPts val="800"/>
               </a:spcAft>
-              <a:defRPr sz="2300" b="1">
+              <a:defRPr sz="2200" b="1">
                 <a:solidFill>
                   <a:srgbClr val="F97316"/>
                 </a:solidFill>
               </a:defRPr>
             </a:pPr>
             <a:r>
-              <a:t>Thank You! We are Ready for Jury Defense &amp; Live Demonstration.</a:t>
+              <a:t>Thank You! We are Ready for Project Evaluation &amp; Live Demonstration.</a:t>
             </a:r>
           </a:p>
           <a:p>
             <a:pPr algn="ctr">
-              <a:defRPr sz="1350">
+              <a:defRPr sz="1300">
                 <a:solidFill>
                   <a:srgbClr val="FFFFFF"/>
                 </a:solidFill>
               </a:defRPr>
             </a:pPr>
             <a:r>
-              <a:t>Smart India Hackathon 2024  •  Team: GTU Innovators  •  Open-Source &amp; Deployable Today</a:t>
+              <a:t>GTU Automated Alert System  •  Team: GTU Innovators  •  Open-Source &amp; Deployable Today</a:t>
             </a:r>
           </a:p>
         </p:txBody>
@@ -5236,8 +5236,8 @@
         </p:nvSpPr>
         <p:spPr>
           <a:xfrm>
-            <a:off x="7498079" y="164592"/>
-            <a:ext cx="4114800" cy="777240"/>
+            <a:off x="7132320" y="164592"/>
+            <a:ext cx="4480560" cy="777240"/>
           </a:xfrm>
           <a:prstGeom prst="rect">
             <a:avLst/>
@@ -5251,18 +5251,18 @@
           <a:lstStyle/>
           <a:p>
             <a:pPr algn="r">
-              <a:defRPr sz="1100" b="1">
+              <a:defRPr sz="1050" b="1">
                 <a:solidFill>
                   <a:srgbClr val="F97316"/>
                 </a:solidFill>
               </a:defRPr>
             </a:pPr>
             <a:r>
-              <a:t>SMART INDIA HACKATHON 2024</a:t>
+              <a:t>GUJARAT TECHNOLOGICAL UNIVERSITY</a:t>
             </a:r>
             <a:br/>
             <a:r>
-              <a:t>THEME: SMART EDUCATION / AUTOMATION</a:t>
+              <a:t>CAMPUS AUTOMATION &amp; STUDENT WELFARE</a:t>
             </a:r>
           </a:p>
         </p:txBody>
@@ -5276,7 +5276,7 @@
         <p:spPr>
           <a:xfrm>
             <a:off x="594360" y="201168"/>
-            <a:ext cx="6858000" cy="685800"/>
+            <a:ext cx="6583680" cy="685800"/>
           </a:xfrm>
           <a:prstGeom prst="rect">
             <a:avLst/>
@@ -5356,7 +5356,7 @@
         <p:spPr>
           <a:xfrm>
             <a:off x="594360" y="6510528"/>
-            <a:ext cx="7772400" cy="320040"/>
+            <a:ext cx="8046720" cy="320040"/>
           </a:xfrm>
           <a:prstGeom prst="rect">
             <a:avLst/>
@@ -5377,7 +5377,7 @@
               </a:defRPr>
             </a:pPr>
             <a:r>
-              <a:t>SIH 2024  |  Problem: GTU Notice Broadcast Automation  |  Team: GTU Innovators</a:t>
+              <a:t>GTU Circular &amp; Notification Alert System  |  Department of Computer / IT Engineering</a:t>
             </a:r>
           </a:p>
         </p:txBody>
@@ -5471,7 +5471,7 @@
         <p:spPr>
           <a:xfrm>
             <a:off x="594360" y="1234440"/>
-            <a:ext cx="3511296" cy="621792"/>
+            <a:ext cx="3511296" cy="594360"/>
           </a:xfrm>
           <a:prstGeom prst="roundRect">
             <a:avLst/>
@@ -5513,8 +5513,8 @@
         </p:nvSpPr>
         <p:spPr>
           <a:xfrm>
-            <a:off x="777240" y="1289304"/>
-            <a:ext cx="3145536" cy="548640"/>
+            <a:off x="758952" y="1280160"/>
+            <a:ext cx="3182112" cy="521208"/>
           </a:xfrm>
           <a:prstGeom prst="rect">
             <a:avLst/>
@@ -5528,7 +5528,7 @@
           <a:lstStyle/>
           <a:p>
             <a:pPr>
-              <a:defRPr sz="1550" b="1">
+              <a:defRPr sz="1450" b="1">
                 <a:solidFill>
                   <a:srgbClr val="FFFFFF"/>
                 </a:solidFill>
@@ -5540,7 +5540,7 @@
           </a:p>
           <a:p>
             <a:pPr>
-              <a:defRPr sz="1000" b="1">
+              <a:defRPr sz="950" b="1">
                 <a:solidFill>
                   <a:srgbClr val="E0F2FE"/>
                 </a:solidFill>
@@ -5560,8 +5560,8 @@
         </p:nvSpPr>
         <p:spPr>
           <a:xfrm>
-            <a:off x="777240" y="1965960"/>
-            <a:ext cx="3145536" cy="4315968"/>
+            <a:off x="758952" y="1901952"/>
+            <a:ext cx="3182112" cy="4398264"/>
           </a:xfrm>
           <a:prstGeom prst="rect">
             <a:avLst/>
@@ -5576,9 +5576,9 @@
           <a:p>
             <a:pPr>
               <a:spcAft>
-                <a:spcPts val="1100"/>
-              </a:spcAft>
-              <a:defRPr sz="1300">
+                <a:spcPts val="1000"/>
+              </a:spcAft>
+              <a:defRPr sz="1250">
                 <a:solidFill>
                   <a:srgbClr val="0F172A"/>
                 </a:solidFill>
@@ -5591,9 +5591,9 @@
           <a:p>
             <a:pPr>
               <a:spcAft>
-                <a:spcPts val="1100"/>
-              </a:spcAft>
-              <a:defRPr sz="1300">
+                <a:spcPts val="1000"/>
+              </a:spcAft>
+              <a:defRPr sz="1250">
                 <a:solidFill>
                   <a:srgbClr val="0F172A"/>
                 </a:solidFill>
@@ -5606,24 +5606,24 @@
           <a:p>
             <a:pPr>
               <a:spcAft>
-                <a:spcPts val="1100"/>
-              </a:spcAft>
-              <a:defRPr sz="1300">
-                <a:solidFill>
-                  <a:srgbClr val="0F172A"/>
-                </a:solidFill>
-              </a:defRPr>
-            </a:pPr>
-            <a:r>
-              <a:t>•  In extreme cases, missed dates lead to detention or skipped semesters.</a:t>
-            </a:r>
-          </a:p>
-          <a:p>
-            <a:pPr>
-              <a:spcAft>
-                <a:spcPts val="1100"/>
-              </a:spcAft>
-              <a:defRPr sz="1300">
+                <a:spcPts val="1000"/>
+              </a:spcAft>
+              <a:defRPr sz="1250">
+                <a:solidFill>
+                  <a:srgbClr val="0F172A"/>
+                </a:solidFill>
+              </a:defRPr>
+            </a:pPr>
+            <a:r>
+              <a:t>•  In extreme cases, missed dates lead to detention or skipped terms.</a:t>
+            </a:r>
+          </a:p>
+          <a:p>
+            <a:pPr>
+              <a:spcAft>
+                <a:spcPts val="1000"/>
+              </a:spcAft>
+              <a:defRPr sz="1250">
                 <a:solidFill>
                   <a:srgbClr val="0F172A"/>
                 </a:solidFill>
@@ -5636,9 +5636,9 @@
           <a:p>
             <a:pPr>
               <a:spcAft>
-                <a:spcPts val="1100"/>
-              </a:spcAft>
-              <a:defRPr sz="1300">
+                <a:spcPts val="1000"/>
+              </a:spcAft>
+              <a:defRPr sz="1250">
                 <a:solidFill>
                   <a:srgbClr val="0F172A"/>
                 </a:solidFill>
@@ -5651,16 +5651,16 @@
           <a:p>
             <a:pPr>
               <a:spcAft>
-                <a:spcPts val="1100"/>
-              </a:spcAft>
-              <a:defRPr sz="1300">
-                <a:solidFill>
-                  <a:srgbClr val="0F172A"/>
-                </a:solidFill>
-              </a:defRPr>
-            </a:pPr>
-            <a:r>
-              <a:t>•  Students from remote areas lack immediate campus access.</a:t>
+                <a:spcPts val="1000"/>
+              </a:spcAft>
+              <a:defRPr sz="1250">
+                <a:solidFill>
+                  <a:srgbClr val="0F172A"/>
+                </a:solidFill>
+              </a:defRPr>
+            </a:pPr>
+            <a:r>
+              <a:t>•  Students from remote areas lack immediate campus notice access.</a:t>
             </a:r>
           </a:p>
         </p:txBody>
@@ -5719,7 +5719,7 @@
         <p:spPr>
           <a:xfrm>
             <a:off x="4325112" y="1234440"/>
-            <a:ext cx="3511296" cy="621792"/>
+            <a:ext cx="3511296" cy="594360"/>
           </a:xfrm>
           <a:prstGeom prst="roundRect">
             <a:avLst/>
@@ -5761,8 +5761,8 @@
         </p:nvSpPr>
         <p:spPr>
           <a:xfrm>
-            <a:off x="4507992" y="1289304"/>
-            <a:ext cx="3145536" cy="548640"/>
+            <a:off x="4489704" y="1280160"/>
+            <a:ext cx="3182112" cy="521208"/>
           </a:xfrm>
           <a:prstGeom prst="rect">
             <a:avLst/>
@@ -5776,7 +5776,7 @@
           <a:lstStyle/>
           <a:p>
             <a:pPr>
-              <a:defRPr sz="1550" b="1">
+              <a:defRPr sz="1450" b="1">
                 <a:solidFill>
                   <a:srgbClr val="FFFFFF"/>
                 </a:solidFill>
@@ -5788,7 +5788,7 @@
           </a:p>
           <a:p>
             <a:pPr>
-              <a:defRPr sz="1000" b="1">
+              <a:defRPr sz="950" b="1">
                 <a:solidFill>
                   <a:srgbClr val="E0F2FE"/>
                 </a:solidFill>
@@ -5808,8 +5808,8 @@
         </p:nvSpPr>
         <p:spPr>
           <a:xfrm>
-            <a:off x="4507992" y="1965960"/>
-            <a:ext cx="3145536" cy="4315968"/>
+            <a:off x="4489704" y="1901952"/>
+            <a:ext cx="3182112" cy="4398264"/>
           </a:xfrm>
           <a:prstGeom prst="rect">
             <a:avLst/>
@@ -5824,39 +5824,39 @@
           <a:p>
             <a:pPr>
               <a:spcAft>
-                <a:spcPts val="1100"/>
-              </a:spcAft>
-              <a:defRPr sz="1300">
-                <a:solidFill>
-                  <a:srgbClr val="0F172A"/>
-                </a:solidFill>
-              </a:defRPr>
-            </a:pPr>
-            <a:r>
-              <a:t>•  Class Coordinators &amp; CRs must manually check GTU portal multiple times daily.</a:t>
-            </a:r>
-          </a:p>
-          <a:p>
-            <a:pPr>
-              <a:spcAft>
-                <a:spcPts val="1100"/>
-              </a:spcAft>
-              <a:defRPr sz="1300">
-                <a:solidFill>
-                  <a:srgbClr val="0F172A"/>
-                </a:solidFill>
-              </a:defRPr>
-            </a:pPr>
-            <a:r>
-              <a:t>•  Manual downloading, renaming, and sharing in unorganized WhatsApp groups.</a:t>
-            </a:r>
-          </a:p>
-          <a:p>
-            <a:pPr>
-              <a:spcAft>
-                <a:spcPts val="1100"/>
-              </a:spcAft>
-              <a:defRPr sz="1300">
+                <a:spcPts val="1000"/>
+              </a:spcAft>
+              <a:defRPr sz="1250">
+                <a:solidFill>
+                  <a:srgbClr val="0F172A"/>
+                </a:solidFill>
+              </a:defRPr>
+            </a:pPr>
+            <a:r>
+              <a:t>•  Class Coordinators &amp; CRs must manually check GTU portal daily.</a:t>
+            </a:r>
+          </a:p>
+          <a:p>
+            <a:pPr>
+              <a:spcAft>
+                <a:spcPts val="1000"/>
+              </a:spcAft>
+              <a:defRPr sz="1250">
+                <a:solidFill>
+                  <a:srgbClr val="0F172A"/>
+                </a:solidFill>
+              </a:defRPr>
+            </a:pPr>
+            <a:r>
+              <a:t>•  Manual downloading, renaming, and sharing in noisy WhatsApp groups.</a:t>
+            </a:r>
+          </a:p>
+          <a:p>
+            <a:pPr>
+              <a:spcAft>
+                <a:spcPts val="1000"/>
+              </a:spcAft>
+              <a:defRPr sz="1250">
                 <a:solidFill>
                   <a:srgbClr val="0F172A"/>
                 </a:solidFill>
@@ -5869,9 +5869,9 @@
           <a:p>
             <a:pPr>
               <a:spcAft>
-                <a:spcPts val="1100"/>
-              </a:spcAft>
-              <a:defRPr sz="1300">
+                <a:spcPts val="1000"/>
+              </a:spcAft>
+              <a:defRPr sz="1250">
                 <a:solidFill>
                   <a:srgbClr val="0F172A"/>
                 </a:solidFill>
@@ -5884,9 +5884,9 @@
           <a:p>
             <a:pPr>
               <a:spcAft>
-                <a:spcPts val="1100"/>
-              </a:spcAft>
-              <a:defRPr sz="1300">
+                <a:spcPts val="1000"/>
+              </a:spcAft>
+              <a:defRPr sz="1250">
                 <a:solidFill>
                   <a:srgbClr val="0F172A"/>
                 </a:solidFill>
@@ -5899,9 +5899,9 @@
           <a:p>
             <a:pPr>
               <a:spcAft>
-                <a:spcPts val="1100"/>
-              </a:spcAft>
-              <a:defRPr sz="1300">
+                <a:spcPts val="1000"/>
+              </a:spcAft>
+              <a:defRPr sz="1250">
                 <a:solidFill>
                   <a:srgbClr val="0F172A"/>
                 </a:solidFill>
@@ -5967,7 +5967,7 @@
         <p:spPr>
           <a:xfrm>
             <a:off x="8055864" y="1234440"/>
-            <a:ext cx="3511296" cy="621792"/>
+            <a:ext cx="3511296" cy="594360"/>
           </a:xfrm>
           <a:prstGeom prst="roundRect">
             <a:avLst/>
@@ -6009,8 +6009,8 @@
         </p:nvSpPr>
         <p:spPr>
           <a:xfrm>
-            <a:off x="8238744" y="1289304"/>
-            <a:ext cx="3145536" cy="548640"/>
+            <a:off x="8220456" y="1280160"/>
+            <a:ext cx="3182112" cy="521208"/>
           </a:xfrm>
           <a:prstGeom prst="rect">
             <a:avLst/>
@@ -6024,7 +6024,7 @@
           <a:lstStyle/>
           <a:p>
             <a:pPr>
-              <a:defRPr sz="1550" b="1">
+              <a:defRPr sz="1450" b="1">
                 <a:solidFill>
                   <a:srgbClr val="FFFFFF"/>
                 </a:solidFill>
@@ -6036,7 +6036,7 @@
           </a:p>
           <a:p>
             <a:pPr>
-              <a:defRPr sz="1000" b="1">
+              <a:defRPr sz="950" b="1">
                 <a:solidFill>
                   <a:srgbClr val="E0F2FE"/>
                 </a:solidFill>
@@ -6056,8 +6056,8 @@
         </p:nvSpPr>
         <p:spPr>
           <a:xfrm>
-            <a:off x="8238744" y="1965960"/>
-            <a:ext cx="3145536" cy="4315968"/>
+            <a:off x="8220456" y="1901952"/>
+            <a:ext cx="3182112" cy="4398264"/>
           </a:xfrm>
           <a:prstGeom prst="rect">
             <a:avLst/>
@@ -6072,24 +6072,24 @@
           <a:p>
             <a:pPr>
               <a:spcAft>
-                <a:spcPts val="1100"/>
-              </a:spcAft>
-              <a:defRPr sz="1300">
-                <a:solidFill>
-                  <a:srgbClr val="0F172A"/>
-                </a:solidFill>
-              </a:defRPr>
-            </a:pPr>
-            <a:r>
-              <a:t>•  GTU publishes 10 to 20 notices daily across all engineering and pharmacy branches.</a:t>
-            </a:r>
-          </a:p>
-          <a:p>
-            <a:pPr>
-              <a:spcAft>
-                <a:spcPts val="1100"/>
-              </a:spcAft>
-              <a:defRPr sz="1300">
+                <a:spcPts val="1000"/>
+              </a:spcAft>
+              <a:defRPr sz="1250">
+                <a:solidFill>
+                  <a:srgbClr val="0F172A"/>
+                </a:solidFill>
+              </a:defRPr>
+            </a:pPr>
+            <a:r>
+              <a:t>•  GTU publishes 10 to 20 notices daily across multiple faculties.</a:t>
+            </a:r>
+          </a:p>
+          <a:p>
+            <a:pPr>
+              <a:spcAft>
+                <a:spcPts val="1000"/>
+              </a:spcAft>
+              <a:defRPr sz="1250">
                 <a:solidFill>
                   <a:srgbClr val="0F172A"/>
                 </a:solidFill>
@@ -6102,24 +6102,24 @@
           <a:p>
             <a:pPr>
               <a:spcAft>
-                <a:spcPts val="1100"/>
-              </a:spcAft>
-              <a:defRPr sz="1300">
-                <a:solidFill>
-                  <a:srgbClr val="0F172A"/>
-                </a:solidFill>
-              </a:defRPr>
-            </a:pPr>
-            <a:r>
-              <a:t>•  GTU website suffers high latency and crashes during major exam/result periods.</a:t>
-            </a:r>
-          </a:p>
-          <a:p>
-            <a:pPr>
-              <a:spcAft>
-                <a:spcPts val="1100"/>
-              </a:spcAft>
-              <a:defRPr sz="1300">
+                <a:spcPts val="1000"/>
+              </a:spcAft>
+              <a:defRPr sz="1250">
+                <a:solidFill>
+                  <a:srgbClr val="0F172A"/>
+                </a:solidFill>
+              </a:defRPr>
+            </a:pPr>
+            <a:r>
+              <a:t>•  GTU website suffers high latency and crashes during major exam periods.</a:t>
+            </a:r>
+          </a:p>
+          <a:p>
+            <a:pPr>
+              <a:spcAft>
+                <a:spcPts val="1000"/>
+              </a:spcAft>
+              <a:defRPr sz="1250">
                 <a:solidFill>
                   <a:srgbClr val="0F172A"/>
                 </a:solidFill>
@@ -6132,24 +6132,24 @@
           <a:p>
             <a:pPr>
               <a:spcAft>
-                <a:spcPts val="1100"/>
-              </a:spcAft>
-              <a:defRPr sz="1300">
-                <a:solidFill>
-                  <a:srgbClr val="0F172A"/>
-                </a:solidFill>
-              </a:defRPr>
-            </a:pPr>
-            <a:r>
-              <a:t>•  Rural &amp; regional students face difficulty navigating complex portal links.</a:t>
-            </a:r>
-          </a:p>
-          <a:p>
-            <a:pPr>
-              <a:spcAft>
-                <a:spcPts val="1100"/>
-              </a:spcAft>
-              <a:defRPr sz="1300">
+                <a:spcPts val="1000"/>
+              </a:spcAft>
+              <a:defRPr sz="1250">
+                <a:solidFill>
+                  <a:srgbClr val="0F172A"/>
+                </a:solidFill>
+              </a:defRPr>
+            </a:pPr>
+            <a:r>
+              <a:t>•  Rural &amp; regional students face difficulty navigating portal links.</a:t>
+            </a:r>
+          </a:p>
+          <a:p>
+            <a:pPr>
+              <a:spcAft>
+                <a:spcPts val="1000"/>
+              </a:spcAft>
+              <a:defRPr sz="1250">
                 <a:solidFill>
                   <a:srgbClr val="0F172A"/>
                 </a:solidFill>
@@ -6316,8 +6316,8 @@
         </p:nvSpPr>
         <p:spPr>
           <a:xfrm>
-            <a:off x="7498079" y="164592"/>
-            <a:ext cx="4114800" cy="777240"/>
+            <a:off x="7132320" y="164592"/>
+            <a:ext cx="4480560" cy="777240"/>
           </a:xfrm>
           <a:prstGeom prst="rect">
             <a:avLst/>
@@ -6331,18 +6331,18 @@
           <a:lstStyle/>
           <a:p>
             <a:pPr algn="r">
-              <a:defRPr sz="1100" b="1">
+              <a:defRPr sz="1050" b="1">
                 <a:solidFill>
                   <a:srgbClr val="F97316"/>
                 </a:solidFill>
               </a:defRPr>
             </a:pPr>
             <a:r>
-              <a:t>SMART INDIA HACKATHON 2024</a:t>
+              <a:t>GUJARAT TECHNOLOGICAL UNIVERSITY</a:t>
             </a:r>
             <a:br/>
             <a:r>
-              <a:t>THEME: SMART EDUCATION / AUTOMATION</a:t>
+              <a:t>CAMPUS AUTOMATION &amp; STUDENT WELFARE</a:t>
             </a:r>
           </a:p>
         </p:txBody>
@@ -6356,7 +6356,7 @@
         <p:spPr>
           <a:xfrm>
             <a:off x="594360" y="201168"/>
-            <a:ext cx="6858000" cy="685800"/>
+            <a:ext cx="6583680" cy="685800"/>
           </a:xfrm>
           <a:prstGeom prst="rect">
             <a:avLst/>
@@ -6377,7 +6377,7 @@
               </a:defRPr>
             </a:pPr>
             <a:r>
-              <a:t>Proposed Solution: An Autonomous University Broadcast Ecosystem</a:t>
+              <a:t>Proposed Solution: Autonomous Notice Broadcast Ecosystem</a:t>
             </a:r>
           </a:p>
         </p:txBody>
@@ -6436,7 +6436,7 @@
         <p:spPr>
           <a:xfrm>
             <a:off x="594360" y="6510528"/>
-            <a:ext cx="7772400" cy="320040"/>
+            <a:ext cx="8046720" cy="320040"/>
           </a:xfrm>
           <a:prstGeom prst="rect">
             <a:avLst/>
@@ -6457,7 +6457,7 @@
               </a:defRPr>
             </a:pPr>
             <a:r>
-              <a:t>SIH 2024  |  Problem: GTU Notice Broadcast Automation  |  Team: GTU Innovators</a:t>
+              <a:t>GTU Circular &amp; Notification Alert System  |  Department of Computer / IT Engineering</a:t>
             </a:r>
           </a:p>
         </p:txBody>
@@ -6505,8 +6505,8 @@
         </p:nvSpPr>
         <p:spPr>
           <a:xfrm>
-            <a:off x="594360" y="1234440"/>
-            <a:ext cx="5376672" cy="2514600"/>
+            <a:off x="594360" y="1207008"/>
+            <a:ext cx="5376672" cy="2542032"/>
           </a:xfrm>
           <a:prstGeom prst="roundRect">
             <a:avLst/>
@@ -6550,8 +6550,8 @@
         </p:nvSpPr>
         <p:spPr>
           <a:xfrm>
-            <a:off x="594360" y="1234440"/>
-            <a:ext cx="5376672" cy="530352"/>
+            <a:off x="594360" y="1207008"/>
+            <a:ext cx="5376672" cy="475488"/>
           </a:xfrm>
           <a:prstGeom prst="roundRect">
             <a:avLst/>
@@ -6593,8 +6593,8 @@
         </p:nvSpPr>
         <p:spPr>
           <a:xfrm>
-            <a:off x="777240" y="1289304"/>
-            <a:ext cx="5010912" cy="457200"/>
+            <a:off x="758952" y="1252728"/>
+            <a:ext cx="5047488" cy="402336"/>
           </a:xfrm>
           <a:prstGeom prst="rect">
             <a:avLst/>
@@ -6608,7 +6608,7 @@
           <a:lstStyle/>
           <a:p>
             <a:pPr>
-              <a:defRPr sz="1550" b="1">
+              <a:defRPr sz="1450" b="1">
                 <a:solidFill>
                   <a:srgbClr val="FFFFFF"/>
                 </a:solidFill>
@@ -6628,8 +6628,8 @@
         </p:nvSpPr>
         <p:spPr>
           <a:xfrm>
-            <a:off x="777240" y="1874520"/>
-            <a:ext cx="5010912" cy="1801368"/>
+            <a:off x="758952" y="1755648"/>
+            <a:ext cx="5047488" cy="1938528"/>
           </a:xfrm>
           <a:prstGeom prst="rect">
             <a:avLst/>
@@ -6644,54 +6644,54 @@
           <a:p>
             <a:pPr>
               <a:spcAft>
-                <a:spcPts val="1000"/>
-              </a:spcAft>
-              <a:defRPr sz="1350">
-                <a:solidFill>
-                  <a:srgbClr val="0F172A"/>
-                </a:solidFill>
-              </a:defRPr>
-            </a:pPr>
-            <a:r>
-              <a:t>•  Background polling engine monitors official GTU portal 24/7 every 15 minutes.</a:t>
-            </a:r>
-          </a:p>
-          <a:p>
-            <a:pPr>
-              <a:spcAft>
-                <a:spcPts val="1000"/>
-              </a:spcAft>
-              <a:defRPr sz="1350">
-                <a:solidFill>
-                  <a:srgbClr val="0F172A"/>
-                </a:solidFill>
-              </a:defRPr>
-            </a:pPr>
-            <a:r>
-              <a:t>•  Dispatches alerts to Telegram channels, Discord servers, and student bots within 5 seconds.</a:t>
-            </a:r>
-          </a:p>
-          <a:p>
-            <a:pPr>
-              <a:spcAft>
-                <a:spcPts val="1000"/>
-              </a:spcAft>
-              <a:defRPr sz="1350">
-                <a:solidFill>
-                  <a:srgbClr val="0F172A"/>
-                </a:solidFill>
-              </a:defRPr>
-            </a:pPr>
-            <a:r>
-              <a:t>•  Includes direct 1-click official PDF link (no need to open the university website).</a:t>
-            </a:r>
-          </a:p>
-          <a:p>
-            <a:pPr>
-              <a:spcAft>
-                <a:spcPts val="1000"/>
-              </a:spcAft>
-              <a:defRPr sz="1350">
+                <a:spcPts val="600"/>
+              </a:spcAft>
+              <a:defRPr sz="1200">
+                <a:solidFill>
+                  <a:srgbClr val="0F172A"/>
+                </a:solidFill>
+              </a:defRPr>
+            </a:pPr>
+            <a:r>
+              <a:t>•  24/7 automated background polling of official GTU portal.</a:t>
+            </a:r>
+          </a:p>
+          <a:p>
+            <a:pPr>
+              <a:spcAft>
+                <a:spcPts val="600"/>
+              </a:spcAft>
+              <a:defRPr sz="1200">
+                <a:solidFill>
+                  <a:srgbClr val="0F172A"/>
+                </a:solidFill>
+              </a:defRPr>
+            </a:pPr>
+            <a:r>
+              <a:t>•  Instant alerts delivered to Telegram &amp; Discord within 5 seconds.</a:t>
+            </a:r>
+          </a:p>
+          <a:p>
+            <a:pPr>
+              <a:spcAft>
+                <a:spcPts val="600"/>
+              </a:spcAft>
+              <a:defRPr sz="1200">
+                <a:solidFill>
+                  <a:srgbClr val="0F172A"/>
+                </a:solidFill>
+              </a:defRPr>
+            </a:pPr>
+            <a:r>
+              <a:t>•  Direct 1-click official PDF link (no need to open university website).</a:t>
+            </a:r>
+          </a:p>
+          <a:p>
+            <a:pPr>
+              <a:spcAft>
+                <a:spcPts val="600"/>
+              </a:spcAft>
+              <a:defRPr sz="1200">
                 <a:solidFill>
                   <a:srgbClr val="0F172A"/>
                 </a:solidFill>
@@ -6711,8 +6711,8 @@
         </p:nvSpPr>
         <p:spPr>
           <a:xfrm>
-            <a:off x="6190488" y="1234440"/>
-            <a:ext cx="5376672" cy="2514600"/>
+            <a:off x="6190488" y="1207008"/>
+            <a:ext cx="5376672" cy="2542032"/>
           </a:xfrm>
           <a:prstGeom prst="roundRect">
             <a:avLst/>
@@ -6756,8 +6756,8 @@
         </p:nvSpPr>
         <p:spPr>
           <a:xfrm>
-            <a:off x="6190488" y="1234440"/>
-            <a:ext cx="5376672" cy="530352"/>
+            <a:off x="6190488" y="1207008"/>
+            <a:ext cx="5376672" cy="475488"/>
           </a:xfrm>
           <a:prstGeom prst="roundRect">
             <a:avLst/>
@@ -6799,8 +6799,8 @@
         </p:nvSpPr>
         <p:spPr>
           <a:xfrm>
-            <a:off x="6373368" y="1289304"/>
-            <a:ext cx="5010912" cy="457200"/>
+            <a:off x="6355080" y="1252728"/>
+            <a:ext cx="5047488" cy="402336"/>
           </a:xfrm>
           <a:prstGeom prst="rect">
             <a:avLst/>
@@ -6814,7 +6814,7 @@
           <a:lstStyle/>
           <a:p>
             <a:pPr>
-              <a:defRPr sz="1550" b="1">
+              <a:defRPr sz="1450" b="1">
                 <a:solidFill>
                   <a:srgbClr val="FFFFFF"/>
                 </a:solidFill>
@@ -6834,8 +6834,8 @@
         </p:nvSpPr>
         <p:spPr>
           <a:xfrm>
-            <a:off x="6373368" y="1874520"/>
-            <a:ext cx="5010912" cy="1801368"/>
+            <a:off x="6355080" y="1755648"/>
+            <a:ext cx="5047488" cy="1938528"/>
           </a:xfrm>
           <a:prstGeom prst="rect">
             <a:avLst/>
@@ -6850,24 +6850,24 @@
           <a:p>
             <a:pPr>
               <a:spcAft>
-                <a:spcPts val="1000"/>
-              </a:spcAft>
-              <a:defRPr sz="1350">
-                <a:solidFill>
-                  <a:srgbClr val="0F172A"/>
-                </a:solidFill>
-              </a:defRPr>
-            </a:pPr>
-            <a:r>
-              <a:t>•  Regex NLP accurately extracts degree (BE, ME, Diploma, Pharmacy, MBA, MCA).</a:t>
-            </a:r>
-          </a:p>
-          <a:p>
-            <a:pPr>
-              <a:spcAft>
-                <a:spcPts val="1000"/>
-              </a:spcAft>
-              <a:defRPr sz="1350">
+                <a:spcPts val="600"/>
+              </a:spcAft>
+              <a:defRPr sz="1200">
+                <a:solidFill>
+                  <a:srgbClr val="0F172A"/>
+                </a:solidFill>
+              </a:defRPr>
+            </a:pPr>
+            <a:r>
+              <a:t>•  Regex NLP accurately extracts degree (BE, ME, Diploma, MBA, MCA).</a:t>
+            </a:r>
+          </a:p>
+          <a:p>
+            <a:pPr>
+              <a:spcAft>
+                <a:spcPts val="600"/>
+              </a:spcAft>
+              <a:defRPr sz="1200">
                 <a:solidFill>
                   <a:srgbClr val="0F172A"/>
                 </a:solidFill>
@@ -6880,31 +6880,31 @@
           <a:p>
             <a:pPr>
               <a:spcAft>
-                <a:spcPts val="1000"/>
-              </a:spcAft>
-              <a:defRPr sz="1350">
-                <a:solidFill>
-                  <a:srgbClr val="0F172A"/>
-                </a:solidFill>
-              </a:defRPr>
-            </a:pPr>
-            <a:r>
-              <a:t>•  Automated Deadline &amp; Penalty Extractor highlights last dates and late fee slabs.</a:t>
-            </a:r>
-          </a:p>
-          <a:p>
-            <a:pPr>
-              <a:spcAft>
-                <a:spcPts val="1000"/>
-              </a:spcAft>
-              <a:defRPr sz="1350">
-                <a:solidFill>
-                  <a:srgbClr val="0F172A"/>
-                </a:solidFill>
-              </a:defRPr>
-            </a:pPr>
-            <a:r>
-              <a:t>•  Generates direct .ics calendar invite for instant Google / Apple Calendar sync.</a:t>
+                <a:spcPts val="600"/>
+              </a:spcAft>
+              <a:defRPr sz="1200">
+                <a:solidFill>
+                  <a:srgbClr val="0F172A"/>
+                </a:solidFill>
+              </a:defRPr>
+            </a:pPr>
+            <a:r>
+              <a:t>•  Extracts critical last dates and penalty fee slabs automatically.</a:t>
+            </a:r>
+          </a:p>
+          <a:p>
+            <a:pPr>
+              <a:spcAft>
+                <a:spcPts val="600"/>
+              </a:spcAft>
+              <a:defRPr sz="1200">
+                <a:solidFill>
+                  <a:srgbClr val="0F172A"/>
+                </a:solidFill>
+              </a:defRPr>
+            </a:pPr>
+            <a:r>
+              <a:t>•  Generates .ics calendar invite for Google &amp; Apple Calendar sync.</a:t>
             </a:r>
           </a:p>
         </p:txBody>
@@ -6918,7 +6918,7 @@
         <p:spPr>
           <a:xfrm>
             <a:off x="594360" y="3822191"/>
-            <a:ext cx="5376672" cy="2514600"/>
+            <a:ext cx="5376672" cy="2542032"/>
           </a:xfrm>
           <a:prstGeom prst="roundRect">
             <a:avLst/>
@@ -6963,7 +6963,7 @@
         <p:spPr>
           <a:xfrm>
             <a:off x="594360" y="3822191"/>
-            <a:ext cx="5376672" cy="530352"/>
+            <a:ext cx="5376672" cy="475488"/>
           </a:xfrm>
           <a:prstGeom prst="roundRect">
             <a:avLst/>
@@ -7005,8 +7005,8 @@
         </p:nvSpPr>
         <p:spPr>
           <a:xfrm>
-            <a:off x="777240" y="3877055"/>
-            <a:ext cx="5010912" cy="457200"/>
+            <a:off x="758952" y="3867911"/>
+            <a:ext cx="5047488" cy="402336"/>
           </a:xfrm>
           <a:prstGeom prst="rect">
             <a:avLst/>
@@ -7020,7 +7020,7 @@
           <a:lstStyle/>
           <a:p>
             <a:pPr>
-              <a:defRPr sz="1550" b="1">
+              <a:defRPr sz="1450" b="1">
                 <a:solidFill>
                   <a:srgbClr val="FFFFFF"/>
                 </a:solidFill>
@@ -7040,8 +7040,8 @@
         </p:nvSpPr>
         <p:spPr>
           <a:xfrm>
-            <a:off x="777240" y="4462271"/>
-            <a:ext cx="5010912" cy="1801368"/>
+            <a:off x="758952" y="4370831"/>
+            <a:ext cx="5047488" cy="1938528"/>
           </a:xfrm>
           <a:prstGeom prst="rect">
             <a:avLst/>
@@ -7056,61 +7056,61 @@
           <a:p>
             <a:pPr>
               <a:spcAft>
-                <a:spcPts val="1000"/>
-              </a:spcAft>
-              <a:defRPr sz="1350">
-                <a:solidFill>
-                  <a:srgbClr val="0F172A"/>
-                </a:solidFill>
-              </a:defRPr>
-            </a:pPr>
-            <a:r>
-              <a:t>•  Google Gemini AI summarizes complex 10-page circulars into 2 clear sentences.</a:t>
-            </a:r>
-          </a:p>
-          <a:p>
-            <a:pPr>
-              <a:spcAft>
-                <a:spcPts val="1000"/>
-              </a:spcAft>
-              <a:defRPr sz="1350">
-                <a:solidFill>
-                  <a:srgbClr val="0F172A"/>
-                </a:solidFill>
-              </a:defRPr>
-            </a:pPr>
-            <a:r>
-              <a:t>•  Smart offline heuristic fallback ensures zero downtime even without API keys.</a:t>
-            </a:r>
-          </a:p>
-          <a:p>
-            <a:pPr>
-              <a:spcAft>
-                <a:spcPts val="1000"/>
-              </a:spcAft>
-              <a:defRPr sz="1350">
-                <a:solidFill>
-                  <a:srgbClr val="0F172A"/>
-                </a:solidFill>
-              </a:defRPr>
-            </a:pPr>
-            <a:r>
-              <a:t>•  Bilingual templates (English + Gujarati) empower regional students and parents.</a:t>
-            </a:r>
-          </a:p>
-          <a:p>
-            <a:pPr>
-              <a:spcAft>
-                <a:spcPts val="1000"/>
-              </a:spcAft>
-              <a:defRPr sz="1350">
-                <a:solidFill>
-                  <a:srgbClr val="0F172A"/>
-                </a:solidFill>
-              </a:defRPr>
-            </a:pPr>
-            <a:r>
-              <a:t>•  Eliminates confusion regarding who needs to act, by when, and what amount is due.</a:t>
+                <a:spcPts val="600"/>
+              </a:spcAft>
+              <a:defRPr sz="1200">
+                <a:solidFill>
+                  <a:srgbClr val="0F172A"/>
+                </a:solidFill>
+              </a:defRPr>
+            </a:pPr>
+            <a:r>
+              <a:t>•  Google Gemini AI summarizes complex notices into 2 clear sentences.</a:t>
+            </a:r>
+          </a:p>
+          <a:p>
+            <a:pPr>
+              <a:spcAft>
+                <a:spcPts val="600"/>
+              </a:spcAft>
+              <a:defRPr sz="1200">
+                <a:solidFill>
+                  <a:srgbClr val="0F172A"/>
+                </a:solidFill>
+              </a:defRPr>
+            </a:pPr>
+            <a:r>
+              <a:t>•  Smart offline heuristic fallback ensures 100% zero downtime.</a:t>
+            </a:r>
+          </a:p>
+          <a:p>
+            <a:pPr>
+              <a:spcAft>
+                <a:spcPts val="600"/>
+              </a:spcAft>
+              <a:defRPr sz="1200">
+                <a:solidFill>
+                  <a:srgbClr val="0F172A"/>
+                </a:solidFill>
+              </a:defRPr>
+            </a:pPr>
+            <a:r>
+              <a:t>•  Bilingual templates (English + Gujarati) for regional students &amp; parents.</a:t>
+            </a:r>
+          </a:p>
+          <a:p>
+            <a:pPr>
+              <a:spcAft>
+                <a:spcPts val="600"/>
+              </a:spcAft>
+              <a:defRPr sz="1200">
+                <a:solidFill>
+                  <a:srgbClr val="0F172A"/>
+                </a:solidFill>
+              </a:defRPr>
+            </a:pPr>
+            <a:r>
+              <a:t>•  Instantly highlights who needs to act, deadline date, and fee amount.</a:t>
             </a:r>
           </a:p>
         </p:txBody>
@@ -7124,7 +7124,7 @@
         <p:spPr>
           <a:xfrm>
             <a:off x="6190488" y="3822191"/>
-            <a:ext cx="5376672" cy="2514600"/>
+            <a:ext cx="5376672" cy="2542032"/>
           </a:xfrm>
           <a:prstGeom prst="roundRect">
             <a:avLst/>
@@ -7169,7 +7169,7 @@
         <p:spPr>
           <a:xfrm>
             <a:off x="6190488" y="3822191"/>
-            <a:ext cx="5376672" cy="530352"/>
+            <a:ext cx="5376672" cy="475488"/>
           </a:xfrm>
           <a:prstGeom prst="roundRect">
             <a:avLst/>
@@ -7211,8 +7211,8 @@
         </p:nvSpPr>
         <p:spPr>
           <a:xfrm>
-            <a:off x="6373368" y="3877055"/>
-            <a:ext cx="5010912" cy="457200"/>
+            <a:off x="6355080" y="3867911"/>
+            <a:ext cx="5047488" cy="402336"/>
           </a:xfrm>
           <a:prstGeom prst="rect">
             <a:avLst/>
@@ -7226,7 +7226,7 @@
           <a:lstStyle/>
           <a:p>
             <a:pPr>
-              <a:defRPr sz="1550" b="1">
+              <a:defRPr sz="1450" b="1">
                 <a:solidFill>
                   <a:srgbClr val="FFFFFF"/>
                 </a:solidFill>
@@ -7246,8 +7246,8 @@
         </p:nvSpPr>
         <p:spPr>
           <a:xfrm>
-            <a:off x="6373368" y="4462271"/>
-            <a:ext cx="5010912" cy="1801368"/>
+            <a:off x="6355080" y="4370831"/>
+            <a:ext cx="5047488" cy="1938528"/>
           </a:xfrm>
           <a:prstGeom prst="rect">
             <a:avLst/>
@@ -7262,61 +7262,61 @@
           <a:p>
             <a:pPr>
               <a:spcAft>
-                <a:spcPts val="1000"/>
-              </a:spcAft>
-              <a:defRPr sz="1350">
-                <a:solidFill>
-                  <a:srgbClr val="0F172A"/>
-                </a:solidFill>
-              </a:defRPr>
-            </a:pPr>
-            <a:r>
-              <a:t>•  Spoken Daily Voice Bulletin (30-sec MP3 audio briefing) for busy commuters &amp; visually impaired.</a:t>
-            </a:r>
-          </a:p>
-          <a:p>
-            <a:pPr>
-              <a:spcAft>
-                <a:spcPts val="1000"/>
-              </a:spcAft>
-              <a:defRPr sz="1350">
-                <a:solidFill>
-                  <a:srgbClr val="0F172A"/>
-                </a:solidFill>
-              </a:defRPr>
-            </a:pPr>
-            <a:r>
-              <a:t>•  Modern PWA Web Dashboard with Live Search, Dark/Light Theme &amp; Course Filters.</a:t>
-            </a:r>
-          </a:p>
-          <a:p>
-            <a:pPr>
-              <a:spcAft>
-                <a:spcPts val="1000"/>
-              </a:spcAft>
-              <a:defRPr sz="1350">
-                <a:solidFill>
-                  <a:srgbClr val="0F172A"/>
-                </a:solidFill>
-              </a:defRPr>
-            </a:pPr>
-            <a:r>
-              <a:t>•  Service Worker (sw.js) enables 100% offline access to previously loaded notices.</a:t>
-            </a:r>
-          </a:p>
-          <a:p>
-            <a:pPr>
-              <a:spcAft>
-                <a:spcPts val="1000"/>
-              </a:spcAft>
-              <a:defRPr sz="1350">
-                <a:solidFill>
-                  <a:srgbClr val="0F172A"/>
-                </a:solidFill>
-              </a:defRPr>
-            </a:pPr>
-            <a:r>
-              <a:t>•  Zero-Cost Cloud Deployment: Hosted 100% free on GitHub Pages and GitHub Actions.</a:t>
+                <a:spcPts val="600"/>
+              </a:spcAft>
+              <a:defRPr sz="1200">
+                <a:solidFill>
+                  <a:srgbClr val="0F172A"/>
+                </a:solidFill>
+              </a:defRPr>
+            </a:pPr>
+            <a:r>
+              <a:t>•  Daily Voice Bulletin (30-sec MP3 audio briefing) for busy commuters.</a:t>
+            </a:r>
+          </a:p>
+          <a:p>
+            <a:pPr>
+              <a:spcAft>
+                <a:spcPts val="600"/>
+              </a:spcAft>
+              <a:defRPr sz="1200">
+                <a:solidFill>
+                  <a:srgbClr val="0F172A"/>
+                </a:solidFill>
+              </a:defRPr>
+            </a:pPr>
+            <a:r>
+              <a:t>•  Modern PWA Web Dashboard with Live Search &amp; Stream Filters.</a:t>
+            </a:r>
+          </a:p>
+          <a:p>
+            <a:pPr>
+              <a:spcAft>
+                <a:spcPts val="600"/>
+              </a:spcAft>
+              <a:defRPr sz="1200">
+                <a:solidFill>
+                  <a:srgbClr val="0F172A"/>
+                </a:solidFill>
+              </a:defRPr>
+            </a:pPr>
+            <a:r>
+              <a:t>•  Offline Service Worker cache allows viewing without internet.</a:t>
+            </a:r>
+          </a:p>
+          <a:p>
+            <a:pPr>
+              <a:spcAft>
+                <a:spcPts val="600"/>
+              </a:spcAft>
+              <a:defRPr sz="1200">
+                <a:solidFill>
+                  <a:srgbClr val="0F172A"/>
+                </a:solidFill>
+              </a:defRPr>
+            </a:pPr>
+            <a:r>
+              <a:t>•  Zero-Cost Cloud Deployment via GitHub Pages &amp; GitHub Actions.</a:t>
             </a:r>
           </a:p>
         </p:txBody>
@@ -7476,8 +7476,8 @@
         </p:nvSpPr>
         <p:spPr>
           <a:xfrm>
-            <a:off x="7498079" y="164592"/>
-            <a:ext cx="4114800" cy="777240"/>
+            <a:off x="7132320" y="164592"/>
+            <a:ext cx="4480560" cy="777240"/>
           </a:xfrm>
           <a:prstGeom prst="rect">
             <a:avLst/>
@@ -7491,18 +7491,18 @@
           <a:lstStyle/>
           <a:p>
             <a:pPr algn="r">
-              <a:defRPr sz="1100" b="1">
+              <a:defRPr sz="1050" b="1">
                 <a:solidFill>
                   <a:srgbClr val="F97316"/>
                 </a:solidFill>
               </a:defRPr>
             </a:pPr>
             <a:r>
-              <a:t>SMART INDIA HACKATHON 2024</a:t>
+              <a:t>GUJARAT TECHNOLOGICAL UNIVERSITY</a:t>
             </a:r>
             <a:br/>
             <a:r>
-              <a:t>THEME: SMART EDUCATION / AUTOMATION</a:t>
+              <a:t>CAMPUS AUTOMATION &amp; STUDENT WELFARE</a:t>
             </a:r>
           </a:p>
         </p:txBody>
@@ -7516,7 +7516,7 @@
         <p:spPr>
           <a:xfrm>
             <a:off x="594360" y="201168"/>
-            <a:ext cx="6858000" cy="685800"/>
+            <a:ext cx="6583680" cy="685800"/>
           </a:xfrm>
           <a:prstGeom prst="rect">
             <a:avLst/>
@@ -7596,7 +7596,7 @@
         <p:spPr>
           <a:xfrm>
             <a:off x="594360" y="6510528"/>
-            <a:ext cx="7772400" cy="320040"/>
+            <a:ext cx="8046720" cy="320040"/>
           </a:xfrm>
           <a:prstGeom prst="rect">
             <a:avLst/>
@@ -7617,7 +7617,7 @@
               </a:defRPr>
             </a:pPr>
             <a:r>
-              <a:t>SIH 2024  |  Problem: GTU Notice Broadcast Automation  |  Team: GTU Innovators</a:t>
+              <a:t>GTU Circular &amp; Notification Alert System  |  Department of Computer / IT Engineering</a:t>
             </a:r>
           </a:p>
         </p:txBody>
@@ -7711,7 +7711,7 @@
         <p:spPr>
           <a:xfrm>
             <a:off x="594360" y="1234440"/>
-            <a:ext cx="2578608" cy="621792"/>
+            <a:ext cx="2578608" cy="594360"/>
           </a:xfrm>
           <a:prstGeom prst="roundRect">
             <a:avLst/>
@@ -7753,8 +7753,8 @@
         </p:nvSpPr>
         <p:spPr>
           <a:xfrm>
-            <a:off x="777240" y="1289304"/>
-            <a:ext cx="2212848" cy="548640"/>
+            <a:off x="758952" y="1280160"/>
+            <a:ext cx="2249424" cy="521208"/>
           </a:xfrm>
           <a:prstGeom prst="rect">
             <a:avLst/>
@@ -7768,7 +7768,7 @@
           <a:lstStyle/>
           <a:p>
             <a:pPr>
-              <a:defRPr sz="1550" b="1">
+              <a:defRPr sz="1450" b="1">
                 <a:solidFill>
                   <a:srgbClr val="FFFFFF"/>
                 </a:solidFill>
@@ -7780,7 +7780,7 @@
           </a:p>
           <a:p>
             <a:pPr>
-              <a:defRPr sz="1000" b="1">
+              <a:defRPr sz="950" b="1">
                 <a:solidFill>
                   <a:srgbClr val="E0F2FE"/>
                 </a:solidFill>
@@ -7800,8 +7800,8 @@
         </p:nvSpPr>
         <p:spPr>
           <a:xfrm>
-            <a:off x="777240" y="1965960"/>
-            <a:ext cx="2212848" cy="4315968"/>
+            <a:off x="758952" y="1901952"/>
+            <a:ext cx="2249424" cy="4398264"/>
           </a:xfrm>
           <a:prstGeom prst="rect">
             <a:avLst/>
@@ -7816,9 +7816,9 @@
           <a:p>
             <a:pPr>
               <a:spcAft>
-                <a:spcPts val="1100"/>
-              </a:spcAft>
-              <a:defRPr sz="1250">
+                <a:spcPts val="1000"/>
+              </a:spcAft>
+              <a:defRPr sz="1200">
                 <a:solidFill>
                   <a:srgbClr val="0F172A"/>
                 </a:solidFill>
@@ -7831,9 +7831,9 @@
           <a:p>
             <a:pPr>
               <a:spcAft>
-                <a:spcPts val="1100"/>
-              </a:spcAft>
-              <a:defRPr sz="1250">
+                <a:spcPts val="1000"/>
+              </a:spcAft>
+              <a:defRPr sz="1200">
                 <a:solidFill>
                   <a:srgbClr val="0F172A"/>
                 </a:solidFill>
@@ -7846,9 +7846,9 @@
           <a:p>
             <a:pPr>
               <a:spcAft>
-                <a:spcPts val="1100"/>
-              </a:spcAft>
-              <a:defRPr sz="1250">
+                <a:spcPts val="1000"/>
+              </a:spcAft>
+              <a:defRPr sz="1200">
                 <a:solidFill>
                   <a:srgbClr val="0F172A"/>
                 </a:solidFill>
@@ -7861,9 +7861,9 @@
           <a:p>
             <a:pPr>
               <a:spcAft>
-                <a:spcPts val="1100"/>
-              </a:spcAft>
-              <a:defRPr sz="1250">
+                <a:spcPts val="1000"/>
+              </a:spcAft>
+              <a:defRPr sz="1200">
                 <a:solidFill>
                   <a:srgbClr val="0F172A"/>
                 </a:solidFill>
@@ -7876,9 +7876,9 @@
           <a:p>
             <a:pPr>
               <a:spcAft>
-                <a:spcPts val="1100"/>
-              </a:spcAft>
-              <a:defRPr sz="1250">
+                <a:spcPts val="1000"/>
+              </a:spcAft>
+              <a:defRPr sz="1200">
                 <a:solidFill>
                   <a:srgbClr val="0F172A"/>
                 </a:solidFill>
@@ -7891,9 +7891,9 @@
           <a:p>
             <a:pPr>
               <a:spcAft>
-                <a:spcPts val="1100"/>
-              </a:spcAft>
-              <a:defRPr sz="1250">
+                <a:spcPts val="1000"/>
+              </a:spcAft>
+              <a:defRPr sz="1200">
                 <a:solidFill>
                   <a:srgbClr val="0F172A"/>
                 </a:solidFill>
@@ -7906,9 +7906,9 @@
           <a:p>
             <a:pPr>
               <a:spcAft>
-                <a:spcPts val="1100"/>
-              </a:spcAft>
-              <a:defRPr sz="1250">
+                <a:spcPts val="1000"/>
+              </a:spcAft>
+              <a:defRPr sz="1200">
                 <a:solidFill>
                   <a:srgbClr val="0F172A"/>
                 </a:solidFill>
@@ -7974,7 +7974,7 @@
         <p:spPr>
           <a:xfrm>
             <a:off x="3392424" y="1234440"/>
-            <a:ext cx="2578608" cy="621792"/>
+            <a:ext cx="2578608" cy="594360"/>
           </a:xfrm>
           <a:prstGeom prst="roundRect">
             <a:avLst/>
@@ -8016,8 +8016,8 @@
         </p:nvSpPr>
         <p:spPr>
           <a:xfrm>
-            <a:off x="3575304" y="1289304"/>
-            <a:ext cx="2212848" cy="548640"/>
+            <a:off x="3557016" y="1280160"/>
+            <a:ext cx="2249424" cy="521208"/>
           </a:xfrm>
           <a:prstGeom prst="rect">
             <a:avLst/>
@@ -8031,7 +8031,7 @@
           <a:lstStyle/>
           <a:p>
             <a:pPr>
-              <a:defRPr sz="1550" b="1">
+              <a:defRPr sz="1450" b="1">
                 <a:solidFill>
                   <a:srgbClr val="FFFFFF"/>
                 </a:solidFill>
@@ -8043,7 +8043,7 @@
           </a:p>
           <a:p>
             <a:pPr>
-              <a:defRPr sz="1000" b="1">
+              <a:defRPr sz="950" b="1">
                 <a:solidFill>
                   <a:srgbClr val="E0F2FE"/>
                 </a:solidFill>
@@ -8063,8 +8063,8 @@
         </p:nvSpPr>
         <p:spPr>
           <a:xfrm>
-            <a:off x="3575304" y="1965960"/>
-            <a:ext cx="2212848" cy="4315968"/>
+            <a:off x="3557016" y="1901952"/>
+            <a:ext cx="2249424" cy="4398264"/>
           </a:xfrm>
           <a:prstGeom prst="rect">
             <a:avLst/>
@@ -8079,9 +8079,9 @@
           <a:p>
             <a:pPr>
               <a:spcAft>
-                <a:spcPts val="1100"/>
-              </a:spcAft>
-              <a:defRPr sz="1250">
+                <a:spcPts val="1000"/>
+              </a:spcAft>
+              <a:defRPr sz="1200">
                 <a:solidFill>
                   <a:srgbClr val="0F172A"/>
                 </a:solidFill>
@@ -8094,9 +8094,9 @@
           <a:p>
             <a:pPr>
               <a:spcAft>
-                <a:spcPts val="1100"/>
-              </a:spcAft>
-              <a:defRPr sz="1250">
+                <a:spcPts val="1000"/>
+              </a:spcAft>
+              <a:defRPr sz="1200">
                 <a:solidFill>
                   <a:srgbClr val="0F172A"/>
                 </a:solidFill>
@@ -8109,9 +8109,9 @@
           <a:p>
             <a:pPr>
               <a:spcAft>
-                <a:spcPts val="1100"/>
-              </a:spcAft>
-              <a:defRPr sz="1250">
+                <a:spcPts val="1000"/>
+              </a:spcAft>
+              <a:defRPr sz="1200">
                 <a:solidFill>
                   <a:srgbClr val="0F172A"/>
                 </a:solidFill>
@@ -8124,9 +8124,9 @@
           <a:p>
             <a:pPr>
               <a:spcAft>
-                <a:spcPts val="1100"/>
-              </a:spcAft>
-              <a:defRPr sz="1250">
+                <a:spcPts val="1000"/>
+              </a:spcAft>
+              <a:defRPr sz="1200">
                 <a:solidFill>
                   <a:srgbClr val="0F172A"/>
                 </a:solidFill>
@@ -8139,9 +8139,9 @@
           <a:p>
             <a:pPr>
               <a:spcAft>
-                <a:spcPts val="1100"/>
-              </a:spcAft>
-              <a:defRPr sz="1250">
+                <a:spcPts val="1000"/>
+              </a:spcAft>
+              <a:defRPr sz="1200">
                 <a:solidFill>
                   <a:srgbClr val="0F172A"/>
                 </a:solidFill>
@@ -8154,9 +8154,9 @@
           <a:p>
             <a:pPr>
               <a:spcAft>
-                <a:spcPts val="1100"/>
-              </a:spcAft>
-              <a:defRPr sz="1250">
+                <a:spcPts val="1000"/>
+              </a:spcAft>
+              <a:defRPr sz="1200">
                 <a:solidFill>
                   <a:srgbClr val="0F172A"/>
                 </a:solidFill>
@@ -8169,9 +8169,9 @@
           <a:p>
             <a:pPr>
               <a:spcAft>
-                <a:spcPts val="1100"/>
-              </a:spcAft>
-              <a:defRPr sz="1250">
+                <a:spcPts val="1000"/>
+              </a:spcAft>
+              <a:defRPr sz="1200">
                 <a:solidFill>
                   <a:srgbClr val="0F172A"/>
                 </a:solidFill>
@@ -8237,7 +8237,7 @@
         <p:spPr>
           <a:xfrm>
             <a:off x="6190488" y="1234440"/>
-            <a:ext cx="2578608" cy="621792"/>
+            <a:ext cx="2578608" cy="594360"/>
           </a:xfrm>
           <a:prstGeom prst="roundRect">
             <a:avLst/>
@@ -8279,8 +8279,8 @@
         </p:nvSpPr>
         <p:spPr>
           <a:xfrm>
-            <a:off x="6373368" y="1289304"/>
-            <a:ext cx="2212848" cy="548640"/>
+            <a:off x="6355080" y="1280160"/>
+            <a:ext cx="2249424" cy="521208"/>
           </a:xfrm>
           <a:prstGeom prst="rect">
             <a:avLst/>
@@ -8294,7 +8294,7 @@
           <a:lstStyle/>
           <a:p>
             <a:pPr>
-              <a:defRPr sz="1550" b="1">
+              <a:defRPr sz="1450" b="1">
                 <a:solidFill>
                   <a:srgbClr val="FFFFFF"/>
                 </a:solidFill>
@@ -8306,7 +8306,7 @@
           </a:p>
           <a:p>
             <a:pPr>
-              <a:defRPr sz="1000" b="1">
+              <a:defRPr sz="950" b="1">
                 <a:solidFill>
                   <a:srgbClr val="E0F2FE"/>
                 </a:solidFill>
@@ -8326,8 +8326,8 @@
         </p:nvSpPr>
         <p:spPr>
           <a:xfrm>
-            <a:off x="6373368" y="1965960"/>
-            <a:ext cx="2212848" cy="4315968"/>
+            <a:off x="6355080" y="1901952"/>
+            <a:ext cx="2249424" cy="4398264"/>
           </a:xfrm>
           <a:prstGeom prst="rect">
             <a:avLst/>
@@ -8342,9 +8342,9 @@
           <a:p>
             <a:pPr>
               <a:spcAft>
-                <a:spcPts val="1100"/>
-              </a:spcAft>
-              <a:defRPr sz="1250">
+                <a:spcPts val="1000"/>
+              </a:spcAft>
+              <a:defRPr sz="1200">
                 <a:solidFill>
                   <a:srgbClr val="0F172A"/>
                 </a:solidFill>
@@ -8357,9 +8357,9 @@
           <a:p>
             <a:pPr>
               <a:spcAft>
-                <a:spcPts val="1100"/>
-              </a:spcAft>
-              <a:defRPr sz="1250">
+                <a:spcPts val="1000"/>
+              </a:spcAft>
+              <a:defRPr sz="1200">
                 <a:solidFill>
                   <a:srgbClr val="0F172A"/>
                 </a:solidFill>
@@ -8372,9 +8372,9 @@
           <a:p>
             <a:pPr>
               <a:spcAft>
-                <a:spcPts val="1100"/>
-              </a:spcAft>
-              <a:defRPr sz="1250">
+                <a:spcPts val="1000"/>
+              </a:spcAft>
+              <a:defRPr sz="1200">
                 <a:solidFill>
                   <a:srgbClr val="0F172A"/>
                 </a:solidFill>
@@ -8387,9 +8387,9 @@
           <a:p>
             <a:pPr>
               <a:spcAft>
-                <a:spcPts val="1100"/>
-              </a:spcAft>
-              <a:defRPr sz="1250">
+                <a:spcPts val="1000"/>
+              </a:spcAft>
+              <a:defRPr sz="1200">
                 <a:solidFill>
                   <a:srgbClr val="0F172A"/>
                 </a:solidFill>
@@ -8402,9 +8402,9 @@
           <a:p>
             <a:pPr>
               <a:spcAft>
-                <a:spcPts val="1100"/>
-              </a:spcAft>
-              <a:defRPr sz="1250">
+                <a:spcPts val="1000"/>
+              </a:spcAft>
+              <a:defRPr sz="1200">
                 <a:solidFill>
                   <a:srgbClr val="0F172A"/>
                 </a:solidFill>
@@ -8417,9 +8417,9 @@
           <a:p>
             <a:pPr>
               <a:spcAft>
-                <a:spcPts val="1100"/>
-              </a:spcAft>
-              <a:defRPr sz="1250">
+                <a:spcPts val="1000"/>
+              </a:spcAft>
+              <a:defRPr sz="1200">
                 <a:solidFill>
                   <a:srgbClr val="0F172A"/>
                 </a:solidFill>
@@ -8432,9 +8432,9 @@
           <a:p>
             <a:pPr>
               <a:spcAft>
-                <a:spcPts val="1100"/>
-              </a:spcAft>
-              <a:defRPr sz="1250">
+                <a:spcPts val="1000"/>
+              </a:spcAft>
+              <a:defRPr sz="1200">
                 <a:solidFill>
                   <a:srgbClr val="0F172A"/>
                 </a:solidFill>
@@ -8500,7 +8500,7 @@
         <p:spPr>
           <a:xfrm>
             <a:off x="8988552" y="1234440"/>
-            <a:ext cx="2578608" cy="621792"/>
+            <a:ext cx="2578608" cy="594360"/>
           </a:xfrm>
           <a:prstGeom prst="roundRect">
             <a:avLst/>
@@ -8542,8 +8542,8 @@
         </p:nvSpPr>
         <p:spPr>
           <a:xfrm>
-            <a:off x="9171432" y="1289304"/>
-            <a:ext cx="2212848" cy="548640"/>
+            <a:off x="9153144" y="1280160"/>
+            <a:ext cx="2249424" cy="521208"/>
           </a:xfrm>
           <a:prstGeom prst="rect">
             <a:avLst/>
@@ -8557,7 +8557,7 @@
           <a:lstStyle/>
           <a:p>
             <a:pPr>
-              <a:defRPr sz="1550" b="1">
+              <a:defRPr sz="1450" b="1">
                 <a:solidFill>
                   <a:srgbClr val="FFFFFF"/>
                 </a:solidFill>
@@ -8569,7 +8569,7 @@
           </a:p>
           <a:p>
             <a:pPr>
-              <a:defRPr sz="1000" b="1">
+              <a:defRPr sz="950" b="1">
                 <a:solidFill>
                   <a:srgbClr val="E0F2FE"/>
                 </a:solidFill>
@@ -8589,8 +8589,8 @@
         </p:nvSpPr>
         <p:spPr>
           <a:xfrm>
-            <a:off x="9171432" y="1965960"/>
-            <a:ext cx="2212848" cy="4315968"/>
+            <a:off x="9153144" y="1901952"/>
+            <a:ext cx="2249424" cy="4398264"/>
           </a:xfrm>
           <a:prstGeom prst="rect">
             <a:avLst/>
@@ -8605,9 +8605,9 @@
           <a:p>
             <a:pPr>
               <a:spcAft>
-                <a:spcPts val="1100"/>
-              </a:spcAft>
-              <a:defRPr sz="1250">
+                <a:spcPts val="1000"/>
+              </a:spcAft>
+              <a:defRPr sz="1200">
                 <a:solidFill>
                   <a:srgbClr val="0F172A"/>
                 </a:solidFill>
@@ -8620,9 +8620,9 @@
           <a:p>
             <a:pPr>
               <a:spcAft>
-                <a:spcPts val="1100"/>
-              </a:spcAft>
-              <a:defRPr sz="1250">
+                <a:spcPts val="1000"/>
+              </a:spcAft>
+              <a:defRPr sz="1200">
                 <a:solidFill>
                   <a:srgbClr val="0F172A"/>
                 </a:solidFill>
@@ -8635,9 +8635,9 @@
           <a:p>
             <a:pPr>
               <a:spcAft>
-                <a:spcPts val="1100"/>
-              </a:spcAft>
-              <a:defRPr sz="1250">
+                <a:spcPts val="1000"/>
+              </a:spcAft>
+              <a:defRPr sz="1200">
                 <a:solidFill>
                   <a:srgbClr val="0F172A"/>
                 </a:solidFill>
@@ -8650,9 +8650,9 @@
           <a:p>
             <a:pPr>
               <a:spcAft>
-                <a:spcPts val="1100"/>
-              </a:spcAft>
-              <a:defRPr sz="1250">
+                <a:spcPts val="1000"/>
+              </a:spcAft>
+              <a:defRPr sz="1200">
                 <a:solidFill>
                   <a:srgbClr val="0F172A"/>
                 </a:solidFill>
@@ -8665,9 +8665,9 @@
           <a:p>
             <a:pPr>
               <a:spcAft>
-                <a:spcPts val="1100"/>
-              </a:spcAft>
-              <a:defRPr sz="1250">
+                <a:spcPts val="1000"/>
+              </a:spcAft>
+              <a:defRPr sz="1200">
                 <a:solidFill>
                   <a:srgbClr val="0F172A"/>
                 </a:solidFill>
@@ -8680,9 +8680,9 @@
           <a:p>
             <a:pPr>
               <a:spcAft>
-                <a:spcPts val="1100"/>
-              </a:spcAft>
-              <a:defRPr sz="1250">
+                <a:spcPts val="1000"/>
+              </a:spcAft>
+              <a:defRPr sz="1200">
                 <a:solidFill>
                   <a:srgbClr val="0F172A"/>
                 </a:solidFill>
@@ -8695,9 +8695,9 @@
           <a:p>
             <a:pPr>
               <a:spcAft>
-                <a:spcPts val="1100"/>
-              </a:spcAft>
-              <a:defRPr sz="1250">
+                <a:spcPts val="1000"/>
+              </a:spcAft>
+              <a:defRPr sz="1200">
                 <a:solidFill>
                   <a:srgbClr val="0F172A"/>
                 </a:solidFill>
@@ -8864,8 +8864,8 @@
         </p:nvSpPr>
         <p:spPr>
           <a:xfrm>
-            <a:off x="7498079" y="164592"/>
-            <a:ext cx="4114800" cy="777240"/>
+            <a:off x="7132320" y="164592"/>
+            <a:ext cx="4480560" cy="777240"/>
           </a:xfrm>
           <a:prstGeom prst="rect">
             <a:avLst/>
@@ -8879,18 +8879,18 @@
           <a:lstStyle/>
           <a:p>
             <a:pPr algn="r">
-              <a:defRPr sz="1100" b="1">
+              <a:defRPr sz="1050" b="1">
                 <a:solidFill>
                   <a:srgbClr val="F97316"/>
                 </a:solidFill>
               </a:defRPr>
             </a:pPr>
             <a:r>
-              <a:t>SMART INDIA HACKATHON 2024</a:t>
+              <a:t>GUJARAT TECHNOLOGICAL UNIVERSITY</a:t>
             </a:r>
             <a:br/>
             <a:r>
-              <a:t>THEME: SMART EDUCATION / AUTOMATION</a:t>
+              <a:t>CAMPUS AUTOMATION &amp; STUDENT WELFARE</a:t>
             </a:r>
           </a:p>
         </p:txBody>
@@ -8904,7 +8904,7 @@
         <p:spPr>
           <a:xfrm>
             <a:off x="594360" y="201168"/>
-            <a:ext cx="6858000" cy="685800"/>
+            <a:ext cx="6583680" cy="685800"/>
           </a:xfrm>
           <a:prstGeom prst="rect">
             <a:avLst/>
@@ -8984,7 +8984,7 @@
         <p:spPr>
           <a:xfrm>
             <a:off x="594360" y="6510528"/>
-            <a:ext cx="7772400" cy="320040"/>
+            <a:ext cx="8046720" cy="320040"/>
           </a:xfrm>
           <a:prstGeom prst="rect">
             <a:avLst/>
@@ -9005,7 +9005,7 @@
               </a:defRPr>
             </a:pPr>
             <a:r>
-              <a:t>SIH 2024  |  Problem: GTU Notice Broadcast Automation  |  Team: GTU Innovators</a:t>
+              <a:t>GTU Circular &amp; Notification Alert System  |  Department of Computer / IT Engineering</a:t>
             </a:r>
           </a:p>
         </p:txBody>
@@ -9099,7 +9099,7 @@
         <p:spPr>
           <a:xfrm>
             <a:off x="594360" y="1234440"/>
-            <a:ext cx="5376672" cy="621792"/>
+            <a:ext cx="5376672" cy="594360"/>
           </a:xfrm>
           <a:prstGeom prst="roundRect">
             <a:avLst/>
@@ -9141,8 +9141,8 @@
         </p:nvSpPr>
         <p:spPr>
           <a:xfrm>
-            <a:off x="777240" y="1289304"/>
-            <a:ext cx="5010912" cy="548640"/>
+            <a:off x="758952" y="1280160"/>
+            <a:ext cx="5047488" cy="521208"/>
           </a:xfrm>
           <a:prstGeom prst="rect">
             <a:avLst/>
@@ -9156,7 +9156,7 @@
           <a:lstStyle/>
           <a:p>
             <a:pPr>
-              <a:defRPr sz="1550" b="1">
+              <a:defRPr sz="1450" b="1">
                 <a:solidFill>
                   <a:srgbClr val="FFFFFF"/>
                 </a:solidFill>
@@ -9168,7 +9168,7 @@
           </a:p>
           <a:p>
             <a:pPr>
-              <a:defRPr sz="1000" b="1">
+              <a:defRPr sz="950" b="1">
                 <a:solidFill>
                   <a:srgbClr val="E0F2FE"/>
                 </a:solidFill>
@@ -9188,8 +9188,8 @@
         </p:nvSpPr>
         <p:spPr>
           <a:xfrm>
-            <a:off x="777240" y="1965960"/>
-            <a:ext cx="5010912" cy="4315968"/>
+            <a:off x="758952" y="1901952"/>
+            <a:ext cx="5047488" cy="4398264"/>
           </a:xfrm>
           <a:prstGeom prst="rect">
             <a:avLst/>
@@ -9204,9 +9204,9 @@
           <a:p>
             <a:pPr>
               <a:spcAft>
-                <a:spcPts val="900"/>
-              </a:spcAft>
-              <a:defRPr sz="1300">
+                <a:spcPts val="800"/>
+              </a:spcAft>
+              <a:defRPr sz="1250">
                 <a:solidFill>
                   <a:srgbClr val="0F172A"/>
                 </a:solidFill>
@@ -9219,9 +9219,9 @@
           <a:p>
             <a:pPr>
               <a:spcAft>
-                <a:spcPts val="900"/>
-              </a:spcAft>
-              <a:defRPr sz="1300">
+                <a:spcPts val="800"/>
+              </a:spcAft>
+              <a:defRPr sz="1250">
                 <a:solidFill>
                   <a:srgbClr val="0F172A"/>
                 </a:solidFill>
@@ -9234,9 +9234,9 @@
           <a:p>
             <a:pPr>
               <a:spcAft>
-                <a:spcPts val="900"/>
-              </a:spcAft>
-              <a:defRPr sz="1300">
+                <a:spcPts val="800"/>
+              </a:spcAft>
+              <a:defRPr sz="1250">
                 <a:solidFill>
                   <a:srgbClr val="0F172A"/>
                 </a:solidFill>
@@ -9249,9 +9249,9 @@
           <a:p>
             <a:pPr>
               <a:spcAft>
-                <a:spcPts val="900"/>
-              </a:spcAft>
-              <a:defRPr sz="1300">
+                <a:spcPts val="800"/>
+              </a:spcAft>
+              <a:defRPr sz="1250">
                 <a:solidFill>
                   <a:srgbClr val="0F172A"/>
                 </a:solidFill>
@@ -9264,9 +9264,9 @@
           <a:p>
             <a:pPr>
               <a:spcAft>
-                <a:spcPts val="900"/>
-              </a:spcAft>
-              <a:defRPr sz="1300">
+                <a:spcPts val="800"/>
+              </a:spcAft>
+              <a:defRPr sz="1250">
                 <a:solidFill>
                   <a:srgbClr val="0F172A"/>
                 </a:solidFill>
@@ -9279,9 +9279,9 @@
           <a:p>
             <a:pPr>
               <a:spcAft>
-                <a:spcPts val="900"/>
-              </a:spcAft>
-              <a:defRPr sz="1300">
+                <a:spcPts val="800"/>
+              </a:spcAft>
+              <a:defRPr sz="1250">
                 <a:solidFill>
                   <a:srgbClr val="0F172A"/>
                 </a:solidFill>
@@ -9294,9 +9294,9 @@
           <a:p>
             <a:pPr>
               <a:spcAft>
-                <a:spcPts val="900"/>
-              </a:spcAft>
-              <a:defRPr sz="1300">
+                <a:spcPts val="800"/>
+              </a:spcAft>
+              <a:defRPr sz="1250">
                 <a:solidFill>
                   <a:srgbClr val="0F172A"/>
                 </a:solidFill>
@@ -9309,9 +9309,9 @@
           <a:p>
             <a:pPr>
               <a:spcAft>
-                <a:spcPts val="900"/>
-              </a:spcAft>
-              <a:defRPr sz="1300">
+                <a:spcPts val="800"/>
+              </a:spcAft>
+              <a:defRPr sz="1250">
                 <a:solidFill>
                   <a:srgbClr val="0F172A"/>
                 </a:solidFill>
@@ -9324,9 +9324,9 @@
           <a:p>
             <a:pPr>
               <a:spcAft>
-                <a:spcPts val="900"/>
-              </a:spcAft>
-              <a:defRPr sz="1300">
+                <a:spcPts val="800"/>
+              </a:spcAft>
+              <a:defRPr sz="1250">
                 <a:solidFill>
                   <a:srgbClr val="0F172A"/>
                 </a:solidFill>
@@ -9339,9 +9339,9 @@
           <a:p>
             <a:pPr>
               <a:spcAft>
-                <a:spcPts val="900"/>
-              </a:spcAft>
-              <a:defRPr sz="1300">
+                <a:spcPts val="800"/>
+              </a:spcAft>
+              <a:defRPr sz="1250">
                 <a:solidFill>
                   <a:srgbClr val="0F172A"/>
                 </a:solidFill>
@@ -9407,7 +9407,7 @@
         <p:spPr>
           <a:xfrm>
             <a:off x="6190488" y="1234440"/>
-            <a:ext cx="5376672" cy="621792"/>
+            <a:ext cx="5376672" cy="594360"/>
           </a:xfrm>
           <a:prstGeom prst="roundRect">
             <a:avLst/>
@@ -9449,8 +9449,8 @@
         </p:nvSpPr>
         <p:spPr>
           <a:xfrm>
-            <a:off x="6373368" y="1289304"/>
-            <a:ext cx="5010912" cy="548640"/>
+            <a:off x="6355080" y="1280160"/>
+            <a:ext cx="5047488" cy="521208"/>
           </a:xfrm>
           <a:prstGeom prst="rect">
             <a:avLst/>
@@ -9464,7 +9464,7 @@
           <a:lstStyle/>
           <a:p>
             <a:pPr>
-              <a:defRPr sz="1550" b="1">
+              <a:defRPr sz="1450" b="1">
                 <a:solidFill>
                   <a:srgbClr val="FFFFFF"/>
                 </a:solidFill>
@@ -9476,7 +9476,7 @@
           </a:p>
           <a:p>
             <a:pPr>
-              <a:defRPr sz="1000" b="1">
+              <a:defRPr sz="950" b="1">
                 <a:solidFill>
                   <a:srgbClr val="E0F2FE"/>
                 </a:solidFill>
@@ -9496,8 +9496,8 @@
         </p:nvSpPr>
         <p:spPr>
           <a:xfrm>
-            <a:off x="6373368" y="1965960"/>
-            <a:ext cx="5010912" cy="4315968"/>
+            <a:off x="6355080" y="1901952"/>
+            <a:ext cx="5047488" cy="4398264"/>
           </a:xfrm>
           <a:prstGeom prst="rect">
             <a:avLst/>
@@ -9512,9 +9512,9 @@
           <a:p>
             <a:pPr>
               <a:spcAft>
-                <a:spcPts val="900"/>
-              </a:spcAft>
-              <a:defRPr sz="1300">
+                <a:spcPts val="800"/>
+              </a:spcAft>
+              <a:defRPr sz="1250">
                 <a:solidFill>
                   <a:srgbClr val="0F172A"/>
                 </a:solidFill>
@@ -9527,9 +9527,9 @@
           <a:p>
             <a:pPr>
               <a:spcAft>
-                <a:spcPts val="900"/>
-              </a:spcAft>
-              <a:defRPr sz="1300">
+                <a:spcPts val="800"/>
+              </a:spcAft>
+              <a:defRPr sz="1250">
                 <a:solidFill>
                   <a:srgbClr val="0F172A"/>
                 </a:solidFill>
@@ -9542,9 +9542,9 @@
           <a:p>
             <a:pPr>
               <a:spcAft>
-                <a:spcPts val="900"/>
-              </a:spcAft>
-              <a:defRPr sz="1300">
+                <a:spcPts val="800"/>
+              </a:spcAft>
+              <a:defRPr sz="1250">
                 <a:solidFill>
                   <a:srgbClr val="0F172A"/>
                 </a:solidFill>
@@ -9557,24 +9557,24 @@
           <a:p>
             <a:pPr>
               <a:spcAft>
-                <a:spcPts val="900"/>
-              </a:spcAft>
-              <a:defRPr sz="1300">
-                <a:solidFill>
-                  <a:srgbClr val="0F172A"/>
-                </a:solidFill>
-              </a:defRPr>
-            </a:pPr>
-            <a:r>
-              <a:t>•  Unique Feature 1: Spoken Daily Voice Bulletin (No other university app offers audio news).</a:t>
-            </a:r>
-          </a:p>
-          <a:p>
-            <a:pPr>
-              <a:spcAft>
-                <a:spcPts val="900"/>
-              </a:spcAft>
-              <a:defRPr sz="1300">
+                <a:spcPts val="800"/>
+              </a:spcAft>
+              <a:defRPr sz="1250">
+                <a:solidFill>
+                  <a:srgbClr val="0F172A"/>
+                </a:solidFill>
+              </a:defRPr>
+            </a:pPr>
+            <a:r>
+              <a:t>•  Unique Feature 1: Spoken Daily Voice Bulletin (audio news for accessibility).</a:t>
+            </a:r>
+          </a:p>
+          <a:p>
+            <a:pPr>
+              <a:spcAft>
+                <a:spcPts val="800"/>
+              </a:spcAft>
+              <a:defRPr sz="1250">
                 <a:solidFill>
                   <a:srgbClr val="0F172A"/>
                 </a:solidFill>
@@ -9587,9 +9587,9 @@
           <a:p>
             <a:pPr>
               <a:spcAft>
-                <a:spcPts val="900"/>
-              </a:spcAft>
-              <a:defRPr sz="1300">
+                <a:spcPts val="800"/>
+              </a:spcAft>
+              <a:defRPr sz="1250">
                 <a:solidFill>
                   <a:srgbClr val="0F172A"/>
                 </a:solidFill>
@@ -9602,9 +9602,9 @@
           <a:p>
             <a:pPr>
               <a:spcAft>
-                <a:spcPts val="900"/>
-              </a:spcAft>
-              <a:defRPr sz="1300">
+                <a:spcPts val="800"/>
+              </a:spcAft>
+              <a:defRPr sz="1250">
                 <a:solidFill>
                   <a:srgbClr val="0F172A"/>
                 </a:solidFill>
@@ -9617,9 +9617,9 @@
           <a:p>
             <a:pPr>
               <a:spcAft>
-                <a:spcPts val="900"/>
-              </a:spcAft>
-              <a:defRPr sz="1300">
+                <a:spcPts val="800"/>
+              </a:spcAft>
+              <a:defRPr sz="1250">
                 <a:solidFill>
                   <a:srgbClr val="0F172A"/>
                 </a:solidFill>
@@ -9786,8 +9786,8 @@
         </p:nvSpPr>
         <p:spPr>
           <a:xfrm>
-            <a:off x="7498079" y="164592"/>
-            <a:ext cx="4114800" cy="777240"/>
+            <a:off x="7132320" y="164592"/>
+            <a:ext cx="4480560" cy="777240"/>
           </a:xfrm>
           <a:prstGeom prst="rect">
             <a:avLst/>
@@ -9801,18 +9801,18 @@
           <a:lstStyle/>
           <a:p>
             <a:pPr algn="r">
-              <a:defRPr sz="1100" b="1">
+              <a:defRPr sz="1050" b="1">
                 <a:solidFill>
                   <a:srgbClr val="F97316"/>
                 </a:solidFill>
               </a:defRPr>
             </a:pPr>
             <a:r>
-              <a:t>SMART INDIA HACKATHON 2024</a:t>
+              <a:t>GUJARAT TECHNOLOGICAL UNIVERSITY</a:t>
             </a:r>
             <a:br/>
             <a:r>
-              <a:t>THEME: SMART EDUCATION / AUTOMATION</a:t>
+              <a:t>CAMPUS AUTOMATION &amp; STUDENT WELFARE</a:t>
             </a:r>
           </a:p>
         </p:txBody>
@@ -9826,7 +9826,7 @@
         <p:spPr>
           <a:xfrm>
             <a:off x="594360" y="201168"/>
-            <a:ext cx="6858000" cy="685800"/>
+            <a:ext cx="6583680" cy="685800"/>
           </a:xfrm>
           <a:prstGeom prst="rect">
             <a:avLst/>
@@ -9906,7 +9906,7 @@
         <p:spPr>
           <a:xfrm>
             <a:off x="594360" y="6510528"/>
-            <a:ext cx="7772400" cy="320040"/>
+            <a:ext cx="8046720" cy="320040"/>
           </a:xfrm>
           <a:prstGeom prst="rect">
             <a:avLst/>
@@ -9927,7 +9927,7 @@
               </a:defRPr>
             </a:pPr>
             <a:r>
-              <a:t>SIH 2024  |  Problem: GTU Notice Broadcast Automation  |  Team: GTU Innovators</a:t>
+              <a:t>GTU Circular &amp; Notification Alert System  |  Department of Computer / IT Engineering</a:t>
             </a:r>
           </a:p>
         </p:txBody>
@@ -10021,7 +10021,7 @@
         <p:spPr>
           <a:xfrm>
             <a:off x="594360" y="1234440"/>
-            <a:ext cx="5376672" cy="621792"/>
+            <a:ext cx="5376672" cy="594360"/>
           </a:xfrm>
           <a:prstGeom prst="roundRect">
             <a:avLst/>
@@ -10063,8 +10063,8 @@
         </p:nvSpPr>
         <p:spPr>
           <a:xfrm>
-            <a:off x="777240" y="1289304"/>
-            <a:ext cx="5010912" cy="548640"/>
+            <a:off x="758952" y="1280160"/>
+            <a:ext cx="5047488" cy="521208"/>
           </a:xfrm>
           <a:prstGeom prst="rect">
             <a:avLst/>
@@ -10078,7 +10078,7 @@
           <a:lstStyle/>
           <a:p>
             <a:pPr>
-              <a:defRPr sz="1550" b="1">
+              <a:defRPr sz="1450" b="1">
                 <a:solidFill>
                   <a:srgbClr val="FFFFFF"/>
                 </a:solidFill>
@@ -10090,7 +10090,7 @@
           </a:p>
           <a:p>
             <a:pPr>
-              <a:defRPr sz="1000" b="1">
+              <a:defRPr sz="950" b="1">
                 <a:solidFill>
                   <a:srgbClr val="E0F2FE"/>
                 </a:solidFill>
@@ -10110,8 +10110,8 @@
         </p:nvSpPr>
         <p:spPr>
           <a:xfrm>
-            <a:off x="777240" y="1965960"/>
-            <a:ext cx="5010912" cy="4315968"/>
+            <a:off x="758952" y="1901952"/>
+            <a:ext cx="5047488" cy="4398264"/>
           </a:xfrm>
           <a:prstGeom prst="rect">
             <a:avLst/>
@@ -10126,9 +10126,9 @@
           <a:p>
             <a:pPr>
               <a:spcAft>
-                <a:spcPts val="1000"/>
-              </a:spcAft>
-              <a:defRPr sz="1300">
+                <a:spcPts val="900"/>
+              </a:spcAft>
+              <a:defRPr sz="1250">
                 <a:solidFill>
                   <a:srgbClr val="0F172A"/>
                 </a:solidFill>
@@ -10141,9 +10141,9 @@
           <a:p>
             <a:pPr>
               <a:spcAft>
-                <a:spcPts val="1000"/>
-              </a:spcAft>
-              <a:defRPr sz="1300">
+                <a:spcPts val="900"/>
+              </a:spcAft>
+              <a:defRPr sz="1250">
                 <a:solidFill>
                   <a:srgbClr val="0F172A"/>
                 </a:solidFill>
@@ -10156,9 +10156,9 @@
           <a:p>
             <a:pPr>
               <a:spcAft>
-                <a:spcPts val="1000"/>
-              </a:spcAft>
-              <a:defRPr sz="1300">
+                <a:spcPts val="900"/>
+              </a:spcAft>
+              <a:defRPr sz="1250">
                 <a:solidFill>
                   <a:srgbClr val="0F172A"/>
                 </a:solidFill>
@@ -10171,9 +10171,9 @@
           <a:p>
             <a:pPr>
               <a:spcAft>
-                <a:spcPts val="1000"/>
-              </a:spcAft>
-              <a:defRPr sz="1300">
+                <a:spcPts val="900"/>
+              </a:spcAft>
+              <a:defRPr sz="1250">
                 <a:solidFill>
                   <a:srgbClr val="0F172A"/>
                 </a:solidFill>
@@ -10186,9 +10186,9 @@
           <a:p>
             <a:pPr>
               <a:spcAft>
-                <a:spcPts val="1000"/>
-              </a:spcAft>
-              <a:defRPr sz="1300">
+                <a:spcPts val="900"/>
+              </a:spcAft>
+              <a:defRPr sz="1250">
                 <a:solidFill>
                   <a:srgbClr val="0F172A"/>
                 </a:solidFill>
@@ -10201,9 +10201,9 @@
           <a:p>
             <a:pPr>
               <a:spcAft>
-                <a:spcPts val="1000"/>
-              </a:spcAft>
-              <a:defRPr sz="1300">
+                <a:spcPts val="900"/>
+              </a:spcAft>
+              <a:defRPr sz="1250">
                 <a:solidFill>
                   <a:srgbClr val="0F172A"/>
                 </a:solidFill>
@@ -10216,9 +10216,9 @@
           <a:p>
             <a:pPr>
               <a:spcAft>
-                <a:spcPts val="1000"/>
-              </a:spcAft>
-              <a:defRPr sz="1300">
+                <a:spcPts val="900"/>
+              </a:spcAft>
+              <a:defRPr sz="1250">
                 <a:solidFill>
                   <a:srgbClr val="0F172A"/>
                 </a:solidFill>
@@ -10231,9 +10231,9 @@
           <a:p>
             <a:pPr>
               <a:spcAft>
-                <a:spcPts val="1000"/>
-              </a:spcAft>
-              <a:defRPr sz="1300">
+                <a:spcPts val="900"/>
+              </a:spcAft>
+              <a:defRPr sz="1250">
                 <a:solidFill>
                   <a:srgbClr val="0F172A"/>
                 </a:solidFill>
@@ -10299,7 +10299,7 @@
         <p:spPr>
           <a:xfrm>
             <a:off x="6190488" y="1234440"/>
-            <a:ext cx="5376672" cy="621792"/>
+            <a:ext cx="5376672" cy="594360"/>
           </a:xfrm>
           <a:prstGeom prst="roundRect">
             <a:avLst/>
@@ -10341,8 +10341,8 @@
         </p:nvSpPr>
         <p:spPr>
           <a:xfrm>
-            <a:off x="6373368" y="1289304"/>
-            <a:ext cx="5010912" cy="548640"/>
+            <a:off x="6355080" y="1280160"/>
+            <a:ext cx="5047488" cy="521208"/>
           </a:xfrm>
           <a:prstGeom prst="rect">
             <a:avLst/>
@@ -10356,7 +10356,7 @@
           <a:lstStyle/>
           <a:p>
             <a:pPr>
-              <a:defRPr sz="1550" b="1">
+              <a:defRPr sz="1450" b="1">
                 <a:solidFill>
                   <a:srgbClr val="FFFFFF"/>
                 </a:solidFill>
@@ -10368,7 +10368,7 @@
           </a:p>
           <a:p>
             <a:pPr>
-              <a:defRPr sz="1000" b="1">
+              <a:defRPr sz="950" b="1">
                 <a:solidFill>
                   <a:srgbClr val="E0F2FE"/>
                 </a:solidFill>
@@ -10388,8 +10388,8 @@
         </p:nvSpPr>
         <p:spPr>
           <a:xfrm>
-            <a:off x="6373368" y="1965960"/>
-            <a:ext cx="5010912" cy="4315968"/>
+            <a:off x="6355080" y="1901952"/>
+            <a:ext cx="5047488" cy="4398264"/>
           </a:xfrm>
           <a:prstGeom prst="rect">
             <a:avLst/>
@@ -10404,9 +10404,9 @@
           <a:p>
             <a:pPr>
               <a:spcAft>
-                <a:spcPts val="1000"/>
-              </a:spcAft>
-              <a:defRPr sz="1300">
+                <a:spcPts val="900"/>
+              </a:spcAft>
+              <a:defRPr sz="1250">
                 <a:solidFill>
                   <a:srgbClr val="0F172A"/>
                 </a:solidFill>
@@ -10419,9 +10419,9 @@
           <a:p>
             <a:pPr>
               <a:spcAft>
-                <a:spcPts val="1000"/>
-              </a:spcAft>
-              <a:defRPr sz="1300">
+                <a:spcPts val="900"/>
+              </a:spcAft>
+              <a:defRPr sz="1250">
                 <a:solidFill>
                   <a:srgbClr val="0F172A"/>
                 </a:solidFill>
@@ -10434,9 +10434,9 @@
           <a:p>
             <a:pPr>
               <a:spcAft>
-                <a:spcPts val="1000"/>
-              </a:spcAft>
-              <a:defRPr sz="1300">
+                <a:spcPts val="900"/>
+              </a:spcAft>
+              <a:defRPr sz="1250">
                 <a:solidFill>
                   <a:srgbClr val="0F172A"/>
                 </a:solidFill>
@@ -10449,9 +10449,9 @@
           <a:p>
             <a:pPr>
               <a:spcAft>
-                <a:spcPts val="1000"/>
-              </a:spcAft>
-              <a:defRPr sz="1300">
+                <a:spcPts val="900"/>
+              </a:spcAft>
+              <a:defRPr sz="1250">
                 <a:solidFill>
                   <a:srgbClr val="0F172A"/>
                 </a:solidFill>
@@ -10464,24 +10464,24 @@
           <a:p>
             <a:pPr>
               <a:spcAft>
-                <a:spcPts val="1000"/>
-              </a:spcAft>
-              <a:defRPr sz="1300">
-                <a:solidFill>
-                  <a:srgbClr val="0F172A"/>
-                </a:solidFill>
-              </a:defRPr>
-            </a:pPr>
-            <a:r>
-              <a:t>•  Direct Attribution: Every alert cites the official university portal with original PDF.</a:t>
-            </a:r>
-          </a:p>
-          <a:p>
-            <a:pPr>
-              <a:spcAft>
-                <a:spcPts val="1000"/>
-              </a:spcAft>
-              <a:defRPr sz="1300">
+                <a:spcPts val="900"/>
+              </a:spcAft>
+              <a:defRPr sz="1250">
+                <a:solidFill>
+                  <a:srgbClr val="0F172A"/>
+                </a:solidFill>
+              </a:defRPr>
+            </a:pPr>
+            <a:r>
+              <a:t>•  Direct Attribution: Every alert cites official university portal with original PDF.</a:t>
+            </a:r>
+          </a:p>
+          <a:p>
+            <a:pPr>
+              <a:spcAft>
+                <a:spcPts val="900"/>
+              </a:spcAft>
+              <a:defRPr sz="1250">
                 <a:solidFill>
                   <a:srgbClr val="0F172A"/>
                 </a:solidFill>
@@ -10494,9 +10494,9 @@
           <a:p>
             <a:pPr>
               <a:spcAft>
-                <a:spcPts val="1000"/>
-              </a:spcAft>
-              <a:defRPr sz="1300">
+                <a:spcPts val="900"/>
+              </a:spcAft>
+              <a:defRPr sz="1250">
                 <a:solidFill>
                   <a:srgbClr val="0F172A"/>
                 </a:solidFill>
@@ -10663,8 +10663,8 @@
         </p:nvSpPr>
         <p:spPr>
           <a:xfrm>
-            <a:off x="7498079" y="164592"/>
-            <a:ext cx="4114800" cy="777240"/>
+            <a:off x="7132320" y="164592"/>
+            <a:ext cx="4480560" cy="777240"/>
           </a:xfrm>
           <a:prstGeom prst="rect">
             <a:avLst/>
@@ -10678,18 +10678,18 @@
           <a:lstStyle/>
           <a:p>
             <a:pPr algn="r">
-              <a:defRPr sz="1100" b="1">
+              <a:defRPr sz="1050" b="1">
                 <a:solidFill>
                   <a:srgbClr val="F97316"/>
                 </a:solidFill>
               </a:defRPr>
             </a:pPr>
             <a:r>
-              <a:t>SMART INDIA HACKATHON 2024</a:t>
+              <a:t>GUJARAT TECHNOLOGICAL UNIVERSITY</a:t>
             </a:r>
             <a:br/>
             <a:r>
-              <a:t>THEME: SMART EDUCATION / AUTOMATION</a:t>
+              <a:t>CAMPUS AUTOMATION &amp; STUDENT WELFARE</a:t>
             </a:r>
           </a:p>
         </p:txBody>
@@ -10703,7 +10703,7 @@
         <p:spPr>
           <a:xfrm>
             <a:off x="594360" y="201168"/>
-            <a:ext cx="6858000" cy="685800"/>
+            <a:ext cx="6583680" cy="685800"/>
           </a:xfrm>
           <a:prstGeom prst="rect">
             <a:avLst/>
@@ -10783,7 +10783,7 @@
         <p:spPr>
           <a:xfrm>
             <a:off x="594360" y="6510528"/>
-            <a:ext cx="7772400" cy="320040"/>
+            <a:ext cx="8046720" cy="320040"/>
           </a:xfrm>
           <a:prstGeom prst="rect">
             <a:avLst/>
@@ -10804,7 +10804,7 @@
               </a:defRPr>
             </a:pPr>
             <a:r>
-              <a:t>SIH 2024  |  Problem: GTU Notice Broadcast Automation  |  Team: GTU Innovators</a:t>
+              <a:t>GTU Circular &amp; Notification Alert System  |  Department of Computer / IT Engineering</a:t>
             </a:r>
           </a:p>
         </p:txBody>
@@ -10898,7 +10898,7 @@
         <p:spPr>
           <a:xfrm>
             <a:off x="594360" y="1234440"/>
-            <a:ext cx="3511296" cy="621792"/>
+            <a:ext cx="3511296" cy="594360"/>
           </a:xfrm>
           <a:prstGeom prst="roundRect">
             <a:avLst/>
@@ -10940,8 +10940,8 @@
         </p:nvSpPr>
         <p:spPr>
           <a:xfrm>
-            <a:off x="777240" y="1289304"/>
-            <a:ext cx="3145536" cy="548640"/>
+            <a:off x="758952" y="1280160"/>
+            <a:ext cx="3182112" cy="521208"/>
           </a:xfrm>
           <a:prstGeom prst="rect">
             <a:avLst/>
@@ -10955,7 +10955,7 @@
           <a:lstStyle/>
           <a:p>
             <a:pPr>
-              <a:defRPr sz="1550" b="1">
+              <a:defRPr sz="1450" b="1">
                 <a:solidFill>
                   <a:srgbClr val="FFFFFF"/>
                 </a:solidFill>
@@ -10967,7 +10967,7 @@
           </a:p>
           <a:p>
             <a:pPr>
-              <a:defRPr sz="1000" b="1">
+              <a:defRPr sz="950" b="1">
                 <a:solidFill>
                   <a:srgbClr val="E0F2FE"/>
                 </a:solidFill>
@@ -10987,8 +10987,8 @@
         </p:nvSpPr>
         <p:spPr>
           <a:xfrm>
-            <a:off x="777240" y="1965960"/>
-            <a:ext cx="3145536" cy="4315968"/>
+            <a:off x="758952" y="1901952"/>
+            <a:ext cx="3182112" cy="4398264"/>
           </a:xfrm>
           <a:prstGeom prst="rect">
             <a:avLst/>
@@ -11003,9 +11003,9 @@
           <a:p>
             <a:pPr>
               <a:spcAft>
-                <a:spcPts val="1100"/>
-              </a:spcAft>
-              <a:defRPr sz="1300">
+                <a:spcPts val="1000"/>
+              </a:spcAft>
+              <a:defRPr sz="1250">
                 <a:solidFill>
                   <a:srgbClr val="0F172A"/>
                 </a:solidFill>
@@ -11018,9 +11018,9 @@
           <a:p>
             <a:pPr>
               <a:spcAft>
-                <a:spcPts val="1100"/>
-              </a:spcAft>
-              <a:defRPr sz="1300">
+                <a:spcPts val="1000"/>
+              </a:spcAft>
+              <a:defRPr sz="1250">
                 <a:solidFill>
                   <a:srgbClr val="0F172A"/>
                 </a:solidFill>
@@ -11033,9 +11033,9 @@
           <a:p>
             <a:pPr>
               <a:spcAft>
-                <a:spcPts val="1100"/>
-              </a:spcAft>
-              <a:defRPr sz="1300">
+                <a:spcPts val="1000"/>
+              </a:spcAft>
+              <a:defRPr sz="1250">
                 <a:solidFill>
                   <a:srgbClr val="0F172A"/>
                 </a:solidFill>
@@ -11048,9 +11048,9 @@
           <a:p>
             <a:pPr>
               <a:spcAft>
-                <a:spcPts val="1100"/>
-              </a:spcAft>
-              <a:defRPr sz="1300">
+                <a:spcPts val="1000"/>
+              </a:spcAft>
+              <a:defRPr sz="1250">
                 <a:solidFill>
                   <a:srgbClr val="0F172A"/>
                 </a:solidFill>
@@ -11063,9 +11063,9 @@
           <a:p>
             <a:pPr>
               <a:spcAft>
-                <a:spcPts val="1100"/>
-              </a:spcAft>
-              <a:defRPr sz="1300">
+                <a:spcPts val="1000"/>
+              </a:spcAft>
+              <a:defRPr sz="1250">
                 <a:solidFill>
                   <a:srgbClr val="0F172A"/>
                 </a:solidFill>
@@ -11078,9 +11078,9 @@
           <a:p>
             <a:pPr>
               <a:spcAft>
-                <a:spcPts val="1100"/>
-              </a:spcAft>
-              <a:defRPr sz="1300">
+                <a:spcPts val="1000"/>
+              </a:spcAft>
+              <a:defRPr sz="1250">
                 <a:solidFill>
                   <a:srgbClr val="0F172A"/>
                 </a:solidFill>
@@ -11146,7 +11146,7 @@
         <p:spPr>
           <a:xfrm>
             <a:off x="4325112" y="1234440"/>
-            <a:ext cx="3511296" cy="621792"/>
+            <a:ext cx="3511296" cy="594360"/>
           </a:xfrm>
           <a:prstGeom prst="roundRect">
             <a:avLst/>
@@ -11188,8 +11188,8 @@
         </p:nvSpPr>
         <p:spPr>
           <a:xfrm>
-            <a:off x="4507992" y="1289304"/>
-            <a:ext cx="3145536" cy="548640"/>
+            <a:off x="4489704" y="1280160"/>
+            <a:ext cx="3182112" cy="521208"/>
           </a:xfrm>
           <a:prstGeom prst="rect">
             <a:avLst/>
@@ -11203,7 +11203,7 @@
           <a:lstStyle/>
           <a:p>
             <a:pPr>
-              <a:defRPr sz="1550" b="1">
+              <a:defRPr sz="1450" b="1">
                 <a:solidFill>
                   <a:srgbClr val="FFFFFF"/>
                 </a:solidFill>
@@ -11215,7 +11215,7 @@
           </a:p>
           <a:p>
             <a:pPr>
-              <a:defRPr sz="1000" b="1">
+              <a:defRPr sz="950" b="1">
                 <a:solidFill>
                   <a:srgbClr val="E0F2FE"/>
                 </a:solidFill>
@@ -11235,8 +11235,8 @@
         </p:nvSpPr>
         <p:spPr>
           <a:xfrm>
-            <a:off x="4507992" y="1965960"/>
-            <a:ext cx="3145536" cy="4315968"/>
+            <a:off x="4489704" y="1901952"/>
+            <a:ext cx="3182112" cy="4398264"/>
           </a:xfrm>
           <a:prstGeom prst="rect">
             <a:avLst/>
@@ -11251,9 +11251,9 @@
           <a:p>
             <a:pPr>
               <a:spcAft>
-                <a:spcPts val="1100"/>
-              </a:spcAft>
-              <a:defRPr sz="1300">
+                <a:spcPts val="1000"/>
+              </a:spcAft>
+              <a:defRPr sz="1250">
                 <a:solidFill>
                   <a:srgbClr val="0F172A"/>
                 </a:solidFill>
@@ -11266,9 +11266,9 @@
           <a:p>
             <a:pPr>
               <a:spcAft>
-                <a:spcPts val="1100"/>
-              </a:spcAft>
-              <a:defRPr sz="1300">
+                <a:spcPts val="1000"/>
+              </a:spcAft>
+              <a:defRPr sz="1250">
                 <a:solidFill>
                   <a:srgbClr val="0F172A"/>
                 </a:solidFill>
@@ -11281,9 +11281,9 @@
           <a:p>
             <a:pPr>
               <a:spcAft>
-                <a:spcPts val="1100"/>
-              </a:spcAft>
-              <a:defRPr sz="1300">
+                <a:spcPts val="1000"/>
+              </a:spcAft>
+              <a:defRPr sz="1250">
                 <a:solidFill>
                   <a:srgbClr val="0F172A"/>
                 </a:solidFill>
@@ -11296,9 +11296,9 @@
           <a:p>
             <a:pPr>
               <a:spcAft>
-                <a:spcPts val="1100"/>
-              </a:spcAft>
-              <a:defRPr sz="1300">
+                <a:spcPts val="1000"/>
+              </a:spcAft>
+              <a:defRPr sz="1250">
                 <a:solidFill>
                   <a:srgbClr val="0F172A"/>
                 </a:solidFill>
@@ -11311,9 +11311,9 @@
           <a:p>
             <a:pPr>
               <a:spcAft>
-                <a:spcPts val="1100"/>
-              </a:spcAft>
-              <a:defRPr sz="1300">
+                <a:spcPts val="1000"/>
+              </a:spcAft>
+              <a:defRPr sz="1250">
                 <a:solidFill>
                   <a:srgbClr val="0F172A"/>
                 </a:solidFill>
@@ -11326,9 +11326,9 @@
           <a:p>
             <a:pPr>
               <a:spcAft>
-                <a:spcPts val="1100"/>
-              </a:spcAft>
-              <a:defRPr sz="1300">
+                <a:spcPts val="1000"/>
+              </a:spcAft>
+              <a:defRPr sz="1250">
                 <a:solidFill>
                   <a:srgbClr val="0F172A"/>
                 </a:solidFill>
@@ -11394,7 +11394,7 @@
         <p:spPr>
           <a:xfrm>
             <a:off x="8055864" y="1234440"/>
-            <a:ext cx="3511296" cy="621792"/>
+            <a:ext cx="3511296" cy="594360"/>
           </a:xfrm>
           <a:prstGeom prst="roundRect">
             <a:avLst/>
@@ -11436,8 +11436,8 @@
         </p:nvSpPr>
         <p:spPr>
           <a:xfrm>
-            <a:off x="8238744" y="1289304"/>
-            <a:ext cx="3145536" cy="548640"/>
+            <a:off x="8220456" y="1280160"/>
+            <a:ext cx="3182112" cy="521208"/>
           </a:xfrm>
           <a:prstGeom prst="rect">
             <a:avLst/>
@@ -11451,7 +11451,7 @@
           <a:lstStyle/>
           <a:p>
             <a:pPr>
-              <a:defRPr sz="1550" b="1">
+              <a:defRPr sz="1450" b="1">
                 <a:solidFill>
                   <a:srgbClr val="FFFFFF"/>
                 </a:solidFill>
@@ -11463,7 +11463,7 @@
           </a:p>
           <a:p>
             <a:pPr>
-              <a:defRPr sz="1000" b="1">
+              <a:defRPr sz="950" b="1">
                 <a:solidFill>
                   <a:srgbClr val="E0F2FE"/>
                 </a:solidFill>
@@ -11483,8 +11483,8 @@
         </p:nvSpPr>
         <p:spPr>
           <a:xfrm>
-            <a:off x="8238744" y="1965960"/>
-            <a:ext cx="3145536" cy="4315968"/>
+            <a:off x="8220456" y="1901952"/>
+            <a:ext cx="3182112" cy="4398264"/>
           </a:xfrm>
           <a:prstGeom prst="rect">
             <a:avLst/>
@@ -11499,9 +11499,9 @@
           <a:p>
             <a:pPr>
               <a:spcAft>
-                <a:spcPts val="1100"/>
-              </a:spcAft>
-              <a:defRPr sz="1300">
+                <a:spcPts val="1000"/>
+              </a:spcAft>
+              <a:defRPr sz="1250">
                 <a:solidFill>
                   <a:srgbClr val="0F172A"/>
                 </a:solidFill>
@@ -11514,9 +11514,9 @@
           <a:p>
             <a:pPr>
               <a:spcAft>
-                <a:spcPts val="1100"/>
-              </a:spcAft>
-              <a:defRPr sz="1300">
+                <a:spcPts val="1000"/>
+              </a:spcAft>
+              <a:defRPr sz="1250">
                 <a:solidFill>
                   <a:srgbClr val="0F172A"/>
                 </a:solidFill>
@@ -11529,9 +11529,9 @@
           <a:p>
             <a:pPr>
               <a:spcAft>
-                <a:spcPts val="1100"/>
-              </a:spcAft>
-              <a:defRPr sz="1300">
+                <a:spcPts val="1000"/>
+              </a:spcAft>
+              <a:defRPr sz="1250">
                 <a:solidFill>
                   <a:srgbClr val="0F172A"/>
                 </a:solidFill>
@@ -11544,9 +11544,9 @@
           <a:p>
             <a:pPr>
               <a:spcAft>
-                <a:spcPts val="1100"/>
-              </a:spcAft>
-              <a:defRPr sz="1300">
+                <a:spcPts val="1000"/>
+              </a:spcAft>
+              <a:defRPr sz="1250">
                 <a:solidFill>
                   <a:srgbClr val="0F172A"/>
                 </a:solidFill>
@@ -11559,9 +11559,9 @@
           <a:p>
             <a:pPr>
               <a:spcAft>
-                <a:spcPts val="1100"/>
-              </a:spcAft>
-              <a:defRPr sz="1300">
+                <a:spcPts val="1000"/>
+              </a:spcAft>
+              <a:defRPr sz="1250">
                 <a:solidFill>
                   <a:srgbClr val="0F172A"/>
                 </a:solidFill>
@@ -11574,9 +11574,9 @@
           <a:p>
             <a:pPr>
               <a:spcAft>
-                <a:spcPts val="1100"/>
-              </a:spcAft>
-              <a:defRPr sz="1300">
+                <a:spcPts val="1000"/>
+              </a:spcAft>
+              <a:defRPr sz="1250">
                 <a:solidFill>
                   <a:srgbClr val="0F172A"/>
                 </a:solidFill>
@@ -11743,8 +11743,8 @@
         </p:nvSpPr>
         <p:spPr>
           <a:xfrm>
-            <a:off x="7498079" y="164592"/>
-            <a:ext cx="4114800" cy="777240"/>
+            <a:off x="7132320" y="164592"/>
+            <a:ext cx="4480560" cy="777240"/>
           </a:xfrm>
           <a:prstGeom prst="rect">
             <a:avLst/>
@@ -11758,18 +11758,18 @@
           <a:lstStyle/>
           <a:p>
             <a:pPr algn="r">
-              <a:defRPr sz="1100" b="1">
+              <a:defRPr sz="1050" b="1">
                 <a:solidFill>
                   <a:srgbClr val="F97316"/>
                 </a:solidFill>
               </a:defRPr>
             </a:pPr>
             <a:r>
-              <a:t>SMART INDIA HACKATHON 2024</a:t>
+              <a:t>GUJARAT TECHNOLOGICAL UNIVERSITY</a:t>
             </a:r>
             <a:br/>
             <a:r>
-              <a:t>THEME: SMART EDUCATION / AUTOMATION</a:t>
+              <a:t>CAMPUS AUTOMATION &amp; STUDENT WELFARE</a:t>
             </a:r>
           </a:p>
         </p:txBody>
@@ -11783,7 +11783,7 @@
         <p:spPr>
           <a:xfrm>
             <a:off x="594360" y="201168"/>
-            <a:ext cx="6858000" cy="685800"/>
+            <a:ext cx="6583680" cy="685800"/>
           </a:xfrm>
           <a:prstGeom prst="rect">
             <a:avLst/>
@@ -11863,7 +11863,7 @@
         <p:spPr>
           <a:xfrm>
             <a:off x="594360" y="6510528"/>
-            <a:ext cx="7772400" cy="320040"/>
+            <a:ext cx="8046720" cy="320040"/>
           </a:xfrm>
           <a:prstGeom prst="rect">
             <a:avLst/>
@@ -11884,7 +11884,7 @@
               </a:defRPr>
             </a:pPr>
             <a:r>
-              <a:t>SIH 2024  |  Problem: GTU Notice Broadcast Automation  |  Team: GTU Innovators</a:t>
+              <a:t>GTU Circular &amp; Notification Alert System  |  Department of Computer / IT Engineering</a:t>
             </a:r>
           </a:p>
         </p:txBody>
@@ -11978,7 +11978,7 @@
         <p:spPr>
           <a:xfrm>
             <a:off x="594360" y="1234440"/>
-            <a:ext cx="3511296" cy="621792"/>
+            <a:ext cx="3511296" cy="594360"/>
           </a:xfrm>
           <a:prstGeom prst="roundRect">
             <a:avLst/>
@@ -12020,8 +12020,8 @@
         </p:nvSpPr>
         <p:spPr>
           <a:xfrm>
-            <a:off x="777240" y="1289304"/>
-            <a:ext cx="3145536" cy="548640"/>
+            <a:off x="758952" y="1280160"/>
+            <a:ext cx="3182112" cy="521208"/>
           </a:xfrm>
           <a:prstGeom prst="rect">
             <a:avLst/>
@@ -12035,7 +12035,7 @@
           <a:lstStyle/>
           <a:p>
             <a:pPr>
-              <a:defRPr sz="1550" b="1">
+              <a:defRPr sz="1450" b="1">
                 <a:solidFill>
                   <a:srgbClr val="FFFFFF"/>
                 </a:solidFill>
@@ -12047,7 +12047,7 @@
           </a:p>
           <a:p>
             <a:pPr>
-              <a:defRPr sz="1000" b="1">
+              <a:defRPr sz="950" b="1">
                 <a:solidFill>
                   <a:srgbClr val="E0F2FE"/>
                 </a:solidFill>
@@ -12067,8 +12067,8 @@
         </p:nvSpPr>
         <p:spPr>
           <a:xfrm>
-            <a:off x="777240" y="1965960"/>
-            <a:ext cx="3145536" cy="4315968"/>
+            <a:off x="758952" y="1901952"/>
+            <a:ext cx="3182112" cy="4398264"/>
           </a:xfrm>
           <a:prstGeom prst="rect">
             <a:avLst/>
@@ -12083,9 +12083,9 @@
           <a:p>
             <a:pPr>
               <a:spcAft>
-                <a:spcPts val="1100"/>
-              </a:spcAft>
-              <a:defRPr sz="1300">
+                <a:spcPts val="1000"/>
+              </a:spcAft>
+              <a:defRPr sz="1250">
                 <a:solidFill>
                   <a:srgbClr val="0F172A"/>
                 </a:solidFill>
@@ -12098,9 +12098,9 @@
           <a:p>
             <a:pPr>
               <a:spcAft>
-                <a:spcPts val="1100"/>
-              </a:spcAft>
-              <a:defRPr sz="1300">
+                <a:spcPts val="1000"/>
+              </a:spcAft>
+              <a:defRPr sz="1250">
                 <a:solidFill>
                   <a:srgbClr val="0F172A"/>
                 </a:solidFill>
@@ -12113,9 +12113,9 @@
           <a:p>
             <a:pPr>
               <a:spcAft>
-                <a:spcPts val="1100"/>
-              </a:spcAft>
-              <a:defRPr sz="1300">
+                <a:spcPts val="1000"/>
+              </a:spcAft>
+              <a:defRPr sz="1250">
                 <a:solidFill>
                   <a:srgbClr val="0F172A"/>
                 </a:solidFill>
@@ -12128,9 +12128,9 @@
           <a:p>
             <a:pPr>
               <a:spcAft>
-                <a:spcPts val="1100"/>
-              </a:spcAft>
-              <a:defRPr sz="1300">
+                <a:spcPts val="1000"/>
+              </a:spcAft>
+              <a:defRPr sz="1250">
                 <a:solidFill>
                   <a:srgbClr val="0F172A"/>
                 </a:solidFill>
@@ -12143,9 +12143,9 @@
           <a:p>
             <a:pPr>
               <a:spcAft>
-                <a:spcPts val="1100"/>
-              </a:spcAft>
-              <a:defRPr sz="1300">
+                <a:spcPts val="1000"/>
+              </a:spcAft>
+              <a:defRPr sz="1250">
                 <a:solidFill>
                   <a:srgbClr val="0F172A"/>
                 </a:solidFill>
@@ -12211,7 +12211,7 @@
         <p:spPr>
           <a:xfrm>
             <a:off x="4325112" y="1234440"/>
-            <a:ext cx="3511296" cy="621792"/>
+            <a:ext cx="3511296" cy="594360"/>
           </a:xfrm>
           <a:prstGeom prst="roundRect">
             <a:avLst/>
@@ -12253,8 +12253,8 @@
         </p:nvSpPr>
         <p:spPr>
           <a:xfrm>
-            <a:off x="4507992" y="1289304"/>
-            <a:ext cx="3145536" cy="548640"/>
+            <a:off x="4489704" y="1280160"/>
+            <a:ext cx="3182112" cy="521208"/>
           </a:xfrm>
           <a:prstGeom prst="rect">
             <a:avLst/>
@@ -12268,7 +12268,7 @@
           <a:lstStyle/>
           <a:p>
             <a:pPr>
-              <a:defRPr sz="1550" b="1">
+              <a:defRPr sz="1450" b="1">
                 <a:solidFill>
                   <a:srgbClr val="FFFFFF"/>
                 </a:solidFill>
@@ -12280,7 +12280,7 @@
           </a:p>
           <a:p>
             <a:pPr>
-              <a:defRPr sz="1000" b="1">
+              <a:defRPr sz="950" b="1">
                 <a:solidFill>
                   <a:srgbClr val="E0F2FE"/>
                 </a:solidFill>
@@ -12300,8 +12300,8 @@
         </p:nvSpPr>
         <p:spPr>
           <a:xfrm>
-            <a:off x="4507992" y="1965960"/>
-            <a:ext cx="3145536" cy="4315968"/>
+            <a:off x="4489704" y="1901952"/>
+            <a:ext cx="3182112" cy="4398264"/>
           </a:xfrm>
           <a:prstGeom prst="rect">
             <a:avLst/>
@@ -12316,9 +12316,9 @@
           <a:p>
             <a:pPr>
               <a:spcAft>
-                <a:spcPts val="1100"/>
-              </a:spcAft>
-              <a:defRPr sz="1300">
+                <a:spcPts val="1000"/>
+              </a:spcAft>
+              <a:defRPr sz="1250">
                 <a:solidFill>
                   <a:srgbClr val="0F172A"/>
                 </a:solidFill>
@@ -12331,9 +12331,9 @@
           <a:p>
             <a:pPr>
               <a:spcAft>
-                <a:spcPts val="1100"/>
-              </a:spcAft>
-              <a:defRPr sz="1300">
+                <a:spcPts val="1000"/>
+              </a:spcAft>
+              <a:defRPr sz="1250">
                 <a:solidFill>
                   <a:srgbClr val="0F172A"/>
                 </a:solidFill>
@@ -12346,9 +12346,9 @@
           <a:p>
             <a:pPr>
               <a:spcAft>
-                <a:spcPts val="1100"/>
-              </a:spcAft>
-              <a:defRPr sz="1300">
+                <a:spcPts val="1000"/>
+              </a:spcAft>
+              <a:defRPr sz="1250">
                 <a:solidFill>
                   <a:srgbClr val="0F172A"/>
                 </a:solidFill>
@@ -12361,9 +12361,9 @@
           <a:p>
             <a:pPr>
               <a:spcAft>
-                <a:spcPts val="1100"/>
-              </a:spcAft>
-              <a:defRPr sz="1300">
+                <a:spcPts val="1000"/>
+              </a:spcAft>
+              <a:defRPr sz="1250">
                 <a:solidFill>
                   <a:srgbClr val="0F172A"/>
                 </a:solidFill>
@@ -12376,9 +12376,9 @@
           <a:p>
             <a:pPr>
               <a:spcAft>
-                <a:spcPts val="1100"/>
-              </a:spcAft>
-              <a:defRPr sz="1300">
+                <a:spcPts val="1000"/>
+              </a:spcAft>
+              <a:defRPr sz="1250">
                 <a:solidFill>
                   <a:srgbClr val="0F172A"/>
                 </a:solidFill>
@@ -12444,7 +12444,7 @@
         <p:spPr>
           <a:xfrm>
             <a:off x="8055864" y="1234440"/>
-            <a:ext cx="3511296" cy="621792"/>
+            <a:ext cx="3511296" cy="594360"/>
           </a:xfrm>
           <a:prstGeom prst="roundRect">
             <a:avLst/>
@@ -12486,8 +12486,8 @@
         </p:nvSpPr>
         <p:spPr>
           <a:xfrm>
-            <a:off x="8238744" y="1289304"/>
-            <a:ext cx="3145536" cy="548640"/>
+            <a:off x="8220456" y="1280160"/>
+            <a:ext cx="3182112" cy="521208"/>
           </a:xfrm>
           <a:prstGeom prst="rect">
             <a:avLst/>
@@ -12501,26 +12501,26 @@
           <a:lstStyle/>
           <a:p>
             <a:pPr>
-              <a:defRPr sz="1550" b="1">
+              <a:defRPr sz="1450" b="1">
                 <a:solidFill>
                   <a:srgbClr val="FFFFFF"/>
                 </a:solidFill>
               </a:defRPr>
             </a:pPr>
             <a:r>
-              <a:t>National Mission Alignment</a:t>
-            </a:r>
-          </a:p>
-          <a:p>
-            <a:pPr>
-              <a:defRPr sz="1000" b="1">
+              <a:t>Digital Campus Alignment</a:t>
+            </a:r>
+          </a:p>
+          <a:p>
+            <a:pPr>
+              <a:defRPr sz="950" b="1">
                 <a:solidFill>
                   <a:srgbClr val="E0F2FE"/>
                 </a:solidFill>
               </a:defRPr>
             </a:pPr>
             <a:r>
-              <a:t>NATIONAL IMPACT</a:t>
+              <a:t>CAMPUS INNOVATION</a:t>
             </a:r>
           </a:p>
         </p:txBody>
@@ -12533,8 +12533,8 @@
         </p:nvSpPr>
         <p:spPr>
           <a:xfrm>
-            <a:off x="8238744" y="1965960"/>
-            <a:ext cx="3145536" cy="4315968"/>
+            <a:off x="8220456" y="1901952"/>
+            <a:ext cx="3182112" cy="4398264"/>
           </a:xfrm>
           <a:prstGeom prst="rect">
             <a:avLst/>
@@ -12549,9 +12549,9 @@
           <a:p>
             <a:pPr>
               <a:spcAft>
-                <a:spcPts val="1100"/>
-              </a:spcAft>
-              <a:defRPr sz="1300">
+                <a:spcPts val="1000"/>
+              </a:spcAft>
+              <a:defRPr sz="1250">
                 <a:solidFill>
                   <a:srgbClr val="0F172A"/>
                 </a:solidFill>
@@ -12564,9 +12564,9 @@
           <a:p>
             <a:pPr>
               <a:spcAft>
-                <a:spcPts val="1100"/>
-              </a:spcAft>
-              <a:defRPr sz="1300">
+                <a:spcPts val="1000"/>
+              </a:spcAft>
+              <a:defRPr sz="1250">
                 <a:solidFill>
                   <a:srgbClr val="0F172A"/>
                 </a:solidFill>
@@ -12579,39 +12579,39 @@
           <a:p>
             <a:pPr>
               <a:spcAft>
-                <a:spcPts val="1100"/>
-              </a:spcAft>
-              <a:defRPr sz="1300">
-                <a:solidFill>
-                  <a:srgbClr val="0F172A"/>
-                </a:solidFill>
-              </a:defRPr>
-            </a:pPr>
-            <a:r>
-              <a:t>•  Accessible India Campaign (Sugamya Bharat): Voice bulletins for disabled students.</a:t>
-            </a:r>
-          </a:p>
-          <a:p>
-            <a:pPr>
-              <a:spcAft>
-                <a:spcPts val="1100"/>
-              </a:spcAft>
-              <a:defRPr sz="1300">
-                <a:solidFill>
-                  <a:srgbClr val="0F172A"/>
-                </a:solidFill>
-              </a:defRPr>
-            </a:pPr>
-            <a:r>
-              <a:t>•  Atmanirbhar Bharat: 100% student-developed open-source university solution.</a:t>
-            </a:r>
-          </a:p>
-          <a:p>
-            <a:pPr>
-              <a:spcAft>
-                <a:spcPts val="1100"/>
-              </a:spcAft>
-              <a:defRPr sz="1300">
+                <a:spcPts val="1000"/>
+              </a:spcAft>
+              <a:defRPr sz="1250">
+                <a:solidFill>
+                  <a:srgbClr val="0F172A"/>
+                </a:solidFill>
+              </a:defRPr>
+            </a:pPr>
+            <a:r>
+              <a:t>•  Accessible Education: Voice bulletins for visually challenged students.</a:t>
+            </a:r>
+          </a:p>
+          <a:p>
+            <a:pPr>
+              <a:spcAft>
+                <a:spcPts val="1000"/>
+              </a:spcAft>
+              <a:defRPr sz="1250">
+                <a:solidFill>
+                  <a:srgbClr val="0F172A"/>
+                </a:solidFill>
+              </a:defRPr>
+            </a:pPr>
+            <a:r>
+              <a:t>•  Atmanirbhar Campus: 100% student-developed open-source university solution.</a:t>
+            </a:r>
+          </a:p>
+          <a:p>
+            <a:pPr>
+              <a:spcAft>
+                <a:spcPts val="1000"/>
+              </a:spcAft>
+              <a:defRPr sz="1250">
                 <a:solidFill>
                   <a:srgbClr val="0F172A"/>
                 </a:solidFill>
@@ -12778,8 +12778,8 @@
         </p:nvSpPr>
         <p:spPr>
           <a:xfrm>
-            <a:off x="7498079" y="164592"/>
-            <a:ext cx="4114800" cy="777240"/>
+            <a:off x="7132320" y="164592"/>
+            <a:ext cx="4480560" cy="777240"/>
           </a:xfrm>
           <a:prstGeom prst="rect">
             <a:avLst/>
@@ -12793,18 +12793,18 @@
           <a:lstStyle/>
           <a:p>
             <a:pPr algn="r">
-              <a:defRPr sz="1100" b="1">
+              <a:defRPr sz="1050" b="1">
                 <a:solidFill>
                   <a:srgbClr val="F97316"/>
                 </a:solidFill>
               </a:defRPr>
             </a:pPr>
             <a:r>
-              <a:t>SMART INDIA HACKATHON 2024</a:t>
+              <a:t>GUJARAT TECHNOLOGICAL UNIVERSITY</a:t>
             </a:r>
             <a:br/>
             <a:r>
-              <a:t>THEME: SMART EDUCATION / AUTOMATION</a:t>
+              <a:t>CAMPUS AUTOMATION &amp; STUDENT WELFARE</a:t>
             </a:r>
           </a:p>
         </p:txBody>
@@ -12818,7 +12818,7 @@
         <p:spPr>
           <a:xfrm>
             <a:off x="594360" y="201168"/>
-            <a:ext cx="6858000" cy="685800"/>
+            <a:ext cx="6583680" cy="685800"/>
           </a:xfrm>
           <a:prstGeom prst="rect">
             <a:avLst/>
@@ -12898,7 +12898,7 @@
         <p:spPr>
           <a:xfrm>
             <a:off x="594360" y="6510528"/>
-            <a:ext cx="7772400" cy="320040"/>
+            <a:ext cx="8046720" cy="320040"/>
           </a:xfrm>
           <a:prstGeom prst="rect">
             <a:avLst/>
@@ -12919,7 +12919,7 @@
               </a:defRPr>
             </a:pPr>
             <a:r>
-              <a:t>SIH 2024  |  Problem: GTU Notice Broadcast Automation  |  Team: GTU Innovators</a:t>
+              <a:t>GTU Circular &amp; Notification Alert System  |  Department of Computer / IT Engineering</a:t>
             </a:r>
           </a:p>
         </p:txBody>
@@ -13013,7 +13013,7 @@
         <p:spPr>
           <a:xfrm>
             <a:off x="594360" y="1234440"/>
-            <a:ext cx="5376672" cy="621792"/>
+            <a:ext cx="5376672" cy="594360"/>
           </a:xfrm>
           <a:prstGeom prst="roundRect">
             <a:avLst/>
@@ -13055,8 +13055,8 @@
         </p:nvSpPr>
         <p:spPr>
           <a:xfrm>
-            <a:off x="777240" y="1289304"/>
-            <a:ext cx="5010912" cy="548640"/>
+            <a:off x="758952" y="1280160"/>
+            <a:ext cx="5047488" cy="521208"/>
           </a:xfrm>
           <a:prstGeom prst="rect">
             <a:avLst/>
@@ -13070,7 +13070,7 @@
           <a:lstStyle/>
           <a:p>
             <a:pPr>
-              <a:defRPr sz="1550" b="1">
+              <a:defRPr sz="1450" b="1">
                 <a:solidFill>
                   <a:srgbClr val="FFFFFF"/>
                 </a:solidFill>
@@ -13082,7 +13082,7 @@
           </a:p>
           <a:p>
             <a:pPr>
-              <a:defRPr sz="1000" b="1">
+              <a:defRPr sz="950" b="1">
                 <a:solidFill>
                   <a:srgbClr val="E0F2FE"/>
                 </a:solidFill>
@@ -13102,8 +13102,8 @@
         </p:nvSpPr>
         <p:spPr>
           <a:xfrm>
-            <a:off x="777240" y="1965960"/>
-            <a:ext cx="5010912" cy="4315968"/>
+            <a:off x="758952" y="1901952"/>
+            <a:ext cx="5047488" cy="4398264"/>
           </a:xfrm>
           <a:prstGeom prst="rect">
             <a:avLst/>
@@ -13118,9 +13118,9 @@
           <a:p>
             <a:pPr>
               <a:spcAft>
-                <a:spcPts val="1100"/>
-              </a:spcAft>
-              <a:defRPr sz="1300">
+                <a:spcPts val="1000"/>
+              </a:spcAft>
+              <a:defRPr sz="1250">
                 <a:solidFill>
                   <a:srgbClr val="0F172A"/>
                 </a:solidFill>
@@ -13133,9 +13133,9 @@
           <a:p>
             <a:pPr>
               <a:spcAft>
-                <a:spcPts val="1100"/>
-              </a:spcAft>
-              <a:defRPr sz="1300">
+                <a:spcPts val="1000"/>
+              </a:spcAft>
+              <a:defRPr sz="1250">
                 <a:solidFill>
                   <a:srgbClr val="0F172A"/>
                 </a:solidFill>
@@ -13148,9 +13148,9 @@
           <a:p>
             <a:pPr>
               <a:spcAft>
-                <a:spcPts val="1100"/>
-              </a:spcAft>
-              <a:defRPr sz="1300">
+                <a:spcPts val="1000"/>
+              </a:spcAft>
+              <a:defRPr sz="1250">
                 <a:solidFill>
                   <a:srgbClr val="0F172A"/>
                 </a:solidFill>
@@ -13163,9 +13163,9 @@
           <a:p>
             <a:pPr>
               <a:spcAft>
-                <a:spcPts val="1100"/>
-              </a:spcAft>
-              <a:defRPr sz="1300">
+                <a:spcPts val="1000"/>
+              </a:spcAft>
+              <a:defRPr sz="1250">
                 <a:solidFill>
                   <a:srgbClr val="0F172A"/>
                 </a:solidFill>
@@ -13178,9 +13178,9 @@
           <a:p>
             <a:pPr>
               <a:spcAft>
-                <a:spcPts val="1100"/>
-              </a:spcAft>
-              <a:defRPr sz="1300">
+                <a:spcPts val="1000"/>
+              </a:spcAft>
+              <a:defRPr sz="1250">
                 <a:solidFill>
                   <a:srgbClr val="0F172A"/>
                 </a:solidFill>
@@ -13193,9 +13193,9 @@
           <a:p>
             <a:pPr>
               <a:spcAft>
-                <a:spcPts val="1100"/>
-              </a:spcAft>
-              <a:defRPr sz="1300">
+                <a:spcPts val="1000"/>
+              </a:spcAft>
+              <a:defRPr sz="1250">
                 <a:solidFill>
                   <a:srgbClr val="0F172A"/>
                 </a:solidFill>
@@ -13208,9 +13208,9 @@
           <a:p>
             <a:pPr>
               <a:spcAft>
-                <a:spcPts val="1100"/>
-              </a:spcAft>
-              <a:defRPr sz="1300">
+                <a:spcPts val="1000"/>
+              </a:spcAft>
+              <a:defRPr sz="1250">
                 <a:solidFill>
                   <a:srgbClr val="0F172A"/>
                 </a:solidFill>
@@ -13276,7 +13276,7 @@
         <p:spPr>
           <a:xfrm>
             <a:off x="6190488" y="1234440"/>
-            <a:ext cx="5376672" cy="621792"/>
+            <a:ext cx="5376672" cy="594360"/>
           </a:xfrm>
           <a:prstGeom prst="roundRect">
             <a:avLst/>
@@ -13318,8 +13318,8 @@
         </p:nvSpPr>
         <p:spPr>
           <a:xfrm>
-            <a:off x="6373368" y="1289304"/>
-            <a:ext cx="5010912" cy="548640"/>
+            <a:off x="6355080" y="1280160"/>
+            <a:ext cx="5047488" cy="521208"/>
           </a:xfrm>
           <a:prstGeom prst="rect">
             <a:avLst/>
@@ -13333,7 +13333,7 @@
           <a:lstStyle/>
           <a:p>
             <a:pPr>
-              <a:defRPr sz="1550" b="1">
+              <a:defRPr sz="1450" b="1">
                 <a:solidFill>
                   <a:srgbClr val="FFFFFF"/>
                 </a:solidFill>
@@ -13345,7 +13345,7 @@
           </a:p>
           <a:p>
             <a:pPr>
-              <a:defRPr sz="1000" b="1">
+              <a:defRPr sz="950" b="1">
                 <a:solidFill>
                   <a:srgbClr val="E0F2FE"/>
                 </a:solidFill>
@@ -13365,8 +13365,8 @@
         </p:nvSpPr>
         <p:spPr>
           <a:xfrm>
-            <a:off x="6373368" y="1965960"/>
-            <a:ext cx="5010912" cy="4315968"/>
+            <a:off x="6355080" y="1901952"/>
+            <a:ext cx="5047488" cy="4398264"/>
           </a:xfrm>
           <a:prstGeom prst="rect">
             <a:avLst/>
@@ -13381,9 +13381,9 @@
           <a:p>
             <a:pPr>
               <a:spcAft>
-                <a:spcPts val="1100"/>
-              </a:spcAft>
-              <a:defRPr sz="1300">
+                <a:spcPts val="1000"/>
+              </a:spcAft>
+              <a:defRPr sz="1250">
                 <a:solidFill>
                   <a:srgbClr val="0F172A"/>
                 </a:solidFill>
@@ -13396,9 +13396,9 @@
           <a:p>
             <a:pPr>
               <a:spcAft>
-                <a:spcPts val="1100"/>
-              </a:spcAft>
-              <a:defRPr sz="1300">
+                <a:spcPts val="1000"/>
+              </a:spcAft>
+              <a:defRPr sz="1250">
                 <a:solidFill>
                   <a:srgbClr val="0F172A"/>
                 </a:solidFill>
@@ -13411,9 +13411,9 @@
           <a:p>
             <a:pPr>
               <a:spcAft>
-                <a:spcPts val="1100"/>
-              </a:spcAft>
-              <a:defRPr sz="1300">
+                <a:spcPts val="1000"/>
+              </a:spcAft>
+              <a:defRPr sz="1250">
                 <a:solidFill>
                   <a:srgbClr val="0F172A"/>
                 </a:solidFill>
@@ -13426,9 +13426,9 @@
           <a:p>
             <a:pPr>
               <a:spcAft>
-                <a:spcPts val="1100"/>
-              </a:spcAft>
-              <a:defRPr sz="1300">
+                <a:spcPts val="1000"/>
+              </a:spcAft>
+              <a:defRPr sz="1250">
                 <a:solidFill>
                   <a:srgbClr val="0F172A"/>
                 </a:solidFill>
@@ -13441,9 +13441,9 @@
           <a:p>
             <a:pPr>
               <a:spcAft>
-                <a:spcPts val="1100"/>
-              </a:spcAft>
-              <a:defRPr sz="1300">
+                <a:spcPts val="1000"/>
+              </a:spcAft>
+              <a:defRPr sz="1250">
                 <a:solidFill>
                   <a:srgbClr val="0F172A"/>
                 </a:solidFill>
@@ -13456,9 +13456,9 @@
           <a:p>
             <a:pPr>
               <a:spcAft>
-                <a:spcPts val="1100"/>
-              </a:spcAft>
-              <a:defRPr sz="1300">
+                <a:spcPts val="1000"/>
+              </a:spcAft>
+              <a:defRPr sz="1250">
                 <a:solidFill>
                   <a:srgbClr val="0F172A"/>
                 </a:solidFill>
@@ -13471,9 +13471,9 @@
           <a:p>
             <a:pPr>
               <a:spcAft>
-                <a:spcPts val="1100"/>
-              </a:spcAft>
-              <a:defRPr sz="1300">
+                <a:spcPts val="1000"/>
+              </a:spcAft>
+              <a:defRPr sz="1250">
                 <a:solidFill>
                   <a:srgbClr val="0F172A"/>
                 </a:solidFill>

--- a/SIH2024_GTU_Alert_System_Presentation.pptx
+++ b/SIH2024_GTU_Alert_System_Presentation.pptx
@@ -7027,7 +7027,7 @@
               </a:defRPr>
             </a:pPr>
             <a:r>
-              <a:t>3. AI Summarizer &amp; Gujarati Localization</a:t>
+              <a:t>3. 'Ask GTU AI' &amp; Multilingual Intelligence</a:t>
             </a:r>
           </a:p>
         </p:txBody>
@@ -7065,7 +7065,7 @@
               </a:defRPr>
             </a:pPr>
             <a:r>
-              <a:t>•  Google Gemini AI summarizes complex notices into 2 clear sentences.</a:t>
+              <a:t>•  Google Gemini AI + Semantic Q&amp;A for natural language queries.</a:t>
             </a:r>
           </a:p>
           <a:p>
@@ -7080,7 +7080,7 @@
               </a:defRPr>
             </a:pPr>
             <a:r>
-              <a:t>•  Smart offline heuristic fallback ensures 100% zero downtime.</a:t>
+              <a:t>•  Ask GTU AI: Answers 'When is ME deadline?' or 'Pharmacy recheck'.</a:t>
             </a:r>
           </a:p>
           <a:p>
@@ -7110,7 +7110,7 @@
               </a:defRPr>
             </a:pPr>
             <a:r>
-              <a:t>•  Instantly highlights who needs to act, deadline date, and fee amount.</a:t>
+              <a:t>•  Instantly highlights action required, deadline date, and fee amount.</a:t>
             </a:r>
           </a:p>
         </p:txBody>
@@ -7233,7 +7233,7 @@
               </a:defRPr>
             </a:pPr>
             <a:r>
-              <a:t>4. Multi-Channel Accessibility &amp; Voice News</a:t>
+              <a:t>4. Multi-Channel Accessibility &amp; Live Web Dashboard</a:t>
             </a:r>
           </a:p>
         </p:txBody>
@@ -7271,7 +7271,7 @@
               </a:defRPr>
             </a:pPr>
             <a:r>
-              <a:t>•  Daily Voice Bulletin (30-sec MP3 audio briefing) for busy commuters.</a:t>
+              <a:t>•  Ask GTU AI Assistant with one-click suggestion chips on Web.</a:t>
             </a:r>
           </a:p>
           <a:p>
@@ -7286,6 +7286,21 @@
               </a:defRPr>
             </a:pPr>
             <a:r>
+              <a:t>•  Daily Voice Bulletin (30-sec MP3 audio briefing) for commuters.</a:t>
+            </a:r>
+          </a:p>
+          <a:p>
+            <a:pPr>
+              <a:spcAft>
+                <a:spcPts val="600"/>
+              </a:spcAft>
+              <a:defRPr sz="1200">
+                <a:solidFill>
+                  <a:srgbClr val="0F172A"/>
+                </a:solidFill>
+              </a:defRPr>
+            </a:pPr>
+            <a:r>
               <a:t>•  Modern PWA Web Dashboard with Live Search &amp; Stream Filters.</a:t>
             </a:r>
           </a:p>
@@ -7301,22 +7316,7 @@
               </a:defRPr>
             </a:pPr>
             <a:r>
-              <a:t>•  Offline Service Worker cache allows viewing without internet.</a:t>
-            </a:r>
-          </a:p>
-          <a:p>
-            <a:pPr>
-              <a:spcAft>
-                <a:spcPts val="600"/>
-              </a:spcAft>
-              <a:defRPr sz="1200">
-                <a:solidFill>
-                  <a:srgbClr val="0F172A"/>
-                </a:solidFill>
-              </a:defRPr>
-            </a:pPr>
-            <a:r>
-              <a:t>•  Zero-Cost Cloud Deployment via GitHub Pages &amp; GitHub Actions.</a:t>
+              <a:t>•  Zero-Cost 24/7 Cloud Deployment via GitHub Pages &amp; GitHub Actions.</a:t>
             </a:r>
           </a:p>
         </p:txBody>
@@ -8381,6 +8381,21 @@
               </a:defRPr>
             </a:pPr>
             <a:r>
+              <a:t>•  Ask GTU AI: Semantic search &amp; Q&amp;A engine</a:t>
+            </a:r>
+          </a:p>
+          <a:p>
+            <a:pPr>
+              <a:spcAft>
+                <a:spcPts val="1000"/>
+              </a:spcAft>
+              <a:defRPr sz="1200">
+                <a:solidFill>
+                  <a:srgbClr val="0F172A"/>
+                </a:solidFill>
+              </a:defRPr>
+            </a:pPr>
+            <a:r>
               <a:t>•  ai_summarizer.py: Gemini AI 1-line takeaways</a:t>
             </a:r>
           </a:p>
@@ -8427,21 +8442,6 @@
             </a:pPr>
             <a:r>
               <a:t>•  calendar_sync.py: .ics event creator</a:t>
-            </a:r>
-          </a:p>
-          <a:p>
-            <a:pPr>
-              <a:spcAft>
-                <a:spcPts val="1000"/>
-              </a:spcAft>
-              <a:defRPr sz="1200">
-                <a:solidFill>
-                  <a:srgbClr val="0F172A"/>
-                </a:solidFill>
-              </a:defRPr>
-            </a:pPr>
-            <a:r>
-              <a:t>•  pdf_inspector.py: Safe cached text stream</a:t>
             </a:r>
           </a:p>
         </p:txBody>
@@ -8629,7 +8629,7 @@
               </a:defRPr>
             </a:pPr>
             <a:r>
-              <a:t>•  Interactive 2-Way Bot (/latest, /search)</a:t>
+              <a:t>•  Interactive Bot (/ask, /latest, /search)</a:t>
             </a:r>
           </a:p>
           <a:p>
@@ -8644,6 +8644,21 @@
               </a:defRPr>
             </a:pPr>
             <a:r>
+              <a:t>•  Web AI Assistant (Client Semantic Q&amp;A)</a:t>
+            </a:r>
+          </a:p>
+          <a:p>
+            <a:pPr>
+              <a:spcAft>
+                <a:spcPts val="1000"/>
+              </a:spcAft>
+              <a:defRPr sz="1200">
+                <a:solidFill>
+                  <a:srgbClr val="0F172A"/>
+                </a:solidFill>
+              </a:defRPr>
+            </a:pPr>
+            <a:r>
               <a:t>•  Discord Webhook: Rich color embeds</a:t>
             </a:r>
           </a:p>
@@ -8660,21 +8675,6 @@
             </a:pPr>
             <a:r>
               <a:t>•  PWA Web Dashboard (web/index.html)</a:t>
-            </a:r>
-          </a:p>
-          <a:p>
-            <a:pPr>
-              <a:spcAft>
-                <a:spcPts val="1000"/>
-              </a:spcAft>
-              <a:defRPr sz="1200">
-                <a:solidFill>
-                  <a:srgbClr val="0F172A"/>
-                </a:solidFill>
-              </a:defRPr>
-            </a:pPr>
-            <a:r>
-              <a:t>•  Native voice notes delivery</a:t>
             </a:r>
           </a:p>
           <a:p>
@@ -9258,7 +9258,7 @@
               </a:defRPr>
             </a:pPr>
             <a:r>
-              <a:t>•  AI &amp; NLP: Google Gemini 1.5 Flash API + Regex Heuristic Engine</a:t>
+              <a:t>•  AI &amp; NLP: Google Gemini 1.5 Flash + Client-Side Semantic Q&amp;A</a:t>
             </a:r>
           </a:p>
           <a:p>
@@ -9318,7 +9318,7 @@
               </a:defRPr>
             </a:pPr>
             <a:r>
-              <a:t>•  CI/CD Automation: GitHub Actions (Scheduled Ubuntu Runner)</a:t>
+              <a:t>•  CI/CD Automation: GitHub Actions (Scheduled 15-Min Cloud Runner)</a:t>
             </a:r>
           </a:p>
           <a:p>
@@ -9333,7 +9333,7 @@
               </a:defRPr>
             </a:pPr>
             <a:r>
-              <a:t>•  Hosting: GitHub Pages (Static Serverless JSON Architecture)</a:t>
+              <a:t>•  Hosting: GitHub Pages (24/7 Zero-Cost Serverless Cloud)</a:t>
             </a:r>
           </a:p>
           <a:p>
@@ -9512,7 +9512,7 @@
           <a:p>
             <a:pPr>
               <a:spcAft>
-                <a:spcPts val="800"/>
+                <a:spcPts val="700"/>
               </a:spcAft>
               <a:defRPr sz="1250">
                 <a:solidFill>
@@ -9527,7 +9527,7 @@
           <a:p>
             <a:pPr>
               <a:spcAft>
-                <a:spcPts val="800"/>
+                <a:spcPts val="700"/>
               </a:spcAft>
               <a:defRPr sz="1250">
                 <a:solidFill>
@@ -9542,7 +9542,7 @@
           <a:p>
             <a:pPr>
               <a:spcAft>
-                <a:spcPts val="800"/>
+                <a:spcPts val="700"/>
               </a:spcAft>
               <a:defRPr sz="1250">
                 <a:solidFill>
@@ -9557,7 +9557,7 @@
           <a:p>
             <a:pPr>
               <a:spcAft>
-                <a:spcPts val="800"/>
+                <a:spcPts val="700"/>
               </a:spcAft>
               <a:defRPr sz="1250">
                 <a:solidFill>
@@ -9566,13 +9566,13 @@
               </a:defRPr>
             </a:pPr>
             <a:r>
-              <a:t>•  Unique Feature 1: Spoken Daily Voice Bulletin (audio news for accessibility).</a:t>
-            </a:r>
-          </a:p>
-          <a:p>
-            <a:pPr>
-              <a:spcAft>
-                <a:spcPts val="800"/>
+              <a:t>•  Unique Feature 1: 'Ask GTU AI' natural language Q&amp;A (Web &amp; Telegram).</a:t>
+            </a:r>
+          </a:p>
+          <a:p>
+            <a:pPr>
+              <a:spcAft>
+                <a:spcPts val="700"/>
               </a:spcAft>
               <a:defRPr sz="1250">
                 <a:solidFill>
@@ -9581,13 +9581,13 @@
               </a:defRPr>
             </a:pPr>
             <a:r>
-              <a:t>•  Unique Feature 2: Automated Penalty &amp; Deadline Extractor with Calendar Sync (.ics).</a:t>
-            </a:r>
-          </a:p>
-          <a:p>
-            <a:pPr>
-              <a:spcAft>
-                <a:spcPts val="800"/>
+              <a:t>•  Unique Feature 2: 24/7 Cloud Autonomous Operation (Zero PC dependency).</a:t>
+            </a:r>
+          </a:p>
+          <a:p>
+            <a:pPr>
+              <a:spcAft>
+                <a:spcPts val="700"/>
               </a:spcAft>
               <a:defRPr sz="1250">
                 <a:solidFill>
@@ -9596,13 +9596,13 @@
               </a:defRPr>
             </a:pPr>
             <a:r>
-              <a:t>•  Unique Feature 3: Serverless Zero-Cost Operation (Runs forever on GitHub free tier).</a:t>
-            </a:r>
-          </a:p>
-          <a:p>
-            <a:pPr>
-              <a:spcAft>
-                <a:spcPts val="800"/>
+              <a:t>•  Unique Feature 3: Spoken Daily Voice Bulletin (audio news for accessibility).</a:t>
+            </a:r>
+          </a:p>
+          <a:p>
+            <a:pPr>
+              <a:spcAft>
+                <a:spcPts val="700"/>
               </a:spcAft>
               <a:defRPr sz="1250">
                 <a:solidFill>
@@ -9611,13 +9611,13 @@
               </a:defRPr>
             </a:pPr>
             <a:r>
-              <a:t>•  Unique Feature 4: 100% Strict Student Privacy (Zero credentials or personal data stored).</a:t>
-            </a:r>
-          </a:p>
-          <a:p>
-            <a:pPr>
-              <a:spcAft>
-                <a:spcPts val="800"/>
+              <a:t>•  Unique Feature 4: Automated Penalty &amp; Deadline Extractor with Calendar Sync.</a:t>
+            </a:r>
+          </a:p>
+          <a:p>
+            <a:pPr>
+              <a:spcAft>
+                <a:spcPts val="700"/>
               </a:spcAft>
               <a:defRPr sz="1250">
                 <a:solidFill>
@@ -9626,7 +9626,22 @@
               </a:defRPr>
             </a:pPr>
             <a:r>
-              <a:t>•  Unique Feature 5: Offline PWA works without active internet connectivity.</a:t>
+              <a:t>•  Unique Feature 5: 100% Strict Student Privacy (Zero credentials stored).</a:t>
+            </a:r>
+          </a:p>
+          <a:p>
+            <a:pPr>
+              <a:spcAft>
+                <a:spcPts val="700"/>
+              </a:spcAft>
+              <a:defRPr sz="1250">
+                <a:solidFill>
+                  <a:srgbClr val="0F172A"/>
+                </a:solidFill>
+              </a:defRPr>
+            </a:pPr>
+            <a:r>
+              <a:t>•  Unique Feature 6: Offline PWA works without active internet connectivity.</a:t>
             </a:r>
           </a:p>
         </p:txBody>
@@ -13127,6 +13142,21 @@
               </a:defRPr>
             </a:pPr>
             <a:r>
+              <a:t>•  Command: /ask &lt;query&gt; ➔ Ask GTU AI natural language Q&amp;A engine.</a:t>
+            </a:r>
+          </a:p>
+          <a:p>
+            <a:pPr>
+              <a:spcAft>
+                <a:spcPts val="1000"/>
+              </a:spcAft>
+              <a:defRPr sz="1250">
+                <a:solidFill>
+                  <a:srgbClr val="0F172A"/>
+                </a:solidFill>
+              </a:defRPr>
+            </a:pPr>
+            <a:r>
               <a:t>•  Command: /latest ➔ Instantly delivers latest 5 circulars with direct PDF links.</a:t>
             </a:r>
           </a:p>
@@ -13157,7 +13187,7 @@
               </a:defRPr>
             </a:pPr>
             <a:r>
-              <a:t>•  Command: /filter &lt;course&gt; ➔ Shows notices tailored to BE, Diploma, or MBA.</a:t>
+              <a:t>•  Command: /subscribe &lt;course&gt; ➔ Tailored stream alerts (BE, Diploma, MBA).</a:t>
             </a:r>
           </a:p>
           <a:p>
@@ -13172,7 +13202,7 @@
               </a:defRPr>
             </a:pPr>
             <a:r>
-              <a:t>•  Command: /summary ➔ Delivers AI-generated 1-minute briefing of today's circulars.</a:t>
+              <a:t>•  Command: /voice ➔ Sends 30-second audio news podcast directly in chat.</a:t>
             </a:r>
           </a:p>
           <a:p>
@@ -13187,22 +13217,7 @@
               </a:defRPr>
             </a:pPr>
             <a:r>
-              <a:t>•  Command: /voice ➔ Sends 30-second audio news podcast directly in chat.</a:t>
-            </a:r>
-          </a:p>
-          <a:p>
-            <a:pPr>
-              <a:spcAft>
-                <a:spcPts val="1000"/>
-              </a:spcAft>
-              <a:defRPr sz="1250">
-                <a:solidFill>
-                  <a:srgbClr val="0F172A"/>
-                </a:solidFill>
-              </a:defRPr>
-            </a:pPr>
-            <a:r>
-              <a:t>•  Demonstrates sub-second response time and zero user registration friction.</a:t>
+              <a:t>•  Sub-second response time and zero user registration friction.</a:t>
             </a:r>
           </a:p>
           <a:p>
@@ -13390,22 +13405,22 @@
               </a:defRPr>
             </a:pPr>
             <a:r>
+              <a:t>•  ✨ Ask GTU AI Assistant: Interactive Q&amp;A bar with instant citations &amp; +Cal sync.</a:t>
+            </a:r>
+          </a:p>
+          <a:p>
+            <a:pPr>
+              <a:spcAft>
+                <a:spcPts val="1000"/>
+              </a:spcAft>
+              <a:defRPr sz="1250">
+                <a:solidFill>
+                  <a:srgbClr val="0F172A"/>
+                </a:solidFill>
+              </a:defRPr>
+            </a:pPr>
+            <a:r>
               <a:t>•  Interactive Dashboard: Live search, stream dropdowns, date sorting.</a:t>
-            </a:r>
-          </a:p>
-          <a:p>
-            <a:pPr>
-              <a:spcAft>
-                <a:spcPts val="1000"/>
-              </a:spcAft>
-              <a:defRPr sz="1250">
-                <a:solidFill>
-                  <a:srgbClr val="0F172A"/>
-                </a:solidFill>
-              </a:defRPr>
-            </a:pPr>
-            <a:r>
-              <a:t>•  Dark &amp; Light Mode: Clean glassmorphism styling with persistent state.</a:t>
             </a:r>
           </a:p>
           <a:p>
